--- a/가격정책/결제경로_카페인컬러.pptx
+++ b/가격정책/결제경로_카페인컬러.pptx
@@ -1,26 +1,29 @@
 
 <file path=ppt/presentation.xml><?xml version="1.0" encoding="utf-8"?>
-<p:presentation xmlns:a="http://schemas.openxmlformats.org/drawingml/2006/main" xmlns:r="http://schemas.openxmlformats.org/officeDocument/2006/relationships" xmlns:p="http://schemas.openxmlformats.org/presentationml/2006/main" saveSubsetFonts="1" autoCompressPictures="0">
+<p:presentation xmlns:r="http://schemas.openxmlformats.org/officeDocument/2006/relationships" xmlns:c="http://schemas.openxmlformats.org/drawingml/2006/chart" xmlns:a="http://schemas.openxmlformats.org/drawingml/2006/main" xmlns:dgm="http://schemas.openxmlformats.org/drawingml/2006/diagram" xmlns:dsp="http://schemas.microsoft.com/office/drawing/2008/diagram" xmlns:p="http://schemas.openxmlformats.org/presentationml/2006/main" autoCompressPictures="0">
   <p:sldMasterIdLst>
     <p:sldMasterId id="2147483648" r:id="rId1"/>
   </p:sldMasterIdLst>
+  <p:notesMasterIdLst>
+    <p:notesMasterId r:id="rId2"/>
+  </p:notesMasterIdLst>
   <p:sldIdLst>
-    <p:sldId id="256" r:id="rId2"/>
-    <p:sldId id="257" r:id="rId3"/>
-    <p:sldId id="258" r:id="rId4"/>
-    <p:sldId id="259" r:id="rId5"/>
-    <p:sldId id="260" r:id="rId6"/>
-    <p:sldId id="261" r:id="rId7"/>
-    <p:sldId id="262" r:id="rId8"/>
-    <p:sldId id="263" r:id="rId9"/>
-    <p:sldId id="264" r:id="rId10"/>
-    <p:sldId id="265" r:id="rId11"/>
-    <p:sldId id="266" r:id="rId12"/>
-    <p:sldId id="267" r:id="rId13"/>
+    <p:sldId id="256" r:id="rId3"/>
+    <p:sldId id="257" r:id="rId4"/>
+    <p:sldId id="258" r:id="rId5"/>
+    <p:sldId id="259" r:id="rId6"/>
+    <p:sldId id="260" r:id="rId7"/>
+    <p:sldId id="261" r:id="rId8"/>
+    <p:sldId id="262" r:id="rId9"/>
+    <p:sldId id="263" r:id="rId10"/>
+    <p:sldId id="269" r:id="rId11"/>
+    <p:sldId id="270" r:id="rId12"/>
+    <p:sldId id="264" r:id="rId13"/>
+    <p:sldId id="265" r:id="rId14"/>
+    <p:sldId id="266" r:id="rId15"/>
+    <p:sldId id="268" r:id="rId16"/>
+    <p:sldId id="267" r:id="rId17"/>
   </p:sldIdLst>
-  <p:notesMasterIdLst>
-    <p:notesMasterId r:id="rId14"/>
-  </p:notesMasterIdLst>
   <p:sldSz cx="9144000" cy="5143500"/>
   <p:notesSz cx="5143500" cy="9144000"/>
   <p:defaultTextStyle>
@@ -119,7 +122,7 @@
 </file>
 
 <file path=ppt/notesMasters/notesMaster1.xml><?xml version="1.0" encoding="utf-8"?>
-<p:notesMaster xmlns:a="http://schemas.openxmlformats.org/drawingml/2006/main" xmlns:r="http://schemas.openxmlformats.org/officeDocument/2006/relationships" xmlns:p="http://schemas.openxmlformats.org/presentationml/2006/main">
+<p:notesMaster xmlns:r="http://schemas.openxmlformats.org/officeDocument/2006/relationships" xmlns:c="http://schemas.openxmlformats.org/drawingml/2006/chart" xmlns:a="http://schemas.openxmlformats.org/drawingml/2006/main" xmlns:dgm="http://schemas.openxmlformats.org/drawingml/2006/diagram" xmlns:dsp="http://schemas.microsoft.com/office/drawing/2008/diagram" xmlns:p="http://schemas.openxmlformats.org/presentationml/2006/main">
   <p:cSld>
     <p:bg>
       <p:bgRef idx="1001">
@@ -147,7 +150,7 @@
             <a:spLocks noGrp="1"/>
           </p:cNvSpPr>
           <p:nvPr>
-            <p:ph type="hdr" sz="quarter"/>
+            <p:ph type="hdr" sz="quarter" idx="0"/>
           </p:nvPr>
         </p:nvSpPr>
         <p:spPr>
@@ -160,13 +163,16 @@
           </a:prstGeom>
         </p:spPr>
         <p:txBody>
-          <a:bodyPr vert="horz" lIns="91440" tIns="45720" rIns="91440" bIns="45720" rtlCol="0"/>
+          <a:bodyPr vert="horz" lIns="91440" tIns="45720" rIns="91440" bIns="45720"/>
           <a:lstStyle>
             <a:lvl1pPr algn="l">
               <a:defRPr sz="1200"/>
             </a:lvl1pPr>
           </a:lstStyle>
           <a:p>
+            <a:pPr lvl="0">
+              <a:defRPr/>
+            </a:pPr>
             <a:endParaRPr lang="en-US"/>
           </a:p>
         </p:txBody>
@@ -191,16 +197,22 @@
           </a:prstGeom>
         </p:spPr>
         <p:txBody>
-          <a:bodyPr vert="horz" lIns="91440" tIns="45720" rIns="91440" bIns="45720" rtlCol="0"/>
+          <a:bodyPr vert="horz" lIns="91440" tIns="45720" rIns="91440" bIns="45720"/>
           <a:lstStyle>
             <a:lvl1pPr algn="r">
               <a:defRPr sz="1200"/>
             </a:lvl1pPr>
           </a:lstStyle>
           <a:p>
-            <a:fld id="{5282F153-3F37-0F45-9E97-73ACFA13230C}" type="datetimeFigureOut">
+            <a:pPr lvl="0">
+              <a:defRPr/>
+            </a:pPr>
+            <a:fld id="{5282F153-3F37-0F45-9E97-73ACFA13230C}" type="datetime1">
               <a:rPr lang="en-US"/>
-              <a:t>7/23/19</a:t>
+              <a:pPr lvl="0">
+                <a:defRPr/>
+              </a:pPr>
+              <a:t>8/9/2026</a:t>
             </a:fld>
             <a:endParaRPr lang="en-US"/>
           </a:p>
@@ -210,7 +222,7 @@
         <p:nvSpPr>
           <p:cNvPr id="4" name="Slide Image Placeholder 3"/>
           <p:cNvSpPr>
-            <a:spLocks noGrp="1" noRot="1" noChangeAspect="1"/>
+            <a:spLocks noGrp="1" noRot="1" noChangeAspect="1" noTextEdit="1"/>
           </p:cNvSpPr>
           <p:nvPr>
             <p:ph type="sldImg" idx="2"/>
@@ -232,9 +244,12 @@
           </a:ln>
         </p:spPr>
         <p:txBody>
-          <a:bodyPr vert="horz" lIns="91440" tIns="45720" rIns="91440" bIns="45720" rtlCol="0" anchor="ctr"/>
-          <a:lstStyle/>
-          <a:p>
+          <a:bodyPr vert="horz" lIns="91440" tIns="45720" rIns="91440" bIns="45720" anchor="ctr"/>
+          <a:lstStyle/>
+          <a:p>
+            <a:pPr lvl="0">
+              <a:defRPr/>
+            </a:pPr>
             <a:endParaRPr lang="en-US"/>
           </a:p>
         </p:txBody>
@@ -259,42 +274,57 @@
           </a:prstGeom>
         </p:spPr>
         <p:txBody>
-          <a:bodyPr vert="horz" lIns="91440" tIns="45720" rIns="91440" bIns="45720" rtlCol="0"/>
-          <a:lstStyle/>
-          <a:p>
-            <a:pPr lvl="0"/>
+          <a:bodyPr vert="horz" lIns="91440" tIns="45720" rIns="91440" bIns="45720"/>
+          <a:lstStyle/>
+          <a:p>
+            <a:pPr lvl="0">
+              <a:defRPr/>
+            </a:pPr>
             <a:r>
               <a:rPr lang="en-US"/>
               <a:t>Click to edit Master text styles</a:t>
             </a:r>
-          </a:p>
-          <a:p>
-            <a:pPr lvl="1"/>
+            <a:endParaRPr lang="en-US"/>
+          </a:p>
+          <a:p>
+            <a:pPr lvl="1">
+              <a:defRPr/>
+            </a:pPr>
             <a:r>
               <a:rPr lang="en-US"/>
               <a:t>Second level</a:t>
             </a:r>
-          </a:p>
-          <a:p>
-            <a:pPr lvl="2"/>
+            <a:endParaRPr lang="en-US"/>
+          </a:p>
+          <a:p>
+            <a:pPr lvl="2">
+              <a:defRPr/>
+            </a:pPr>
             <a:r>
               <a:rPr lang="en-US"/>
               <a:t>Third level</a:t>
             </a:r>
-          </a:p>
-          <a:p>
-            <a:pPr lvl="3"/>
+            <a:endParaRPr lang="en-US"/>
+          </a:p>
+          <a:p>
+            <a:pPr lvl="3">
+              <a:defRPr/>
+            </a:pPr>
             <a:r>
               <a:rPr lang="en-US"/>
               <a:t>Fourth level</a:t>
             </a:r>
-          </a:p>
-          <a:p>
-            <a:pPr lvl="4"/>
+            <a:endParaRPr lang="en-US"/>
+          </a:p>
+          <a:p>
+            <a:pPr lvl="4">
+              <a:defRPr/>
+            </a:pPr>
             <a:r>
               <a:rPr lang="en-US"/>
               <a:t>Fifth level</a:t>
             </a:r>
+            <a:endParaRPr lang="en-US"/>
           </a:p>
         </p:txBody>
       </p:sp>
@@ -318,13 +348,16 @@
           </a:prstGeom>
         </p:spPr>
         <p:txBody>
-          <a:bodyPr vert="horz" lIns="91440" tIns="45720" rIns="91440" bIns="45720" rtlCol="0" anchor="b"/>
+          <a:bodyPr vert="horz" lIns="91440" tIns="45720" rIns="91440" bIns="45720" anchor="b"/>
           <a:lstStyle>
             <a:lvl1pPr algn="l">
               <a:defRPr sz="1200"/>
             </a:lvl1pPr>
           </a:lstStyle>
           <a:p>
+            <a:pPr lvl="0">
+              <a:defRPr/>
+            </a:pPr>
             <a:endParaRPr lang="en-US"/>
           </a:p>
         </p:txBody>
@@ -349,15 +382,21 @@
           </a:prstGeom>
         </p:spPr>
         <p:txBody>
-          <a:bodyPr vert="horz" lIns="91440" tIns="45720" rIns="91440" bIns="45720" rtlCol="0" anchor="b"/>
+          <a:bodyPr vert="horz" lIns="91440" tIns="45720" rIns="91440" bIns="45720" anchor="b"/>
           <a:lstStyle>
             <a:lvl1pPr algn="r">
               <a:defRPr sz="1200"/>
             </a:lvl1pPr>
           </a:lstStyle>
           <a:p>
+            <a:pPr lvl="0">
+              <a:defRPr/>
+            </a:pPr>
             <a:fld id="{CE5E9CC1-C706-0F49-92D6-E571CC5EEA8F}" type="slidenum">
               <a:rPr lang="en-US"/>
+              <a:pPr lvl="0">
+                <a:defRPr/>
+              </a:pPr>
               <a:t>‹#›</a:t>
             </a:fld>
             <a:endParaRPr lang="en-US"/>
@@ -372,6 +411,7 @@
     </p:extLst>
   </p:cSld>
   <p:clrMap bg1="lt1" tx1="dk1" bg2="lt2" tx2="dk2" accent1="accent1" accent2="accent2" accent3="accent3" accent4="accent4" accent5="accent5" accent6="accent6" hlink="hlink" folHlink="folHlink"/>
+  <p:hf hdr="0" ftr="0" dt="0"/>
   <p:notesStyle>
     <a:lvl1pPr marL="0" algn="l" defTabSz="914400" rtl="0" eaLnBrk="1" latinLnBrk="0" hangingPunct="1">
       <a:defRPr sz="1200" kern="1200">
@@ -556,7 +596,7 @@
 </file>
 
 <file path=ppt/notesSlides/notesSlide10.xml><?xml version="1.0" encoding="utf-8"?>
-<p:notes xmlns:a="http://schemas.openxmlformats.org/drawingml/2006/main" xmlns:r="http://schemas.openxmlformats.org/officeDocument/2006/relationships" xmlns:p="http://schemas.openxmlformats.org/presentationml/2006/main">
+<p:notes xmlns:r="http://schemas.openxmlformats.org/officeDocument/2006/relationships" xmlns:c="http://schemas.openxmlformats.org/drawingml/2006/chart" xmlns:a="http://schemas.openxmlformats.org/drawingml/2006/main" xmlns:dgm="http://schemas.openxmlformats.org/drawingml/2006/diagram" xmlns:dsp="http://schemas.microsoft.com/office/drawing/2008/diagram" xmlns:p="http://schemas.openxmlformats.org/presentationml/2006/main">
   <p:cSld>
     <p:spTree>
       <p:nvGrpSpPr>
@@ -576,10 +616,10 @@
         <p:nvSpPr>
           <p:cNvPr id="2" name="Slide Image Placeholder 1"/>
           <p:cNvSpPr>
-            <a:spLocks noGrp="1" noRot="1" noChangeAspect="1"/>
+            <a:spLocks noGrp="1" noRot="1" noChangeAspect="1" noTextEdit="1"/>
           </p:cNvSpPr>
           <p:nvPr>
-            <p:ph type="sldImg"/>
+            <p:ph type="sldImg" idx="0"/>
           </p:nvPr>
         </p:nvSpPr>
         <p:spPr/>
@@ -599,11 +639,14 @@
           <a:bodyPr/>
           <a:lstStyle/>
           <a:p>
-            <a:r>
-              <a:rPr lang="en-US" dirty="0"/>
+            <a:pPr lvl="0">
+              <a:defRPr/>
+            </a:pPr>
+            <a:r>
+              <a:rPr lang="ko-KR" altLang="en-US"/>
               <a:t/>
             </a:r>
-            <a:endParaRPr lang="en-US" dirty="0"/>
+            <a:endParaRPr lang="ko-KR" altLang="en-US"/>
           </a:p>
         </p:txBody>
       </p:sp>
@@ -622,6 +665,7 @@
           <a:bodyPr/>
           <a:lstStyle/>
           <a:p>
+            <a:pPr lvl="0"/>
             <a:fld id="{F7021451-1387-4CA6-816F-3879F97B5CBC}" type="slidenum">
               <a:rPr lang="en-US"/>
               <a:t>10</a:t>
@@ -633,7 +677,7 @@
     </p:spTree>
     <p:extLst>
       <p:ext uri="{BB962C8B-B14F-4D97-AF65-F5344CB8AC3E}">
-        <p14:creationId xmlns:p14="http://schemas.microsoft.com/office/powerpoint/2010/main" val="1024086991"/>
+        <p14:creationId xmlns:p14="http://schemas.microsoft.com/office/powerpoint/2010/main" val="2571065391"/>
       </p:ext>
     </p:extLst>
   </p:cSld>
@@ -712,7 +756,7 @@
           <a:p>
             <a:fld id="{F7021451-1387-4CA6-816F-3879F97B5CBC}" type="slidenum">
               <a:rPr lang="en-US"/>
-              <a:t>11</a:t>
+              <a:t>9</a:t>
             </a:fld>
             <a:endParaRPr lang="en-US"/>
           </a:p>
@@ -800,6 +844,274 @@
           <a:p>
             <a:fld id="{F7021451-1387-4CA6-816F-3879F97B5CBC}" type="slidenum">
               <a:rPr lang="en-US"/>
+              <a:t>10</a:t>
+            </a:fld>
+            <a:endParaRPr lang="en-US"/>
+          </a:p>
+        </p:txBody>
+      </p:sp>
+    </p:spTree>
+    <p:extLst>
+      <p:ext uri="{BB962C8B-B14F-4D97-AF65-F5344CB8AC3E}">
+        <p14:creationId xmlns:p14="http://schemas.microsoft.com/office/powerpoint/2010/main" val="1024086991"/>
+      </p:ext>
+    </p:extLst>
+  </p:cSld>
+  <p:clrMapOvr>
+    <a:masterClrMapping/>
+  </p:clrMapOvr>
+</p:notes>
+</file>
+
+<file path=ppt/notesSlides/notesSlide13.xml><?xml version="1.0" encoding="utf-8"?>
+<p:notes xmlns:a="http://schemas.openxmlformats.org/drawingml/2006/main" xmlns:r="http://schemas.openxmlformats.org/officeDocument/2006/relationships" xmlns:p="http://schemas.openxmlformats.org/presentationml/2006/main">
+  <p:cSld>
+    <p:spTree>
+      <p:nvGrpSpPr>
+        <p:cNvPr id="1" name=""/>
+        <p:cNvGrpSpPr/>
+        <p:nvPr/>
+      </p:nvGrpSpPr>
+      <p:grpSpPr>
+        <a:xfrm>
+          <a:off x="0" y="0"/>
+          <a:ext cx="0" cy="0"/>
+          <a:chOff x="0" y="0"/>
+          <a:chExt cx="0" cy="0"/>
+        </a:xfrm>
+      </p:grpSpPr>
+      <p:sp>
+        <p:nvSpPr>
+          <p:cNvPr id="2" name="Slide Image Placeholder 1"/>
+          <p:cNvSpPr>
+            <a:spLocks noGrp="1" noRot="1" noChangeAspect="1"/>
+          </p:cNvSpPr>
+          <p:nvPr>
+            <p:ph type="sldImg"/>
+          </p:nvPr>
+        </p:nvSpPr>
+        <p:spPr/>
+      </p:sp>
+      <p:sp>
+        <p:nvSpPr>
+          <p:cNvPr id="3" name="Notes Placeholder 2"/>
+          <p:cNvSpPr>
+            <a:spLocks noGrp="1"/>
+          </p:cNvSpPr>
+          <p:nvPr>
+            <p:ph type="body" idx="1"/>
+          </p:nvPr>
+        </p:nvSpPr>
+        <p:spPr/>
+        <p:txBody>
+          <a:bodyPr/>
+          <a:lstStyle/>
+          <a:p>
+            <a:r>
+              <a:rPr lang="en-US" dirty="0"/>
+              <a:t/>
+            </a:r>
+            <a:endParaRPr lang="en-US" dirty="0"/>
+          </a:p>
+        </p:txBody>
+      </p:sp>
+      <p:sp>
+        <p:nvSpPr>
+          <p:cNvPr id="4" name="Slide Number Placeholder 3"/>
+          <p:cNvSpPr>
+            <a:spLocks noGrp="1"/>
+          </p:cNvSpPr>
+          <p:nvPr>
+            <p:ph type="sldNum" sz="quarter" idx="10"/>
+          </p:nvPr>
+        </p:nvSpPr>
+        <p:spPr/>
+        <p:txBody>
+          <a:bodyPr/>
+          <a:lstStyle/>
+          <a:p>
+            <a:fld id="{F7021451-1387-4CA6-816F-3879F97B5CBC}" type="slidenum">
+              <a:rPr lang="en-US"/>
+              <a:t>11</a:t>
+            </a:fld>
+            <a:endParaRPr lang="en-US"/>
+          </a:p>
+        </p:txBody>
+      </p:sp>
+    </p:spTree>
+    <p:extLst>
+      <p:ext uri="{BB962C8B-B14F-4D97-AF65-F5344CB8AC3E}">
+        <p14:creationId xmlns:p14="http://schemas.microsoft.com/office/powerpoint/2010/main" val="1024086991"/>
+      </p:ext>
+    </p:extLst>
+  </p:cSld>
+  <p:clrMapOvr>
+    <a:masterClrMapping/>
+  </p:clrMapOvr>
+</p:notes>
+</file>
+
+<file path=ppt/notesSlides/notesSlide14.xml><?xml version="1.0" encoding="utf-8"?>
+<p:notes xmlns:r="http://schemas.openxmlformats.org/officeDocument/2006/relationships" xmlns:c="http://schemas.openxmlformats.org/drawingml/2006/chart" xmlns:a="http://schemas.openxmlformats.org/drawingml/2006/main" xmlns:dgm="http://schemas.openxmlformats.org/drawingml/2006/diagram" xmlns:dsp="http://schemas.microsoft.com/office/drawing/2008/diagram" xmlns:p="http://schemas.openxmlformats.org/presentationml/2006/main">
+  <p:cSld>
+    <p:spTree>
+      <p:nvGrpSpPr>
+        <p:cNvPr id="1" name=""/>
+        <p:cNvGrpSpPr/>
+        <p:nvPr/>
+      </p:nvGrpSpPr>
+      <p:grpSpPr>
+        <a:xfrm>
+          <a:off x="0" y="0"/>
+          <a:ext cx="0" cy="0"/>
+          <a:chOff x="0" y="0"/>
+          <a:chExt cx="0" cy="0"/>
+        </a:xfrm>
+      </p:grpSpPr>
+      <p:sp>
+        <p:nvSpPr>
+          <p:cNvPr id="2" name="Slide Image Placeholder 1"/>
+          <p:cNvSpPr>
+            <a:spLocks noGrp="1" noRot="1" noChangeAspect="1" noTextEdit="1"/>
+          </p:cNvSpPr>
+          <p:nvPr>
+            <p:ph type="sldImg" idx="0"/>
+          </p:nvPr>
+        </p:nvSpPr>
+        <p:spPr/>
+      </p:sp>
+      <p:sp>
+        <p:nvSpPr>
+          <p:cNvPr id="3" name="Notes Placeholder 2"/>
+          <p:cNvSpPr>
+            <a:spLocks noGrp="1"/>
+          </p:cNvSpPr>
+          <p:nvPr>
+            <p:ph type="body" idx="1"/>
+          </p:nvPr>
+        </p:nvSpPr>
+        <p:spPr/>
+        <p:txBody>
+          <a:bodyPr/>
+          <a:lstStyle/>
+          <a:p>
+            <a:pPr lvl="0">
+              <a:defRPr/>
+            </a:pPr>
+            <a:r>
+              <a:rPr lang="ko-KR" altLang="en-US"/>
+              <a:t/>
+            </a:r>
+            <a:endParaRPr lang="ko-KR" altLang="en-US"/>
+          </a:p>
+        </p:txBody>
+      </p:sp>
+      <p:sp>
+        <p:nvSpPr>
+          <p:cNvPr id="4" name="Slide Number Placeholder 3"/>
+          <p:cNvSpPr>
+            <a:spLocks noGrp="1"/>
+          </p:cNvSpPr>
+          <p:nvPr>
+            <p:ph type="sldNum" sz="quarter" idx="10"/>
+          </p:nvPr>
+        </p:nvSpPr>
+        <p:spPr/>
+        <p:txBody>
+          <a:bodyPr/>
+          <a:lstStyle/>
+          <a:p>
+            <a:pPr lvl="0"/>
+            <a:fld id="{F7021451-1387-4CA6-816F-3879F97B5CBC}" type="slidenum">
+              <a:rPr lang="en-US"/>
+              <a:t>12</a:t>
+            </a:fld>
+            <a:endParaRPr lang="en-US"/>
+          </a:p>
+        </p:txBody>
+      </p:sp>
+    </p:spTree>
+    <p:extLst>
+      <p:ext uri="{BB962C8B-B14F-4D97-AF65-F5344CB8AC3E}">
+        <p14:creationId xmlns:p14="http://schemas.microsoft.com/office/powerpoint/2010/main" val="2888022788"/>
+      </p:ext>
+    </p:extLst>
+  </p:cSld>
+  <p:clrMapOvr>
+    <a:masterClrMapping/>
+  </p:clrMapOvr>
+</p:notes>
+</file>
+
+<file path=ppt/notesSlides/notesSlide15.xml><?xml version="1.0" encoding="utf-8"?>
+<p:notes xmlns:a="http://schemas.openxmlformats.org/drawingml/2006/main" xmlns:r="http://schemas.openxmlformats.org/officeDocument/2006/relationships" xmlns:p="http://schemas.openxmlformats.org/presentationml/2006/main">
+  <p:cSld>
+    <p:spTree>
+      <p:nvGrpSpPr>
+        <p:cNvPr id="1" name=""/>
+        <p:cNvGrpSpPr/>
+        <p:nvPr/>
+      </p:nvGrpSpPr>
+      <p:grpSpPr>
+        <a:xfrm>
+          <a:off x="0" y="0"/>
+          <a:ext cx="0" cy="0"/>
+          <a:chOff x="0" y="0"/>
+          <a:chExt cx="0" cy="0"/>
+        </a:xfrm>
+      </p:grpSpPr>
+      <p:sp>
+        <p:nvSpPr>
+          <p:cNvPr id="2" name="Slide Image Placeholder 1"/>
+          <p:cNvSpPr>
+            <a:spLocks noGrp="1" noRot="1" noChangeAspect="1"/>
+          </p:cNvSpPr>
+          <p:nvPr>
+            <p:ph type="sldImg"/>
+          </p:nvPr>
+        </p:nvSpPr>
+        <p:spPr/>
+      </p:sp>
+      <p:sp>
+        <p:nvSpPr>
+          <p:cNvPr id="3" name="Notes Placeholder 2"/>
+          <p:cNvSpPr>
+            <a:spLocks noGrp="1"/>
+          </p:cNvSpPr>
+          <p:nvPr>
+            <p:ph type="body" idx="1"/>
+          </p:nvPr>
+        </p:nvSpPr>
+        <p:spPr/>
+        <p:txBody>
+          <a:bodyPr/>
+          <a:lstStyle/>
+          <a:p>
+            <a:r>
+              <a:rPr lang="en-US" dirty="0"/>
+              <a:t/>
+            </a:r>
+            <a:endParaRPr lang="en-US" dirty="0"/>
+          </a:p>
+        </p:txBody>
+      </p:sp>
+      <p:sp>
+        <p:nvSpPr>
+          <p:cNvPr id="4" name="Slide Number Placeholder 3"/>
+          <p:cNvSpPr>
+            <a:spLocks noGrp="1"/>
+          </p:cNvSpPr>
+          <p:nvPr>
+            <p:ph type="sldNum" sz="quarter" idx="10"/>
+          </p:nvPr>
+        </p:nvSpPr>
+        <p:spPr/>
+        <p:txBody>
+          <a:bodyPr/>
+          <a:lstStyle/>
+          <a:p>
+            <a:fld id="{F7021451-1387-4CA6-816F-3879F97B5CBC}" type="slidenum">
+              <a:rPr lang="en-US"/>
               <a:t>12</a:t>
             </a:fld>
             <a:endParaRPr lang="en-US"/>
@@ -1436,7 +1748,7 @@
 </file>
 
 <file path=ppt/notesSlides/notesSlide9.xml><?xml version="1.0" encoding="utf-8"?>
-<p:notes xmlns:a="http://schemas.openxmlformats.org/drawingml/2006/main" xmlns:r="http://schemas.openxmlformats.org/officeDocument/2006/relationships" xmlns:p="http://schemas.openxmlformats.org/presentationml/2006/main">
+<p:notes xmlns:r="http://schemas.openxmlformats.org/officeDocument/2006/relationships" xmlns:c="http://schemas.openxmlformats.org/drawingml/2006/chart" xmlns:a="http://schemas.openxmlformats.org/drawingml/2006/main" xmlns:dgm="http://schemas.openxmlformats.org/drawingml/2006/diagram" xmlns:dsp="http://schemas.microsoft.com/office/drawing/2008/diagram" xmlns:p="http://schemas.openxmlformats.org/presentationml/2006/main">
   <p:cSld>
     <p:spTree>
       <p:nvGrpSpPr>
@@ -1456,10 +1768,10 @@
         <p:nvSpPr>
           <p:cNvPr id="2" name="Slide Image Placeholder 1"/>
           <p:cNvSpPr>
-            <a:spLocks noGrp="1" noRot="1" noChangeAspect="1"/>
+            <a:spLocks noGrp="1" noRot="1" noChangeAspect="1" noTextEdit="1"/>
           </p:cNvSpPr>
           <p:nvPr>
-            <p:ph type="sldImg"/>
+            <p:ph type="sldImg" idx="0"/>
           </p:nvPr>
         </p:nvSpPr>
         <p:spPr/>
@@ -1479,11 +1791,14 @@
           <a:bodyPr/>
           <a:lstStyle/>
           <a:p>
-            <a:r>
-              <a:rPr lang="en-US" dirty="0"/>
+            <a:pPr lvl="0">
+              <a:defRPr/>
+            </a:pPr>
+            <a:r>
+              <a:rPr lang="ko-KR" altLang="en-US"/>
               <a:t/>
             </a:r>
-            <a:endParaRPr lang="en-US" dirty="0"/>
+            <a:endParaRPr lang="ko-KR" altLang="en-US"/>
           </a:p>
         </p:txBody>
       </p:sp>
@@ -1502,6 +1817,7 @@
           <a:bodyPr/>
           <a:lstStyle/>
           <a:p>
+            <a:pPr lvl="0"/>
             <a:fld id="{F7021451-1387-4CA6-816F-3879F97B5CBC}" type="slidenum">
               <a:rPr lang="en-US"/>
               <a:t>9</a:t>
@@ -1513,7 +1829,7 @@
     </p:spTree>
     <p:extLst>
       <p:ext uri="{BB962C8B-B14F-4D97-AF65-F5344CB8AC3E}">
-        <p14:creationId xmlns:p14="http://schemas.microsoft.com/office/powerpoint/2010/main" val="1024086991"/>
+        <p14:creationId xmlns:p14="http://schemas.microsoft.com/office/powerpoint/2010/main" val="4268900611"/>
       </p:ext>
     </p:extLst>
   </p:cSld>
@@ -1831,7 +2147,7 @@
 </file>
 
 <file path=ppt/slides/slide1.xml><?xml version="1.0" encoding="utf-8"?>
-<p:sld xmlns:a="http://schemas.openxmlformats.org/drawingml/2006/main" xmlns:r="http://schemas.openxmlformats.org/officeDocument/2006/relationships" xmlns:p="http://schemas.openxmlformats.org/presentationml/2006/main">
+<p:sld xmlns:r="http://schemas.openxmlformats.org/officeDocument/2006/relationships" xmlns:c="http://schemas.openxmlformats.org/drawingml/2006/chart" xmlns:a="http://schemas.openxmlformats.org/drawingml/2006/main" xmlns:dgm="http://schemas.openxmlformats.org/drawingml/2006/diagram" xmlns:dsp="http://schemas.microsoft.com/office/drawing/2008/diagram" xmlns:p="http://schemas.openxmlformats.org/presentationml/2006/main">
   <p:cSld name="Slide 1">
     <p:spTree>
       <p:nvGrpSpPr>
@@ -1865,21 +2181,30 @@
           <a:ln/>
         </p:spPr>
         <p:txBody>
-          <a:bodyPr wrap="square" rtlCol="0" anchor="ctr"/>
-          <a:lstStyle/>
-          <a:p>
-            <a:pPr indent="0" marL="0">
+          <a:bodyPr wrap="square" anchor="ctr"/>
+          <a:lstStyle/>
+          <a:p>
+            <a:pPr marL="0" lvl="0" indent="0">
               <a:buNone/>
-            </a:pPr>
-            <a:r>
-              <a:rPr lang="en-US" sz="3400" b="1" dirty="0">
-                <a:solidFill>
-                  <a:srgbClr val="20261C"/>
-                </a:solidFill>
+              <a:defRPr/>
+            </a:pPr>
+            <a:r>
+              <a:rPr lang="en-US" sz="3400" b="1">
+                <a:solidFill>
+                  <a:srgbClr val="20261c"/>
+                </a:solidFill>
+                <a:latin typeface="바탕"/>
+                <a:ea typeface="바탕"/>
               </a:rPr>
               <a:t>결제경로</a:t>
             </a:r>
-            <a:endParaRPr lang="en-US" sz="3400" dirty="0"/>
+            <a:endParaRPr lang="ko-KR" altLang="en-US" sz="3400" b="1">
+              <a:solidFill>
+                <a:srgbClr val="20261c"/>
+              </a:solidFill>
+              <a:latin typeface="바탕"/>
+              <a:ea typeface="바탕"/>
+            </a:endParaRPr>
           </a:p>
         </p:txBody>
       </p:sp>
@@ -1901,46 +2226,45 @@
           <a:ln/>
         </p:spPr>
         <p:txBody>
-          <a:bodyPr wrap="square" rtlCol="0" anchor="ctr"/>
-          <a:lstStyle/>
-          <a:p>
-            <a:pPr indent="0" marL="0">
+          <a:bodyPr wrap="square" anchor="ctr"/>
+          <a:lstStyle/>
+          <a:p>
+            <a:pPr marL="0" lvl="0" indent="0">
               <a:buNone/>
-            </a:pPr>
-            <a:r>
-              <a:rPr lang="en-US" sz="1400" dirty="0">
-                <a:solidFill>
-                  <a:srgbClr val="6B5E4F"/>
-                </a:solidFill>
+              <a:defRPr/>
+            </a:pPr>
+            <a:r>
+              <a:rPr lang="en-US" sz="1400">
+                <a:solidFill>
+                  <a:srgbClr val="6b5e4f"/>
+                </a:solidFill>
+                <a:latin typeface="바탕"/>
+                <a:ea typeface="바탕"/>
               </a:rPr>
               <a:t>카드사 심사 제출용 · 포인트 충전 업종</a:t>
             </a:r>
-            <a:endParaRPr lang="en-US" sz="1400" dirty="0"/>
+            <a:endParaRPr lang="en-US" sz="1400">
+              <a:latin typeface="바탕"/>
+              <a:ea typeface="바탕"/>
+            </a:endParaRPr>
           </a:p>
         </p:txBody>
       </p:sp>
       <p:graphicFrame>
         <p:nvGraphicFramePr>
-          <p:cNvPr id="2" name="Table 0"/>
+          <p:cNvPr id="6" name="Table 0"/>
           <p:cNvGraphicFramePr>
             <a:graphicFrameLocks noGrp="1"/>
           </p:cNvGraphicFramePr>
-          <p:nvPr>
-            <p:extLst>
-              <p:ext uri="{D42A27DB-BD31-4B8C-83A1-F6EECF244321}">
-                <p14:modId xmlns:p14="http://schemas.microsoft.com/office/powerpoint/2010/main" val="1579011935"/>
-              </p:ext>
-            </p:extLst>
-          </p:nvPr>
+          <p:nvPr/>
         </p:nvGraphicFramePr>
         <p:xfrm>
           <a:off x="548640" y="1737360"/>
-          <a:ext cx="8046720" cy="914400"/>
+          <a:ext cx="8046720" cy="1920240"/>
         </p:xfrm>
         <a:graphic>
           <a:graphicData uri="http://schemas.openxmlformats.org/drawingml/2006/table">
             <a:tbl>
-              <a:tblPr/>
               <a:tblGrid>
                 <a:gridCol w="2194560"/>
                 <a:gridCol w="5852160"/>
@@ -1948,120 +2272,132 @@
               <a:tr h="384048">
                 <a:tc>
                   <a:txBody>
-                    <a:bodyPr/>
+                    <a:bodyPr vert="horz" lIns="91440" tIns="45720" rIns="91440" bIns="45720" anchor="t" anchorCtr="0"/>
                     <a:lstStyle/>
                     <a:p>
-                      <a:pPr indent="0" marL="0">
+                      <a:pPr marL="0" lvl="0" indent="0">
                         <a:buNone/>
+                        <a:defRPr/>
                       </a:pPr>
                       <a:r>
-                        <a:rPr lang="en-US" sz="1300" b="1" dirty="0">
+                        <a:rPr lang="en-US" sz="1300" b="1">
                           <a:solidFill>
-                            <a:srgbClr val="2A2320"/>
+                            <a:srgbClr val="2a2320"/>
                           </a:solidFill>
+                          <a:latin typeface="바탕"/>
+                          <a:ea typeface="바탕"/>
                         </a:rPr>
                         <a:t>상호명</a:t>
                       </a:r>
-                      <a:endParaRPr lang="en-US" sz="1300" dirty="0"/>
+                      <a:endParaRPr lang="en-US" sz="1300">
+                        <a:latin typeface="바탕"/>
+                        <a:ea typeface="바탕"/>
+                      </a:endParaRPr>
                     </a:p>
                   </a:txBody>
-                  <a:tcPr marL="91440" marR="91440" marT="45720" marB="45720">
+                  <a:tcPr marL="91440" marR="91440">
                     <a:lnL w="12700" cap="flat" cmpd="sng" algn="ctr">
                       <a:solidFill>
-                        <a:srgbClr val="E4D9C4"/>
+                        <a:srgbClr val="e4d9c4"/>
                       </a:solidFill>
                       <a:prstDash val="solid"/>
                       <a:round/>
-                      <a:headEnd type="none" w="med" len="med"/>
-                      <a:tailEnd type="none" w="med" len="med"/>
+                      <a:headEnd w="med" len="med"/>
+                      <a:tailEnd w="med" len="med"/>
                     </a:lnL>
                     <a:lnR w="12700" cap="flat" cmpd="sng" algn="ctr">
                       <a:solidFill>
-                        <a:srgbClr val="E4D9C4"/>
+                        <a:srgbClr val="e4d9c4"/>
                       </a:solidFill>
                       <a:prstDash val="solid"/>
                       <a:round/>
-                      <a:headEnd type="none" w="med" len="med"/>
-                      <a:tailEnd type="none" w="med" len="med"/>
+                      <a:headEnd w="med" len="med"/>
+                      <a:tailEnd w="med" len="med"/>
                     </a:lnR>
                     <a:lnT w="12700" cap="flat" cmpd="sng" algn="ctr">
                       <a:solidFill>
-                        <a:srgbClr val="E4D9C4"/>
+                        <a:srgbClr val="e4d9c4"/>
                       </a:solidFill>
                       <a:prstDash val="solid"/>
                       <a:round/>
-                      <a:headEnd type="none" w="med" len="med"/>
-                      <a:tailEnd type="none" w="med" len="med"/>
+                      <a:headEnd w="med" len="med"/>
+                      <a:tailEnd w="med" len="med"/>
                     </a:lnT>
                     <a:lnB w="12700" cap="flat" cmpd="sng" algn="ctr">
                       <a:solidFill>
-                        <a:srgbClr val="E4D9C4"/>
+                        <a:srgbClr val="e4d9c4"/>
                       </a:solidFill>
                       <a:prstDash val="solid"/>
                       <a:round/>
-                      <a:headEnd type="none" w="med" len="med"/>
-                      <a:tailEnd type="none" w="med" len="med"/>
+                      <a:headEnd w="med" len="med"/>
+                      <a:tailEnd w="med" len="med"/>
                     </a:lnB>
                     <a:solidFill>
-                      <a:srgbClr val="F4F1EA"/>
+                      <a:srgbClr val="f4f1ea"/>
                     </a:solidFill>
                   </a:tcPr>
                 </a:tc>
                 <a:tc>
                   <a:txBody>
-                    <a:bodyPr/>
+                    <a:bodyPr vert="horz" lIns="91440" tIns="45720" rIns="91440" bIns="45720" anchor="t" anchorCtr="0"/>
                     <a:lstStyle/>
                     <a:p>
-                      <a:pPr indent="0" marL="0">
+                      <a:pPr marL="0" lvl="0" indent="0">
                         <a:buNone/>
+                        <a:defRPr/>
                       </a:pPr>
                       <a:r>
-                        <a:rPr lang="en-US" sz="1300" dirty="0">
+                        <a:rPr lang="en-US" sz="1300">
                           <a:solidFill>
-                            <a:srgbClr val="2A2320"/>
+                            <a:srgbClr val="2a2320"/>
                           </a:solidFill>
+                          <a:latin typeface="바탕"/>
+                          <a:ea typeface="바탕"/>
                         </a:rPr>
                         <a:t>카페인컬러</a:t>
                       </a:r>
-                      <a:endParaRPr lang="en-US" sz="1300" dirty="0"/>
+                      <a:endParaRPr lang="en-US" sz="1300">
+                        <a:latin typeface="바탕"/>
+                        <a:ea typeface="바탕"/>
+                      </a:endParaRPr>
                     </a:p>
                   </a:txBody>
-                  <a:tcPr marL="91440" marR="91440" marT="45720" marB="45720">
+                  <a:tcPr marL="91440" marR="91440">
                     <a:lnL w="12700" cap="flat" cmpd="sng" algn="ctr">
                       <a:solidFill>
-                        <a:srgbClr val="E4D9C4"/>
+                        <a:srgbClr val="e4d9c4"/>
                       </a:solidFill>
                       <a:prstDash val="solid"/>
                       <a:round/>
-                      <a:headEnd type="none" w="med" len="med"/>
-                      <a:tailEnd type="none" w="med" len="med"/>
+                      <a:headEnd w="med" len="med"/>
+                      <a:tailEnd w="med" len="med"/>
                     </a:lnL>
                     <a:lnR w="12700" cap="flat" cmpd="sng" algn="ctr">
                       <a:solidFill>
-                        <a:srgbClr val="E4D9C4"/>
+                        <a:srgbClr val="e4d9c4"/>
                       </a:solidFill>
                       <a:prstDash val="solid"/>
                       <a:round/>
-                      <a:headEnd type="none" w="med" len="med"/>
-                      <a:tailEnd type="none" w="med" len="med"/>
+                      <a:headEnd w="med" len="med"/>
+                      <a:tailEnd w="med" len="med"/>
                     </a:lnR>
                     <a:lnT w="12700" cap="flat" cmpd="sng" algn="ctr">
                       <a:solidFill>
-                        <a:srgbClr val="E4D9C4"/>
+                        <a:srgbClr val="e4d9c4"/>
                       </a:solidFill>
                       <a:prstDash val="solid"/>
                       <a:round/>
-                      <a:headEnd type="none" w="med" len="med"/>
-                      <a:tailEnd type="none" w="med" len="med"/>
+                      <a:headEnd w="med" len="med"/>
+                      <a:tailEnd w="med" len="med"/>
                     </a:lnT>
                     <a:lnB w="12700" cap="flat" cmpd="sng" algn="ctr">
                       <a:solidFill>
-                        <a:srgbClr val="E4D9C4"/>
+                        <a:srgbClr val="e4d9c4"/>
                       </a:solidFill>
                       <a:prstDash val="solid"/>
                       <a:round/>
-                      <a:headEnd type="none" w="med" len="med"/>
-                      <a:tailEnd type="none" w="med" len="med"/>
+                      <a:headEnd w="med" len="med"/>
+                      <a:tailEnd w="med" len="med"/>
                     </a:lnB>
                   </a:tcPr>
                 </a:tc>
@@ -2069,120 +2405,132 @@
               <a:tr h="384048">
                 <a:tc>
                   <a:txBody>
-                    <a:bodyPr/>
+                    <a:bodyPr vert="horz" lIns="91440" tIns="45720" rIns="91440" bIns="45720" anchor="t" anchorCtr="0"/>
                     <a:lstStyle/>
                     <a:p>
-                      <a:pPr indent="0" marL="0">
+                      <a:pPr marL="0" lvl="0" indent="0">
                         <a:buNone/>
+                        <a:defRPr/>
                       </a:pPr>
                       <a:r>
-                        <a:rPr lang="en-US" sz="1300" b="1" dirty="0">
+                        <a:rPr lang="en-US" sz="1300" b="1">
                           <a:solidFill>
-                            <a:srgbClr val="2A2320"/>
+                            <a:srgbClr val="2a2320"/>
                           </a:solidFill>
+                          <a:latin typeface="바탕"/>
+                          <a:ea typeface="바탕"/>
                         </a:rPr>
                         <a:t>사업자등록번호</a:t>
                       </a:r>
-                      <a:endParaRPr lang="en-US" sz="1300" dirty="0"/>
+                      <a:endParaRPr lang="en-US" sz="1300">
+                        <a:latin typeface="바탕"/>
+                        <a:ea typeface="바탕"/>
+                      </a:endParaRPr>
                     </a:p>
                   </a:txBody>
-                  <a:tcPr marL="91440" marR="91440" marT="45720" marB="45720">
+                  <a:tcPr marL="91440" marR="91440">
                     <a:lnL w="12700" cap="flat" cmpd="sng" algn="ctr">
                       <a:solidFill>
-                        <a:srgbClr val="E4D9C4"/>
+                        <a:srgbClr val="e4d9c4"/>
                       </a:solidFill>
                       <a:prstDash val="solid"/>
                       <a:round/>
-                      <a:headEnd type="none" w="med" len="med"/>
-                      <a:tailEnd type="none" w="med" len="med"/>
+                      <a:headEnd w="med" len="med"/>
+                      <a:tailEnd w="med" len="med"/>
                     </a:lnL>
                     <a:lnR w="12700" cap="flat" cmpd="sng" algn="ctr">
                       <a:solidFill>
-                        <a:srgbClr val="E4D9C4"/>
+                        <a:srgbClr val="e4d9c4"/>
                       </a:solidFill>
                       <a:prstDash val="solid"/>
                       <a:round/>
-                      <a:headEnd type="none" w="med" len="med"/>
-                      <a:tailEnd type="none" w="med" len="med"/>
+                      <a:headEnd w="med" len="med"/>
+                      <a:tailEnd w="med" len="med"/>
                     </a:lnR>
                     <a:lnT w="12700" cap="flat" cmpd="sng" algn="ctr">
                       <a:solidFill>
-                        <a:srgbClr val="E4D9C4"/>
+                        <a:srgbClr val="e4d9c4"/>
                       </a:solidFill>
                       <a:prstDash val="solid"/>
                       <a:round/>
-                      <a:headEnd type="none" w="med" len="med"/>
-                      <a:tailEnd type="none" w="med" len="med"/>
+                      <a:headEnd w="med" len="med"/>
+                      <a:tailEnd w="med" len="med"/>
                     </a:lnT>
                     <a:lnB w="12700" cap="flat" cmpd="sng" algn="ctr">
                       <a:solidFill>
-                        <a:srgbClr val="E4D9C4"/>
+                        <a:srgbClr val="e4d9c4"/>
                       </a:solidFill>
                       <a:prstDash val="solid"/>
                       <a:round/>
-                      <a:headEnd type="none" w="med" len="med"/>
-                      <a:tailEnd type="none" w="med" len="med"/>
+                      <a:headEnd w="med" len="med"/>
+                      <a:tailEnd w="med" len="med"/>
                     </a:lnB>
                     <a:solidFill>
-                      <a:srgbClr val="F4F1EA"/>
+                      <a:srgbClr val="f4f1ea"/>
                     </a:solidFill>
                   </a:tcPr>
                 </a:tc>
                 <a:tc>
                   <a:txBody>
-                    <a:bodyPr/>
+                    <a:bodyPr vert="horz" lIns="91440" tIns="45720" rIns="91440" bIns="45720" anchor="t" anchorCtr="0"/>
                     <a:lstStyle/>
                     <a:p>
-                      <a:pPr indent="0" marL="0">
+                      <a:pPr marL="0" lvl="0" indent="0">
                         <a:buNone/>
+                        <a:defRPr/>
                       </a:pPr>
                       <a:r>
-                        <a:rPr lang="en-US" sz="1300" dirty="0">
+                        <a:rPr lang="en-US" sz="1300">
                           <a:solidFill>
-                            <a:srgbClr val="2A2320"/>
+                            <a:srgbClr val="2a2320"/>
                           </a:solidFill>
+                          <a:latin typeface="바탕"/>
+                          <a:ea typeface="바탕"/>
                         </a:rPr>
                         <a:t>608-79-25359</a:t>
                       </a:r>
-                      <a:endParaRPr lang="en-US" sz="1300" dirty="0"/>
+                      <a:endParaRPr lang="en-US" sz="1300">
+                        <a:latin typeface="바탕"/>
+                        <a:ea typeface="바탕"/>
+                      </a:endParaRPr>
                     </a:p>
                   </a:txBody>
-                  <a:tcPr marL="91440" marR="91440" marT="45720" marB="45720">
+                  <a:tcPr marL="91440" marR="91440">
                     <a:lnL w="12700" cap="flat" cmpd="sng" algn="ctr">
                       <a:solidFill>
-                        <a:srgbClr val="E4D9C4"/>
+                        <a:srgbClr val="e4d9c4"/>
                       </a:solidFill>
                       <a:prstDash val="solid"/>
                       <a:round/>
-                      <a:headEnd type="none" w="med" len="med"/>
-                      <a:tailEnd type="none" w="med" len="med"/>
+                      <a:headEnd w="med" len="med"/>
+                      <a:tailEnd w="med" len="med"/>
                     </a:lnL>
                     <a:lnR w="12700" cap="flat" cmpd="sng" algn="ctr">
                       <a:solidFill>
-                        <a:srgbClr val="E4D9C4"/>
+                        <a:srgbClr val="e4d9c4"/>
                       </a:solidFill>
                       <a:prstDash val="solid"/>
                       <a:round/>
-                      <a:headEnd type="none" w="med" len="med"/>
-                      <a:tailEnd type="none" w="med" len="med"/>
+                      <a:headEnd w="med" len="med"/>
+                      <a:tailEnd w="med" len="med"/>
                     </a:lnR>
                     <a:lnT w="12700" cap="flat" cmpd="sng" algn="ctr">
                       <a:solidFill>
-                        <a:srgbClr val="E4D9C4"/>
+                        <a:srgbClr val="e4d9c4"/>
                       </a:solidFill>
                       <a:prstDash val="solid"/>
                       <a:round/>
-                      <a:headEnd type="none" w="med" len="med"/>
-                      <a:tailEnd type="none" w="med" len="med"/>
+                      <a:headEnd w="med" len="med"/>
+                      <a:tailEnd w="med" len="med"/>
                     </a:lnT>
                     <a:lnB w="12700" cap="flat" cmpd="sng" algn="ctr">
                       <a:solidFill>
-                        <a:srgbClr val="E4D9C4"/>
+                        <a:srgbClr val="e4d9c4"/>
                       </a:solidFill>
                       <a:prstDash val="solid"/>
                       <a:round/>
-                      <a:headEnd type="none" w="med" len="med"/>
-                      <a:tailEnd type="none" w="med" len="med"/>
+                      <a:headEnd w="med" len="med"/>
+                      <a:tailEnd w="med" len="med"/>
                     </a:lnB>
                   </a:tcPr>
                 </a:tc>
@@ -2190,120 +2538,132 @@
               <a:tr h="384048">
                 <a:tc>
                   <a:txBody>
-                    <a:bodyPr/>
+                    <a:bodyPr vert="horz" lIns="91440" tIns="45720" rIns="91440" bIns="45720" anchor="t" anchorCtr="0"/>
                     <a:lstStyle/>
                     <a:p>
-                      <a:pPr indent="0" marL="0">
+                      <a:pPr marL="0" lvl="0" indent="0">
                         <a:buNone/>
+                        <a:defRPr/>
                       </a:pPr>
                       <a:r>
-                        <a:rPr lang="en-US" sz="1300" b="1" dirty="0">
+                        <a:rPr lang="en-US" sz="1300" b="1">
                           <a:solidFill>
-                            <a:srgbClr val="2A2320"/>
+                            <a:srgbClr val="2a2320"/>
                           </a:solidFill>
+                          <a:latin typeface="바탕"/>
+                          <a:ea typeface="바탕"/>
                         </a:rPr>
                         <a:t>대표자명</a:t>
                       </a:r>
-                      <a:endParaRPr lang="en-US" sz="1300" dirty="0"/>
+                      <a:endParaRPr lang="en-US" sz="1300">
+                        <a:latin typeface="바탕"/>
+                        <a:ea typeface="바탕"/>
+                      </a:endParaRPr>
                     </a:p>
                   </a:txBody>
-                  <a:tcPr marL="91440" marR="91440" marT="45720" marB="45720">
+                  <a:tcPr marL="91440" marR="91440">
                     <a:lnL w="12700" cap="flat" cmpd="sng" algn="ctr">
                       <a:solidFill>
-                        <a:srgbClr val="E4D9C4"/>
+                        <a:srgbClr val="e4d9c4"/>
                       </a:solidFill>
                       <a:prstDash val="solid"/>
                       <a:round/>
-                      <a:headEnd type="none" w="med" len="med"/>
-                      <a:tailEnd type="none" w="med" len="med"/>
+                      <a:headEnd w="med" len="med"/>
+                      <a:tailEnd w="med" len="med"/>
                     </a:lnL>
                     <a:lnR w="12700" cap="flat" cmpd="sng" algn="ctr">
                       <a:solidFill>
-                        <a:srgbClr val="E4D9C4"/>
+                        <a:srgbClr val="e4d9c4"/>
                       </a:solidFill>
                       <a:prstDash val="solid"/>
                       <a:round/>
-                      <a:headEnd type="none" w="med" len="med"/>
-                      <a:tailEnd type="none" w="med" len="med"/>
+                      <a:headEnd w="med" len="med"/>
+                      <a:tailEnd w="med" len="med"/>
                     </a:lnR>
                     <a:lnT w="12700" cap="flat" cmpd="sng" algn="ctr">
                       <a:solidFill>
-                        <a:srgbClr val="E4D9C4"/>
+                        <a:srgbClr val="e4d9c4"/>
                       </a:solidFill>
                       <a:prstDash val="solid"/>
                       <a:round/>
-                      <a:headEnd type="none" w="med" len="med"/>
-                      <a:tailEnd type="none" w="med" len="med"/>
+                      <a:headEnd w="med" len="med"/>
+                      <a:tailEnd w="med" len="med"/>
                     </a:lnT>
                     <a:lnB w="12700" cap="flat" cmpd="sng" algn="ctr">
                       <a:solidFill>
-                        <a:srgbClr val="E4D9C4"/>
+                        <a:srgbClr val="e4d9c4"/>
                       </a:solidFill>
                       <a:prstDash val="solid"/>
                       <a:round/>
-                      <a:headEnd type="none" w="med" len="med"/>
-                      <a:tailEnd type="none" w="med" len="med"/>
+                      <a:headEnd w="med" len="med"/>
+                      <a:tailEnd w="med" len="med"/>
                     </a:lnB>
                     <a:solidFill>
-                      <a:srgbClr val="F4F1EA"/>
+                      <a:srgbClr val="f4f1ea"/>
                     </a:solidFill>
                   </a:tcPr>
                 </a:tc>
                 <a:tc>
                   <a:txBody>
-                    <a:bodyPr/>
+                    <a:bodyPr vert="horz" lIns="91440" tIns="45720" rIns="91440" bIns="45720" anchor="t" anchorCtr="0"/>
                     <a:lstStyle/>
                     <a:p>
-                      <a:pPr indent="0" marL="0">
+                      <a:pPr marL="0" lvl="0" indent="0">
                         <a:buNone/>
+                        <a:defRPr/>
                       </a:pPr>
                       <a:r>
-                        <a:rPr lang="en-US" sz="1300" dirty="0">
+                        <a:rPr lang="en-US" sz="1300">
                           <a:solidFill>
-                            <a:srgbClr val="2A2320"/>
+                            <a:srgbClr val="2a2320"/>
                           </a:solidFill>
+                          <a:latin typeface="바탕"/>
+                          <a:ea typeface="바탕"/>
                         </a:rPr>
                         <a:t>최현</a:t>
                       </a:r>
-                      <a:endParaRPr lang="en-US" sz="1300" dirty="0"/>
+                      <a:endParaRPr lang="en-US" sz="1300">
+                        <a:latin typeface="바탕"/>
+                        <a:ea typeface="바탕"/>
+                      </a:endParaRPr>
                     </a:p>
                   </a:txBody>
-                  <a:tcPr marL="91440" marR="91440" marT="45720" marB="45720">
+                  <a:tcPr marL="91440" marR="91440">
                     <a:lnL w="12700" cap="flat" cmpd="sng" algn="ctr">
                       <a:solidFill>
-                        <a:srgbClr val="E4D9C4"/>
+                        <a:srgbClr val="e4d9c4"/>
                       </a:solidFill>
                       <a:prstDash val="solid"/>
                       <a:round/>
-                      <a:headEnd type="none" w="med" len="med"/>
-                      <a:tailEnd type="none" w="med" len="med"/>
+                      <a:headEnd w="med" len="med"/>
+                      <a:tailEnd w="med" len="med"/>
                     </a:lnL>
                     <a:lnR w="12700" cap="flat" cmpd="sng" algn="ctr">
                       <a:solidFill>
-                        <a:srgbClr val="E4D9C4"/>
+                        <a:srgbClr val="e4d9c4"/>
                       </a:solidFill>
                       <a:prstDash val="solid"/>
                       <a:round/>
-                      <a:headEnd type="none" w="med" len="med"/>
-                      <a:tailEnd type="none" w="med" len="med"/>
+                      <a:headEnd w="med" len="med"/>
+                      <a:tailEnd w="med" len="med"/>
                     </a:lnR>
                     <a:lnT w="12700" cap="flat" cmpd="sng" algn="ctr">
                       <a:solidFill>
-                        <a:srgbClr val="E4D9C4"/>
+                        <a:srgbClr val="e4d9c4"/>
                       </a:solidFill>
                       <a:prstDash val="solid"/>
                       <a:round/>
-                      <a:headEnd type="none" w="med" len="med"/>
-                      <a:tailEnd type="none" w="med" len="med"/>
+                      <a:headEnd w="med" len="med"/>
+                      <a:tailEnd w="med" len="med"/>
                     </a:lnT>
                     <a:lnB w="12700" cap="flat" cmpd="sng" algn="ctr">
                       <a:solidFill>
-                        <a:srgbClr val="E4D9C4"/>
+                        <a:srgbClr val="e4d9c4"/>
                       </a:solidFill>
                       <a:prstDash val="solid"/>
                       <a:round/>
-                      <a:headEnd type="none" w="med" len="med"/>
-                      <a:tailEnd type="none" w="med" len="med"/>
+                      <a:headEnd w="med" len="med"/>
+                      <a:tailEnd w="med" len="med"/>
                     </a:lnB>
                   </a:tcPr>
                 </a:tc>
@@ -2311,120 +2671,132 @@
               <a:tr h="384048">
                 <a:tc>
                   <a:txBody>
-                    <a:bodyPr/>
+                    <a:bodyPr vert="horz" lIns="91440" tIns="45720" rIns="91440" bIns="45720" anchor="t" anchorCtr="0"/>
                     <a:lstStyle/>
                     <a:p>
-                      <a:pPr indent="0" marL="0">
+                      <a:pPr marL="0" lvl="0" indent="0">
                         <a:buNone/>
+                        <a:defRPr/>
                       </a:pPr>
                       <a:r>
-                        <a:rPr lang="en-US" sz="1300" b="1" dirty="0">
+                        <a:rPr lang="en-US" sz="1300" b="1">
                           <a:solidFill>
-                            <a:srgbClr val="2A2320"/>
+                            <a:srgbClr val="2a2320"/>
                           </a:solidFill>
+                          <a:latin typeface="바탕"/>
+                          <a:ea typeface="바탕"/>
                         </a:rPr>
                         <a:t>홈페이지 URL</a:t>
                       </a:r>
-                      <a:endParaRPr lang="en-US" sz="1300" dirty="0"/>
+                      <a:endParaRPr lang="en-US" sz="1300">
+                        <a:latin typeface="바탕"/>
+                        <a:ea typeface="바탕"/>
+                      </a:endParaRPr>
                     </a:p>
                   </a:txBody>
-                  <a:tcPr marL="91440" marR="91440" marT="45720" marB="45720">
+                  <a:tcPr marL="91440" marR="91440">
                     <a:lnL w="12700" cap="flat" cmpd="sng" algn="ctr">
                       <a:solidFill>
-                        <a:srgbClr val="E4D9C4"/>
+                        <a:srgbClr val="e4d9c4"/>
                       </a:solidFill>
                       <a:prstDash val="solid"/>
                       <a:round/>
-                      <a:headEnd type="none" w="med" len="med"/>
-                      <a:tailEnd type="none" w="med" len="med"/>
+                      <a:headEnd w="med" len="med"/>
+                      <a:tailEnd w="med" len="med"/>
                     </a:lnL>
                     <a:lnR w="12700" cap="flat" cmpd="sng" algn="ctr">
                       <a:solidFill>
-                        <a:srgbClr val="E4D9C4"/>
+                        <a:srgbClr val="e4d9c4"/>
                       </a:solidFill>
                       <a:prstDash val="solid"/>
                       <a:round/>
-                      <a:headEnd type="none" w="med" len="med"/>
-                      <a:tailEnd type="none" w="med" len="med"/>
+                      <a:headEnd w="med" len="med"/>
+                      <a:tailEnd w="med" len="med"/>
                     </a:lnR>
                     <a:lnT w="12700" cap="flat" cmpd="sng" algn="ctr">
                       <a:solidFill>
-                        <a:srgbClr val="E4D9C4"/>
+                        <a:srgbClr val="e4d9c4"/>
                       </a:solidFill>
                       <a:prstDash val="solid"/>
                       <a:round/>
-                      <a:headEnd type="none" w="med" len="med"/>
-                      <a:tailEnd type="none" w="med" len="med"/>
+                      <a:headEnd w="med" len="med"/>
+                      <a:tailEnd w="med" len="med"/>
                     </a:lnT>
                     <a:lnB w="12700" cap="flat" cmpd="sng" algn="ctr">
                       <a:solidFill>
-                        <a:srgbClr val="E4D9C4"/>
+                        <a:srgbClr val="e4d9c4"/>
                       </a:solidFill>
                       <a:prstDash val="solid"/>
                       <a:round/>
-                      <a:headEnd type="none" w="med" len="med"/>
-                      <a:tailEnd type="none" w="med" len="med"/>
+                      <a:headEnd w="med" len="med"/>
+                      <a:tailEnd w="med" len="med"/>
                     </a:lnB>
                     <a:solidFill>
-                      <a:srgbClr val="F4F1EA"/>
+                      <a:srgbClr val="f4f1ea"/>
                     </a:solidFill>
                   </a:tcPr>
                 </a:tc>
                 <a:tc>
                   <a:txBody>
-                    <a:bodyPr/>
+                    <a:bodyPr vert="horz" lIns="91440" tIns="45720" rIns="91440" bIns="45720" anchor="t" anchorCtr="0"/>
                     <a:lstStyle/>
                     <a:p>
-                      <a:pPr indent="0" marL="0">
+                      <a:pPr marL="0" lvl="0" indent="0">
                         <a:buNone/>
+                        <a:defRPr/>
                       </a:pPr>
                       <a:r>
-                        <a:rPr lang="en-US" sz="1300" dirty="0">
+                        <a:rPr lang="en-US" sz="1300">
                           <a:solidFill>
-                            <a:srgbClr val="2A2320"/>
+                            <a:srgbClr val="2a2320"/>
                           </a:solidFill>
+                          <a:latin typeface="바탕"/>
+                          <a:ea typeface="바탕"/>
                         </a:rPr>
                         <a:t>https://caffeinecolor.com</a:t>
                       </a:r>
-                      <a:endParaRPr lang="en-US" sz="1300" dirty="0"/>
+                      <a:endParaRPr lang="en-US" sz="1300">
+                        <a:latin typeface="바탕"/>
+                        <a:ea typeface="바탕"/>
+                      </a:endParaRPr>
                     </a:p>
                   </a:txBody>
-                  <a:tcPr marL="91440" marR="91440" marT="45720" marB="45720">
+                  <a:tcPr marL="91440" marR="91440">
                     <a:lnL w="12700" cap="flat" cmpd="sng" algn="ctr">
                       <a:solidFill>
-                        <a:srgbClr val="E4D9C4"/>
+                        <a:srgbClr val="e4d9c4"/>
                       </a:solidFill>
                       <a:prstDash val="solid"/>
                       <a:round/>
-                      <a:headEnd type="none" w="med" len="med"/>
-                      <a:tailEnd type="none" w="med" len="med"/>
+                      <a:headEnd w="med" len="med"/>
+                      <a:tailEnd w="med" len="med"/>
                     </a:lnL>
                     <a:lnR w="12700" cap="flat" cmpd="sng" algn="ctr">
                       <a:solidFill>
-                        <a:srgbClr val="E4D9C4"/>
+                        <a:srgbClr val="e4d9c4"/>
                       </a:solidFill>
                       <a:prstDash val="solid"/>
                       <a:round/>
-                      <a:headEnd type="none" w="med" len="med"/>
-                      <a:tailEnd type="none" w="med" len="med"/>
+                      <a:headEnd w="med" len="med"/>
+                      <a:tailEnd w="med" len="med"/>
                     </a:lnR>
                     <a:lnT w="12700" cap="flat" cmpd="sng" algn="ctr">
                       <a:solidFill>
-                        <a:srgbClr val="E4D9C4"/>
+                        <a:srgbClr val="e4d9c4"/>
                       </a:solidFill>
                       <a:prstDash val="solid"/>
                       <a:round/>
-                      <a:headEnd type="none" w="med" len="med"/>
-                      <a:tailEnd type="none" w="med" len="med"/>
+                      <a:headEnd w="med" len="med"/>
+                      <a:tailEnd w="med" len="med"/>
                     </a:lnT>
                     <a:lnB w="12700" cap="flat" cmpd="sng" algn="ctr">
                       <a:solidFill>
-                        <a:srgbClr val="E4D9C4"/>
+                        <a:srgbClr val="e4d9c4"/>
                       </a:solidFill>
                       <a:prstDash val="solid"/>
                       <a:round/>
-                      <a:headEnd type="none" w="med" len="med"/>
-                      <a:tailEnd type="none" w="med" len="med"/>
+                      <a:headEnd w="med" len="med"/>
+                      <a:tailEnd w="med" len="med"/>
                     </a:lnB>
                   </a:tcPr>
                 </a:tc>
@@ -2432,120 +2804,135 @@
               <a:tr h="384048">
                 <a:tc>
                   <a:txBody>
-                    <a:bodyPr/>
+                    <a:bodyPr vert="horz" lIns="91440" tIns="45720" rIns="91440" bIns="45720" anchor="t" anchorCtr="0"/>
                     <a:lstStyle/>
                     <a:p>
-                      <a:pPr indent="0" marL="0">
+                      <a:pPr marL="0" lvl="0" indent="0">
                         <a:buNone/>
+                        <a:defRPr/>
                       </a:pPr>
                       <a:r>
-                        <a:rPr lang="en-US" sz="1300" b="1" dirty="0">
+                        <a:rPr lang="en-US" sz="1300" b="1">
                           <a:solidFill>
-                            <a:srgbClr val="2A2320"/>
+                            <a:srgbClr val="2a2320"/>
                           </a:solidFill>
+                          <a:latin typeface="바탕"/>
+                          <a:ea typeface="바탕"/>
                         </a:rPr>
                         <a:t>테스트 계정</a:t>
                       </a:r>
-                      <a:endParaRPr lang="en-US" sz="1300" dirty="0"/>
+                      <a:endParaRPr lang="en-US" sz="1300">
+                        <a:latin typeface="바탕"/>
+                        <a:ea typeface="바탕"/>
+                      </a:endParaRPr>
                     </a:p>
                   </a:txBody>
-                  <a:tcPr marL="91440" marR="91440" marT="45720" marB="45720">
+                  <a:tcPr marL="91440" marR="91440">
                     <a:lnL w="12700" cap="flat" cmpd="sng" algn="ctr">
                       <a:solidFill>
-                        <a:srgbClr val="E4D9C4"/>
+                        <a:srgbClr val="e4d9c4"/>
                       </a:solidFill>
                       <a:prstDash val="solid"/>
                       <a:round/>
-                      <a:headEnd type="none" w="med" len="med"/>
-                      <a:tailEnd type="none" w="med" len="med"/>
+                      <a:headEnd w="med" len="med"/>
+                      <a:tailEnd w="med" len="med"/>
                     </a:lnL>
                     <a:lnR w="12700" cap="flat" cmpd="sng" algn="ctr">
                       <a:solidFill>
-                        <a:srgbClr val="E4D9C4"/>
+                        <a:srgbClr val="e4d9c4"/>
                       </a:solidFill>
                       <a:prstDash val="solid"/>
                       <a:round/>
-                      <a:headEnd type="none" w="med" len="med"/>
-                      <a:tailEnd type="none" w="med" len="med"/>
+                      <a:headEnd w="med" len="med"/>
+                      <a:tailEnd w="med" len="med"/>
                     </a:lnR>
                     <a:lnT w="12700" cap="flat" cmpd="sng" algn="ctr">
                       <a:solidFill>
-                        <a:srgbClr val="E4D9C4"/>
+                        <a:srgbClr val="e4d9c4"/>
                       </a:solidFill>
                       <a:prstDash val="solid"/>
                       <a:round/>
-                      <a:headEnd type="none" w="med" len="med"/>
-                      <a:tailEnd type="none" w="med" len="med"/>
+                      <a:headEnd w="med" len="med"/>
+                      <a:tailEnd w="med" len="med"/>
                     </a:lnT>
                     <a:lnB w="12700" cap="flat" cmpd="sng" algn="ctr">
                       <a:solidFill>
-                        <a:srgbClr val="E4D9C4"/>
+                        <a:srgbClr val="e4d9c4"/>
                       </a:solidFill>
                       <a:prstDash val="solid"/>
                       <a:round/>
-                      <a:headEnd type="none" w="med" len="med"/>
-                      <a:tailEnd type="none" w="med" len="med"/>
+                      <a:headEnd w="med" len="med"/>
+                      <a:tailEnd w="med" len="med"/>
                     </a:lnB>
                     <a:solidFill>
-                      <a:srgbClr val="F4F1EA"/>
+                      <a:srgbClr val="f4f1ea"/>
                     </a:solidFill>
                   </a:tcPr>
                 </a:tc>
                 <a:tc>
                   <a:txBody>
-                    <a:bodyPr/>
+                    <a:bodyPr vert="horz" lIns="91440" tIns="45720" rIns="91440" bIns="45720" anchor="t" anchorCtr="0"/>
                     <a:lstStyle/>
                     <a:p>
-                      <a:pPr indent="0" marL="0">
+                      <a:pPr marL="0" lvl="0" indent="0">
                         <a:buNone/>
+                        <a:defRPr/>
                       </a:pPr>
                       <a:r>
-                        <a:rPr lang="en-US" sz="1300" dirty="0">
+                        <a:rPr lang="en-US" sz="1300">
                           <a:solidFill>
-                            <a:srgbClr val="2A2320"/>
+                            <a:srgbClr val="2a2320"/>
                           </a:solidFill>
+                          <a:latin typeface="바탕"/>
+                          <a:ea typeface="바탕"/>
                         </a:rPr>
-                        <a:t>아이디: ____________  비밀번호: ____________</a:t>
+                        <a:t>아이디: review@caffeinecolor.com 비밀번호: TossReview2026!</a:t>
                       </a:r>
-                      <a:endParaRPr lang="en-US" sz="1300" dirty="0"/>
+                      <a:endParaRPr lang="en-US" sz="1300">
+                        <a:solidFill>
+                          <a:srgbClr val="2a2320"/>
+                        </a:solidFill>
+                        <a:latin typeface="바탕"/>
+                        <a:ea typeface="바탕"/>
+                      </a:endParaRPr>
                     </a:p>
                   </a:txBody>
-                  <a:tcPr marL="91440" marR="91440" marT="45720" marB="45720">
+                  <a:tcPr marL="91440" marR="91440">
                     <a:lnL w="12700" cap="flat" cmpd="sng" algn="ctr">
                       <a:solidFill>
-                        <a:srgbClr val="E4D9C4"/>
+                        <a:srgbClr val="e4d9c4"/>
                       </a:solidFill>
                       <a:prstDash val="solid"/>
                       <a:round/>
-                      <a:headEnd type="none" w="med" len="med"/>
-                      <a:tailEnd type="none" w="med" len="med"/>
+                      <a:headEnd w="med" len="med"/>
+                      <a:tailEnd w="med" len="med"/>
                     </a:lnL>
                     <a:lnR w="12700" cap="flat" cmpd="sng" algn="ctr">
                       <a:solidFill>
-                        <a:srgbClr val="E4D9C4"/>
+                        <a:srgbClr val="e4d9c4"/>
                       </a:solidFill>
                       <a:prstDash val="solid"/>
                       <a:round/>
-                      <a:headEnd type="none" w="med" len="med"/>
-                      <a:tailEnd type="none" w="med" len="med"/>
+                      <a:headEnd w="med" len="med"/>
+                      <a:tailEnd w="med" len="med"/>
                     </a:lnR>
                     <a:lnT w="12700" cap="flat" cmpd="sng" algn="ctr">
                       <a:solidFill>
-                        <a:srgbClr val="E4D9C4"/>
+                        <a:srgbClr val="e4d9c4"/>
                       </a:solidFill>
                       <a:prstDash val="solid"/>
                       <a:round/>
-                      <a:headEnd type="none" w="med" len="med"/>
-                      <a:tailEnd type="none" w="med" len="med"/>
+                      <a:headEnd w="med" len="med"/>
+                      <a:tailEnd w="med" len="med"/>
                     </a:lnT>
                     <a:lnB w="12700" cap="flat" cmpd="sng" algn="ctr">
                       <a:solidFill>
-                        <a:srgbClr val="E4D9C4"/>
+                        <a:srgbClr val="e4d9c4"/>
                       </a:solidFill>
                       <a:prstDash val="solid"/>
                       <a:round/>
-                      <a:headEnd type="none" w="med" len="med"/>
-                      <a:tailEnd type="none" w="med" len="med"/>
+                      <a:headEnd w="med" len="med"/>
+                      <a:tailEnd w="med" len="med"/>
                     </a:lnB>
                   </a:tcPr>
                 </a:tc>
@@ -2572,21 +2959,27 @@
           <a:ln/>
         </p:spPr>
         <p:txBody>
-          <a:bodyPr wrap="square" rtlCol="0" anchor="ctr"/>
-          <a:lstStyle/>
-          <a:p>
-            <a:pPr indent="0" marL="0">
+          <a:bodyPr wrap="square" anchor="ctr"/>
+          <a:lstStyle/>
+          <a:p>
+            <a:pPr marL="0" lvl="0" indent="0">
               <a:buNone/>
-            </a:pPr>
-            <a:r>
-              <a:rPr lang="en-US" sz="1200" b="1" dirty="0">
-                <a:solidFill>
-                  <a:srgbClr val="C25D17"/>
-                </a:solidFill>
+              <a:defRPr/>
+            </a:pPr>
+            <a:r>
+              <a:rPr lang="en-US" sz="1200" b="1">
+                <a:solidFill>
+                  <a:srgbClr val="c25d17"/>
+                </a:solidFill>
+                <a:latin typeface="바탕"/>
+                <a:ea typeface="바탕"/>
               </a:rPr>
               <a:t>※ 결제 확인은 위 테스트 계정으로 로그인 후 부탁드립니다. 비회원 상태에서는 결제 버튼이 열리지 않습니다.</a:t>
             </a:r>
-            <a:endParaRPr lang="en-US" sz="1200" dirty="0"/>
+            <a:endParaRPr lang="en-US" sz="1200">
+              <a:latin typeface="바탕"/>
+              <a:ea typeface="바탕"/>
+            </a:endParaRPr>
           </a:p>
         </p:txBody>
       </p:sp>
@@ -2599,7 +2992,681 @@
 </file>
 
 <file path=ppt/slides/slide10.xml><?xml version="1.0" encoding="utf-8"?>
-<p:sld xmlns:a="http://schemas.openxmlformats.org/drawingml/2006/main" xmlns:r="http://schemas.openxmlformats.org/officeDocument/2006/relationships" xmlns:p="http://schemas.openxmlformats.org/presentationml/2006/main">
+<p:sld xmlns:r="http://schemas.openxmlformats.org/officeDocument/2006/relationships" xmlns:c="http://schemas.openxmlformats.org/drawingml/2006/chart" xmlns:a="http://schemas.openxmlformats.org/drawingml/2006/main" xmlns:dgm="http://schemas.openxmlformats.org/drawingml/2006/diagram" xmlns:dsp="http://schemas.microsoft.com/office/drawing/2008/diagram" xmlns:p="http://schemas.openxmlformats.org/presentationml/2006/main">
+  <p:cSld name="Slide 8">
+    <p:spTree>
+      <p:nvGrpSpPr>
+        <p:cNvPr id="1" name=""/>
+        <p:cNvGrpSpPr/>
+        <p:nvPr/>
+      </p:nvGrpSpPr>
+      <p:grpSpPr>
+        <a:xfrm>
+          <a:off x="0" y="0"/>
+          <a:ext cx="0" cy="0"/>
+          <a:chOff x="0" y="0"/>
+          <a:chExt cx="0" cy="0"/>
+        </a:xfrm>
+      </p:grpSpPr>
+      <p:sp>
+        <p:nvSpPr>
+          <p:cNvPr id="2" name="Text 0"/>
+          <p:cNvSpPr/>
+          <p:nvPr/>
+        </p:nvSpPr>
+        <p:spPr>
+          <a:xfrm>
+            <a:off x="457200" y="274320"/>
+            <a:ext cx="8229600" cy="457200"/>
+          </a:xfrm>
+          <a:prstGeom prst="rect">
+            <a:avLst/>
+          </a:prstGeom>
+          <a:noFill/>
+          <a:ln/>
+        </p:spPr>
+        <p:txBody>
+          <a:bodyPr wrap="square" anchor="ctr"/>
+          <a:lstStyle/>
+          <a:p>
+            <a:pPr marL="0" lvl="0" indent="0">
+              <a:buNone/>
+              <a:defRPr/>
+            </a:pPr>
+            <a:r>
+              <a:rPr lang="en-US" sz="2200" b="1">
+                <a:solidFill>
+                  <a:srgbClr val="20261c"/>
+                </a:solidFill>
+                <a:latin typeface="바탕"/>
+                <a:ea typeface="바탕"/>
+              </a:rPr>
+              <a:t>⑦-2  카드 결제창</a:t>
+            </a:r>
+            <a:r>
+              <a:rPr lang="ko-KR" altLang="en-US" sz="2200" b="1">
+                <a:solidFill>
+                  <a:srgbClr val="20261c"/>
+                </a:solidFill>
+                <a:latin typeface="바탕"/>
+                <a:ea typeface="바탕"/>
+              </a:rPr>
+              <a:t> </a:t>
+            </a:r>
+            <a:r>
+              <a:rPr lang="en-US" sz="2200" b="1">
+                <a:solidFill>
+                  <a:srgbClr val="20261c"/>
+                </a:solidFill>
+                <a:latin typeface="바탕"/>
+                <a:ea typeface="바탕"/>
+              </a:rPr>
+              <a:t>— ①</a:t>
+            </a:r>
+            <a:r>
+              <a:rPr lang="ko-KR" altLang="en-US" sz="2200" b="1">
+                <a:solidFill>
+                  <a:srgbClr val="20261c"/>
+                </a:solidFill>
+                <a:latin typeface="바탕"/>
+                <a:ea typeface="바탕"/>
+              </a:rPr>
+              <a:t> 결제 방법 선택 </a:t>
+            </a:r>
+            <a:r>
+              <a:rPr lang="en-US" sz="2200" b="1">
+                <a:solidFill>
+                  <a:srgbClr val="20261c"/>
+                </a:solidFill>
+                <a:latin typeface="바탕"/>
+                <a:ea typeface="바탕"/>
+              </a:rPr>
+              <a:t>— </a:t>
+            </a:r>
+            <a:r>
+              <a:rPr lang="ko-KR" altLang="en-US" sz="2200" b="1">
+                <a:solidFill>
+                  <a:srgbClr val="20261c"/>
+                </a:solidFill>
+                <a:latin typeface="바탕"/>
+                <a:ea typeface="바탕"/>
+              </a:rPr>
+              <a:t>농협</a:t>
+            </a:r>
+            <a:endParaRPr lang="ko-KR" altLang="en-US" sz="2200" b="1">
+              <a:solidFill>
+                <a:srgbClr val="20261c"/>
+              </a:solidFill>
+              <a:latin typeface="바탕"/>
+              <a:ea typeface="바탕"/>
+            </a:endParaRPr>
+          </a:p>
+        </p:txBody>
+      </p:sp>
+      <p:sp>
+        <p:nvSpPr>
+          <p:cNvPr id="3" name="Text 1"/>
+          <p:cNvSpPr/>
+          <p:nvPr/>
+        </p:nvSpPr>
+        <p:spPr>
+          <a:xfrm>
+            <a:off x="457200" y="749808"/>
+            <a:ext cx="8229600" cy="292608"/>
+          </a:xfrm>
+          <a:prstGeom prst="rect">
+            <a:avLst/>
+          </a:prstGeom>
+          <a:noFill/>
+          <a:ln/>
+        </p:spPr>
+        <p:txBody>
+          <a:bodyPr wrap="square" anchor="ctr"/>
+          <a:lstStyle/>
+          <a:p>
+            <a:pPr marL="0" lvl="0" indent="0">
+              <a:buNone/>
+              <a:defRPr/>
+            </a:pPr>
+            <a:r>
+              <a:rPr lang="en-US" sz="1200">
+                <a:solidFill>
+                  <a:srgbClr val="0e6f60"/>
+                </a:solidFill>
+                <a:latin typeface="바탕"/>
+                <a:ea typeface="바탕"/>
+              </a:rPr>
+              <a:t>https://caffeinecolor.com/dashboard/billing</a:t>
+            </a:r>
+            <a:endParaRPr lang="en-US" sz="1200">
+              <a:latin typeface="바탕"/>
+              <a:ea typeface="바탕"/>
+            </a:endParaRPr>
+          </a:p>
+        </p:txBody>
+      </p:sp>
+      <p:sp>
+        <p:nvSpPr>
+          <p:cNvPr id="6" name="Text 4"/>
+          <p:cNvSpPr/>
+          <p:nvPr/>
+        </p:nvSpPr>
+        <p:spPr>
+          <a:xfrm>
+            <a:off x="6126480" y="1143000"/>
+            <a:ext cx="2560320" cy="274320"/>
+          </a:xfrm>
+          <a:prstGeom prst="rect">
+            <a:avLst/>
+          </a:prstGeom>
+          <a:noFill/>
+          <a:ln/>
+        </p:spPr>
+        <p:txBody>
+          <a:bodyPr wrap="square" anchor="ctr"/>
+          <a:lstStyle/>
+          <a:p>
+            <a:pPr marL="0" lvl="0" indent="0">
+              <a:buNone/>
+              <a:defRPr/>
+            </a:pPr>
+            <a:r>
+              <a:rPr lang="en-US" sz="1200" b="1">
+                <a:solidFill>
+                  <a:srgbClr val="2a2320"/>
+                </a:solidFill>
+                <a:latin typeface="바탕"/>
+                <a:ea typeface="바탕"/>
+              </a:rPr>
+              <a:t>이 화면에 반드시 보여야 하는 것</a:t>
+            </a:r>
+            <a:endParaRPr lang="en-US" sz="1200">
+              <a:latin typeface="바탕"/>
+              <a:ea typeface="바탕"/>
+            </a:endParaRPr>
+          </a:p>
+        </p:txBody>
+      </p:sp>
+      <p:sp>
+        <p:nvSpPr>
+          <p:cNvPr id="7" name="Text 5"/>
+          <p:cNvSpPr/>
+          <p:nvPr/>
+        </p:nvSpPr>
+        <p:spPr>
+          <a:xfrm>
+            <a:off x="6126480" y="1463040"/>
+            <a:ext cx="2560320" cy="1680210"/>
+          </a:xfrm>
+          <a:prstGeom prst="rect">
+            <a:avLst/>
+          </a:prstGeom>
+          <a:noFill/>
+          <a:ln/>
+        </p:spPr>
+        <p:txBody>
+          <a:bodyPr wrap="square" anchor="ctr"/>
+          <a:lstStyle/>
+          <a:p>
+            <a:pPr marL="342900" lvl="0" indent="-342900">
+              <a:lnSpc>
+                <a:spcPct val="125000"/>
+              </a:lnSpc>
+              <a:buSzPct val="100000"/>
+              <a:buChar char="•"/>
+              <a:defRPr/>
+            </a:pPr>
+            <a:r>
+              <a:rPr lang="en-US" sz="1000">
+                <a:solidFill>
+                  <a:srgbClr val="4e4a3b"/>
+                </a:solidFill>
+                <a:latin typeface="바탕"/>
+                <a:ea typeface="바탕"/>
+              </a:rPr>
+              <a:t>금액을 고르고 「충전하기」를 눌러 토스 결제창이 뜬 상태</a:t>
+            </a:r>
+            <a:endParaRPr lang="en-US" sz="1000">
+              <a:solidFill>
+                <a:srgbClr val="4e4a3b"/>
+              </a:solidFill>
+              <a:latin typeface="바탕"/>
+              <a:ea typeface="바탕"/>
+            </a:endParaRPr>
+          </a:p>
+          <a:p>
+            <a:pPr marL="342900" lvl="0" indent="-342900">
+              <a:lnSpc>
+                <a:spcPct val="125000"/>
+              </a:lnSpc>
+              <a:buSzPct val="100000"/>
+              <a:buChar char="•"/>
+              <a:defRPr/>
+            </a:pPr>
+            <a:r>
+              <a:rPr lang="en-US" sz="1000">
+                <a:solidFill>
+                  <a:srgbClr val="4e4a3b"/>
+                </a:solidFill>
+                <a:latin typeface="바탕"/>
+                <a:ea typeface="바탕"/>
+              </a:rPr>
+              <a:t>결제창에 «금액»이 찍혀 있어야 한다</a:t>
+            </a:r>
+            <a:endParaRPr lang="en-US" sz="1000">
+              <a:solidFill>
+                <a:srgbClr val="4e4a3b"/>
+              </a:solidFill>
+              <a:latin typeface="바탕"/>
+              <a:ea typeface="바탕"/>
+            </a:endParaRPr>
+          </a:p>
+          <a:p>
+            <a:pPr marL="342900" lvl="0" indent="-342900">
+              <a:lnSpc>
+                <a:spcPct val="125000"/>
+              </a:lnSpc>
+              <a:buSzPct val="100000"/>
+              <a:buChar char="•"/>
+              <a:defRPr/>
+            </a:pPr>
+            <a:r>
+              <a:rPr lang="en-US" sz="1000">
+                <a:solidFill>
+                  <a:srgbClr val="4e4a3b"/>
+                </a:solidFill>
+                <a:latin typeface="바탕"/>
+                <a:ea typeface="바탕"/>
+              </a:rPr>
+              <a:t>테스트 결제창이어도 심사 가능(가이드 유의사항 6)</a:t>
+            </a:r>
+            <a:endParaRPr lang="en-US" sz="1000">
+              <a:solidFill>
+                <a:srgbClr val="4e4a3b"/>
+              </a:solidFill>
+              <a:latin typeface="바탕"/>
+              <a:ea typeface="바탕"/>
+            </a:endParaRPr>
+          </a:p>
+          <a:p>
+            <a:pPr marL="342900" lvl="0" indent="-342900">
+              <a:lnSpc>
+                <a:spcPct val="125000"/>
+              </a:lnSpc>
+              <a:buSzPct val="100000"/>
+              <a:buChar char="•"/>
+              <a:defRPr/>
+            </a:pPr>
+            <a:r>
+              <a:rPr lang="en-US" sz="1000">
+                <a:solidFill>
+                  <a:srgbClr val="4e4a3b"/>
+                </a:solidFill>
+                <a:latin typeface="바탕"/>
+                <a:ea typeface="바탕"/>
+              </a:rPr>
+              <a:t>비씨·농협은 카드사 앱 화면까지 필요할 수 있다(유의사항 7)</a:t>
+            </a:r>
+            <a:endParaRPr lang="en-US" sz="1000">
+              <a:latin typeface="바탕"/>
+              <a:ea typeface="바탕"/>
+            </a:endParaRPr>
+          </a:p>
+        </p:txBody>
+      </p:sp>
+      <p:pic>
+        <p:nvPicPr>
+          <p:cNvPr id="12" name="그림 11"/>
+          <p:cNvPicPr>
+            <a:picLocks noChangeAspect="1"/>
+          </p:cNvPicPr>
+          <p:nvPr/>
+        </p:nvPicPr>
+        <p:blipFill rotWithShape="1">
+          <a:blip r:embed="rId3"/>
+          <a:stretch>
+            <a:fillRect/>
+          </a:stretch>
+        </p:blipFill>
+        <p:spPr>
+          <a:xfrm>
+            <a:off x="552450" y="1142999"/>
+            <a:ext cx="4506152" cy="4000500"/>
+          </a:xfrm>
+          <a:prstGeom prst="rect">
+            <a:avLst/>
+          </a:prstGeom>
+        </p:spPr>
+      </p:pic>
+    </p:spTree>
+    <p:extLst>
+      <p:ext uri="{BB962C8B-B14F-4D97-AF65-F5344CB8AC3E}">
+        <p14:creationId xmlns:p14="http://schemas.microsoft.com/office/powerpoint/2010/main" val="3546273865"/>
+      </p:ext>
+    </p:extLst>
+  </p:cSld>
+  <p:clrMapOvr>
+    <a:masterClrMapping/>
+  </p:clrMapOvr>
+</p:sld>
+</file>
+
+<file path=ppt/slides/slide11.xml><?xml version="1.0" encoding="utf-8"?>
+<p:sld xmlns:r="http://schemas.openxmlformats.org/officeDocument/2006/relationships" xmlns:c="http://schemas.openxmlformats.org/drawingml/2006/chart" xmlns:a="http://schemas.openxmlformats.org/drawingml/2006/main" xmlns:dgm="http://schemas.openxmlformats.org/drawingml/2006/diagram" xmlns:dsp="http://schemas.microsoft.com/office/drawing/2008/diagram" xmlns:p="http://schemas.openxmlformats.org/presentationml/2006/main">
+  <p:cSld name="Slide 9">
+    <p:spTree>
+      <p:nvGrpSpPr>
+        <p:cNvPr id="1" name=""/>
+        <p:cNvGrpSpPr/>
+        <p:nvPr/>
+      </p:nvGrpSpPr>
+      <p:grpSpPr>
+        <a:xfrm>
+          <a:off x="0" y="0"/>
+          <a:ext cx="0" cy="0"/>
+          <a:chOff x="0" y="0"/>
+          <a:chExt cx="0" cy="0"/>
+        </a:xfrm>
+      </p:grpSpPr>
+      <p:sp>
+        <p:nvSpPr>
+          <p:cNvPr id="2" name="Text 0"/>
+          <p:cNvSpPr/>
+          <p:nvPr/>
+        </p:nvSpPr>
+        <p:spPr>
+          <a:xfrm>
+            <a:off x="457200" y="274320"/>
+            <a:ext cx="8229600" cy="457200"/>
+          </a:xfrm>
+          <a:prstGeom prst="rect">
+            <a:avLst/>
+          </a:prstGeom>
+          <a:noFill/>
+          <a:ln/>
+        </p:spPr>
+        <p:txBody>
+          <a:bodyPr wrap="square" anchor="ctr"/>
+          <a:lstStyle/>
+          <a:p>
+            <a:pPr marL="0" lvl="0" indent="0">
+              <a:buNone/>
+              <a:defRPr/>
+            </a:pPr>
+            <a:r>
+              <a:rPr lang="en-US" sz="2200" b="1">
+                <a:solidFill>
+                  <a:srgbClr val="20261c"/>
+                </a:solidFill>
+                <a:latin typeface="바탕"/>
+                <a:ea typeface="바탕"/>
+              </a:rPr>
+              <a:t>⑧-1  결제 후 — 충전된 크레딧</a:t>
+            </a:r>
+            <a:endParaRPr lang="en-US" sz="2200">
+              <a:latin typeface="바탕"/>
+              <a:ea typeface="바탕"/>
+            </a:endParaRPr>
+          </a:p>
+        </p:txBody>
+      </p:sp>
+      <p:sp>
+        <p:nvSpPr>
+          <p:cNvPr id="3" name="Text 1"/>
+          <p:cNvSpPr/>
+          <p:nvPr/>
+        </p:nvSpPr>
+        <p:spPr>
+          <a:xfrm>
+            <a:off x="457200" y="749808"/>
+            <a:ext cx="8229600" cy="292608"/>
+          </a:xfrm>
+          <a:prstGeom prst="rect">
+            <a:avLst/>
+          </a:prstGeom>
+          <a:noFill/>
+          <a:ln/>
+        </p:spPr>
+        <p:txBody>
+          <a:bodyPr wrap="square" anchor="ctr"/>
+          <a:lstStyle/>
+          <a:p>
+            <a:pPr marL="0" lvl="0" indent="0">
+              <a:buNone/>
+              <a:defRPr/>
+            </a:pPr>
+            <a:r>
+              <a:rPr lang="en-US" sz="1200">
+                <a:solidFill>
+                  <a:srgbClr val="0e6f60"/>
+                </a:solidFill>
+                <a:latin typeface="바탕"/>
+                <a:ea typeface="바탕"/>
+              </a:rPr>
+              <a:t>https://caffeinecolor.com/dashboard/billing</a:t>
+            </a:r>
+            <a:endParaRPr lang="en-US" sz="1200">
+              <a:latin typeface="바탕"/>
+              <a:ea typeface="바탕"/>
+            </a:endParaRPr>
+          </a:p>
+        </p:txBody>
+      </p:sp>
+      <p:sp>
+        <p:nvSpPr>
+          <p:cNvPr id="5" name="Text 3"/>
+          <p:cNvSpPr/>
+          <p:nvPr/>
+        </p:nvSpPr>
+        <p:spPr>
+          <a:xfrm>
+            <a:off x="457200" y="2560320"/>
+            <a:ext cx="5394960" cy="731520"/>
+          </a:xfrm>
+          <a:prstGeom prst="rect">
+            <a:avLst/>
+          </a:prstGeom>
+          <a:noFill/>
+          <a:ln/>
+        </p:spPr>
+        <p:txBody>
+          <a:bodyPr wrap="square" anchor="ctr"/>
+          <a:lstStyle/>
+          <a:p>
+            <a:pPr marL="0" lvl="0" indent="0" algn="ctr">
+              <a:buNone/>
+              <a:defRPr/>
+            </a:pPr>
+            <a:r>
+              <a:rPr lang="en-US" sz="1300">
+                <a:solidFill>
+                  <a:srgbClr val="9a8c68"/>
+                </a:solidFill>
+                <a:latin typeface="바탕"/>
+                <a:ea typeface="바탕"/>
+              </a:rPr>
+              <a:t>여기에 캡처를 끼웁니다</a:t>
+            </a:r>
+            <a:endParaRPr lang="en-US" sz="1300">
+              <a:solidFill>
+                <a:srgbClr val="9a8c68"/>
+              </a:solidFill>
+              <a:latin typeface="바탕"/>
+              <a:ea typeface="바탕"/>
+            </a:endParaRPr>
+          </a:p>
+          <a:p>
+            <a:pPr marL="0" lvl="0" indent="0" algn="ctr">
+              <a:buNone/>
+              <a:defRPr/>
+            </a:pPr>
+            <a:r>
+              <a:rPr lang="en-US" sz="1300">
+                <a:solidFill>
+                  <a:srgbClr val="9a8c68"/>
+                </a:solidFill>
+                <a:latin typeface="바탕"/>
+                <a:ea typeface="바탕"/>
+              </a:rPr>
+              <a:t>(주소창이 보이도록 창째로)</a:t>
+            </a:r>
+            <a:endParaRPr lang="en-US" sz="1300">
+              <a:latin typeface="바탕"/>
+              <a:ea typeface="바탕"/>
+            </a:endParaRPr>
+          </a:p>
+        </p:txBody>
+      </p:sp>
+      <p:sp>
+        <p:nvSpPr>
+          <p:cNvPr id="6" name="Text 4"/>
+          <p:cNvSpPr/>
+          <p:nvPr/>
+        </p:nvSpPr>
+        <p:spPr>
+          <a:xfrm>
+            <a:off x="6126480" y="1143000"/>
+            <a:ext cx="2560320" cy="274320"/>
+          </a:xfrm>
+          <a:prstGeom prst="rect">
+            <a:avLst/>
+          </a:prstGeom>
+          <a:noFill/>
+          <a:ln/>
+        </p:spPr>
+        <p:txBody>
+          <a:bodyPr wrap="square" anchor="ctr"/>
+          <a:lstStyle/>
+          <a:p>
+            <a:pPr marL="0" lvl="0" indent="0">
+              <a:buNone/>
+              <a:defRPr/>
+            </a:pPr>
+            <a:r>
+              <a:rPr lang="en-US" sz="1200" b="1">
+                <a:solidFill>
+                  <a:srgbClr val="2a2320"/>
+                </a:solidFill>
+                <a:latin typeface="바탕"/>
+                <a:ea typeface="바탕"/>
+              </a:rPr>
+              <a:t>이 화면에 반드시 보여야 하는 것</a:t>
+            </a:r>
+            <a:endParaRPr lang="en-US" sz="1200">
+              <a:latin typeface="바탕"/>
+              <a:ea typeface="바탕"/>
+            </a:endParaRPr>
+          </a:p>
+        </p:txBody>
+      </p:sp>
+      <p:sp>
+        <p:nvSpPr>
+          <p:cNvPr id="7" name="Text 5"/>
+          <p:cNvSpPr/>
+          <p:nvPr/>
+        </p:nvSpPr>
+        <p:spPr>
+          <a:xfrm>
+            <a:off x="6126480" y="1463040"/>
+            <a:ext cx="2560320" cy="925013"/>
+          </a:xfrm>
+          <a:prstGeom prst="rect">
+            <a:avLst/>
+          </a:prstGeom>
+          <a:noFill/>
+          <a:ln/>
+        </p:spPr>
+        <p:txBody>
+          <a:bodyPr wrap="square" anchor="ctr"/>
+          <a:lstStyle/>
+          <a:p>
+            <a:pPr marL="342900" lvl="0" indent="-342900">
+              <a:lnSpc>
+                <a:spcPct val="125000"/>
+              </a:lnSpc>
+              <a:buSzPct val="100000"/>
+              <a:buChar char="•"/>
+              <a:defRPr/>
+            </a:pPr>
+            <a:r>
+              <a:rPr lang="en-US" sz="1000">
+                <a:solidFill>
+                  <a:srgbClr val="4e4a3b"/>
+                </a:solidFill>
+                <a:latin typeface="바탕"/>
+                <a:ea typeface="바탕"/>
+              </a:rPr>
+              <a:t>결제 완료 후 잔액이 늘어난 화면</a:t>
+            </a:r>
+            <a:endParaRPr lang="en-US" sz="1000">
+              <a:solidFill>
+                <a:srgbClr val="4e4a3b"/>
+              </a:solidFill>
+              <a:latin typeface="바탕"/>
+              <a:ea typeface="바탕"/>
+            </a:endParaRPr>
+          </a:p>
+          <a:p>
+            <a:pPr marL="342900" lvl="0" indent="-342900">
+              <a:lnSpc>
+                <a:spcPct val="125000"/>
+              </a:lnSpc>
+              <a:buSzPct val="100000"/>
+              <a:buChar char="•"/>
+              <a:defRPr/>
+            </a:pPr>
+            <a:r>
+              <a:rPr lang="en-US" sz="1000">
+                <a:solidFill>
+                  <a:srgbClr val="4e4a3b"/>
+                </a:solidFill>
+                <a:latin typeface="바탕"/>
+                <a:ea typeface="바탕"/>
+              </a:rPr>
+              <a:t>충전 내역(언제 얼마가 몇 크레딧으로)까지 보이면 더 좋다</a:t>
+            </a:r>
+            <a:endParaRPr lang="en-US" sz="1000">
+              <a:latin typeface="바탕"/>
+              <a:ea typeface="바탕"/>
+            </a:endParaRPr>
+          </a:p>
+        </p:txBody>
+      </p:sp>
+      <p:pic>
+        <p:nvPicPr>
+          <p:cNvPr id="8" name="그림 7"/>
+          <p:cNvPicPr>
+            <a:picLocks noChangeAspect="1"/>
+          </p:cNvPicPr>
+          <p:nvPr/>
+        </p:nvPicPr>
+        <p:blipFill rotWithShape="1">
+          <a:blip r:embed="rId3"/>
+          <a:srcRect r="1710"/>
+          <a:stretch>
+            <a:fillRect/>
+          </a:stretch>
+        </p:blipFill>
+        <p:spPr>
+          <a:xfrm>
+            <a:off x="457200" y="1205019"/>
+            <a:ext cx="5490273" cy="3458420"/>
+          </a:xfrm>
+          <a:prstGeom prst="rect">
+            <a:avLst/>
+          </a:prstGeom>
+        </p:spPr>
+      </p:pic>
+    </p:spTree>
+  </p:cSld>
+  <p:clrMapOvr>
+    <a:masterClrMapping/>
+  </p:clrMapOvr>
+</p:sld>
+</file>
+
+<file path=ppt/slides/slide12.xml><?xml version="1.0" encoding="utf-8"?>
+<p:sld xmlns:r="http://schemas.openxmlformats.org/officeDocument/2006/relationships" xmlns:c="http://schemas.openxmlformats.org/drawingml/2006/chart" xmlns:a="http://schemas.openxmlformats.org/drawingml/2006/main" xmlns:dgm="http://schemas.openxmlformats.org/drawingml/2006/diagram" xmlns:dsp="http://schemas.microsoft.com/office/drawing/2008/diagram" xmlns:p="http://schemas.openxmlformats.org/presentationml/2006/main">
   <p:cSld name="Slide 10">
     <p:spTree>
       <p:nvGrpSpPr>
@@ -2633,21 +3700,27 @@
           <a:ln/>
         </p:spPr>
         <p:txBody>
-          <a:bodyPr wrap="square" rtlCol="0" anchor="ctr"/>
-          <a:lstStyle/>
-          <a:p>
-            <a:pPr indent="0" marL="0">
+          <a:bodyPr wrap="square" anchor="ctr"/>
+          <a:lstStyle/>
+          <a:p>
+            <a:pPr marL="0" lvl="0" indent="0">
               <a:buNone/>
-            </a:pPr>
-            <a:r>
-              <a:rPr lang="en-US" sz="2200" b="1" dirty="0">
-                <a:solidFill>
-                  <a:srgbClr val="20261C"/>
-                </a:solidFill>
+              <a:defRPr/>
+            </a:pPr>
+            <a:r>
+              <a:rPr lang="en-US" sz="2200" b="1">
+                <a:solidFill>
+                  <a:srgbClr val="20261c"/>
+                </a:solidFill>
+                <a:latin typeface="바탕"/>
+                <a:ea typeface="바탕"/>
               </a:rPr>
               <a:t>⑧-2  포인트 사용처 ①  AI팩 구매</a:t>
             </a:r>
-            <a:endParaRPr lang="en-US" sz="2200" dirty="0"/>
+            <a:endParaRPr lang="en-US" sz="2200">
+              <a:latin typeface="바탕"/>
+              <a:ea typeface="바탕"/>
+            </a:endParaRPr>
           </a:p>
         </p:txBody>
       </p:sp>
@@ -2669,96 +3742,27 @@
           <a:ln/>
         </p:spPr>
         <p:txBody>
-          <a:bodyPr wrap="square" rtlCol="0" anchor="ctr"/>
-          <a:lstStyle/>
-          <a:p>
-            <a:pPr indent="0" marL="0">
+          <a:bodyPr wrap="square" anchor="ctr"/>
+          <a:lstStyle/>
+          <a:p>
+            <a:pPr marL="0" lvl="0" indent="0">
               <a:buNone/>
-            </a:pPr>
-            <a:r>
-              <a:rPr lang="en-US" sz="1200" dirty="0">
-                <a:solidFill>
-                  <a:srgbClr val="0E6F60"/>
-                </a:solidFill>
+              <a:defRPr/>
+            </a:pPr>
+            <a:r>
+              <a:rPr lang="en-US" sz="1200">
+                <a:solidFill>
+                  <a:srgbClr val="0e6f60"/>
+                </a:solidFill>
+                <a:latin typeface="바탕"/>
+                <a:ea typeface="바탕"/>
               </a:rPr>
               <a:t>https://caffeinecolor.com/packages/lms</a:t>
             </a:r>
-            <a:endParaRPr lang="en-US" sz="1200" dirty="0"/>
-          </a:p>
-        </p:txBody>
-      </p:sp>
-      <p:sp>
-        <p:nvSpPr>
-          <p:cNvPr id="4" name="Shape 2"/>
-          <p:cNvSpPr/>
-          <p:nvPr/>
-        </p:nvSpPr>
-        <p:spPr>
-          <a:xfrm>
-            <a:off x="457200" y="1143000"/>
-            <a:ext cx="5394960" cy="3566160"/>
-          </a:xfrm>
-          <a:prstGeom prst="rect">
-            <a:avLst/>
-          </a:prstGeom>
-          <a:solidFill>
-            <a:srgbClr val="FBF9F4"/>
-          </a:solidFill>
-          <a:ln w="12700">
-            <a:solidFill>
-              <a:srgbClr val="D8D4C6"/>
-            </a:solidFill>
-            <a:prstDash val="dash"/>
-          </a:ln>
-        </p:spPr>
-      </p:sp>
-      <p:sp>
-        <p:nvSpPr>
-          <p:cNvPr id="5" name="Text 3"/>
-          <p:cNvSpPr/>
-          <p:nvPr/>
-        </p:nvSpPr>
-        <p:spPr>
-          <a:xfrm>
-            <a:off x="457200" y="2560320"/>
-            <a:ext cx="5394960" cy="731520"/>
-          </a:xfrm>
-          <a:prstGeom prst="rect">
-            <a:avLst/>
-          </a:prstGeom>
-          <a:noFill/>
-          <a:ln/>
-        </p:spPr>
-        <p:txBody>
-          <a:bodyPr wrap="square" rtlCol="0" anchor="ctr"/>
-          <a:lstStyle/>
-          <a:p>
-            <a:pPr algn="ctr" indent="0" marL="0">
-              <a:buNone/>
-            </a:pPr>
-            <a:r>
-              <a:rPr lang="en-US" sz="1300" dirty="0">
-                <a:solidFill>
-                  <a:srgbClr val="9A8C68"/>
-                </a:solidFill>
-              </a:rPr>
-              <a:t>여기에 캡처를 끼웁니다</a:t>
-            </a:r>
-            <a:endParaRPr lang="en-US" sz="1300" dirty="0"/>
-          </a:p>
-          <a:p>
-            <a:pPr algn="ctr" indent="0" marL="0">
-              <a:buNone/>
-            </a:pPr>
-            <a:r>
-              <a:rPr lang="en-US" sz="1300" dirty="0">
-                <a:solidFill>
-                  <a:srgbClr val="9A8C68"/>
-                </a:solidFill>
-              </a:rPr>
-              <a:t>(주소창이 보이도록 창째로)</a:t>
-            </a:r>
-            <a:endParaRPr lang="en-US" sz="1300" dirty="0"/>
+            <a:endParaRPr lang="en-US" sz="1200">
+              <a:latin typeface="바탕"/>
+              <a:ea typeface="바탕"/>
+            </a:endParaRPr>
           </a:p>
         </p:txBody>
       </p:sp>
@@ -2780,21 +3784,27 @@
           <a:ln/>
         </p:spPr>
         <p:txBody>
-          <a:bodyPr wrap="square" rtlCol="0" anchor="ctr"/>
-          <a:lstStyle/>
-          <a:p>
-            <a:pPr indent="0" marL="0">
+          <a:bodyPr wrap="square" anchor="ctr"/>
+          <a:lstStyle/>
+          <a:p>
+            <a:pPr marL="0" lvl="0" indent="0">
               <a:buNone/>
-            </a:pPr>
-            <a:r>
-              <a:rPr lang="en-US" sz="1200" b="1" dirty="0">
-                <a:solidFill>
-                  <a:srgbClr val="2A2320"/>
-                </a:solidFill>
+              <a:defRPr/>
+            </a:pPr>
+            <a:r>
+              <a:rPr lang="en-US" sz="1200" b="1">
+                <a:solidFill>
+                  <a:srgbClr val="2a2320"/>
+                </a:solidFill>
+                <a:latin typeface="바탕"/>
+                <a:ea typeface="바탕"/>
               </a:rPr>
               <a:t>이 화면에 반드시 보여야 하는 것</a:t>
             </a:r>
-            <a:endParaRPr lang="en-US" sz="1200" dirty="0"/>
+            <a:endParaRPr lang="en-US" sz="1200">
+              <a:latin typeface="바탕"/>
+              <a:ea typeface="바탕"/>
+            </a:endParaRPr>
           </a:p>
         </p:txBody>
       </p:sp>
@@ -2806,8 +3816,8 @@
         </p:nvSpPr>
         <p:spPr>
           <a:xfrm>
-            <a:off x="6126480" y="1463040"/>
-            <a:ext cx="2560320" cy="3200400"/>
+            <a:off x="6126480" y="1463039"/>
+            <a:ext cx="2560320" cy="1343025"/>
           </a:xfrm>
           <a:prstGeom prst="rect">
             <a:avLst/>
@@ -2816,46 +3826,85 @@
           <a:ln/>
         </p:spPr>
         <p:txBody>
-          <a:bodyPr wrap="square" rtlCol="0" anchor="ctr"/>
-          <a:lstStyle/>
-          <a:p>
-            <a:pPr marL="342900" indent="-342900">
+          <a:bodyPr wrap="square" anchor="ctr"/>
+          <a:lstStyle/>
+          <a:p>
+            <a:pPr marL="342900" lvl="0" indent="-342900">
               <a:lnSpc>
                 <a:spcPct val="125000"/>
               </a:lnSpc>
               <a:buSzPct val="100000"/>
               <a:buChar char="•"/>
-            </a:pPr>
-            <a:r>
-              <a:rPr lang="en-US" sz="1000" dirty="0">
-                <a:solidFill>
-                  <a:srgbClr val="4E4A3B"/>
-                </a:solidFill>
+              <a:defRPr/>
+            </a:pPr>
+            <a:r>
+              <a:rPr lang="en-US" sz="1000">
+                <a:solidFill>
+                  <a:srgbClr val="4e4a3b"/>
+                </a:solidFill>
+                <a:latin typeface="바탕"/>
+                <a:ea typeface="바탕"/>
               </a:rPr>
               <a:t>충전한 크레딧으로 AI팩을 사는 화면 — 누르면 크레딧이 빠지고 바로 다운로드</a:t>
             </a:r>
-            <a:endParaRPr lang="en-US" sz="1000" dirty="0"/>
-          </a:p>
-          <a:p>
-            <a:pPr marL="342900" indent="-342900">
+            <a:endParaRPr lang="en-US" sz="1000">
+              <a:solidFill>
+                <a:srgbClr val="4e4a3b"/>
+              </a:solidFill>
+              <a:latin typeface="바탕"/>
+              <a:ea typeface="바탕"/>
+            </a:endParaRPr>
+          </a:p>
+          <a:p>
+            <a:pPr marL="342900" lvl="0" indent="-342900">
               <a:lnSpc>
                 <a:spcPct val="125000"/>
               </a:lnSpc>
               <a:buSzPct val="100000"/>
               <a:buChar char="•"/>
-            </a:pPr>
-            <a:r>
-              <a:rPr lang="en-US" sz="1000" dirty="0">
-                <a:solidFill>
-                  <a:srgbClr val="4E4A3B"/>
-                </a:solidFill>
+              <a:defRPr/>
+            </a:pPr>
+            <a:r>
+              <a:rPr lang="en-US" sz="1000">
+                <a:solidFill>
+                  <a:srgbClr val="4e4a3b"/>
+                </a:solidFill>
+                <a:latin typeface="바탕"/>
+                <a:ea typeface="바탕"/>
               </a:rPr>
               <a:t>이것이 「충전한 포인트를 어디에 쓰는가」의 답이다(유의사항 3)</a:t>
             </a:r>
-            <a:endParaRPr lang="en-US" sz="1000" dirty="0"/>
-          </a:p>
-        </p:txBody>
-      </p:sp>
+            <a:endParaRPr lang="en-US" sz="1000">
+              <a:latin typeface="바탕"/>
+              <a:ea typeface="바탕"/>
+            </a:endParaRPr>
+          </a:p>
+        </p:txBody>
+      </p:sp>
+      <p:pic>
+        <p:nvPicPr>
+          <p:cNvPr id="9" name="그림 8"/>
+          <p:cNvPicPr>
+            <a:picLocks noChangeAspect="1"/>
+          </p:cNvPicPr>
+          <p:nvPr/>
+        </p:nvPicPr>
+        <p:blipFill rotWithShape="1">
+          <a:blip r:embed="rId3"/>
+          <a:stretch>
+            <a:fillRect/>
+          </a:stretch>
+        </p:blipFill>
+        <p:spPr>
+          <a:xfrm>
+            <a:off x="457199" y="1143000"/>
+            <a:ext cx="3335099" cy="3975636"/>
+          </a:xfrm>
+          <a:prstGeom prst="rect">
+            <a:avLst/>
+          </a:prstGeom>
+        </p:spPr>
+      </p:pic>
     </p:spTree>
   </p:cSld>
   <p:clrMapOvr>
@@ -2864,8 +3913,8 @@
 </p:sld>
 </file>
 
-<file path=ppt/slides/slide11.xml><?xml version="1.0" encoding="utf-8"?>
-<p:sld xmlns:a="http://schemas.openxmlformats.org/drawingml/2006/main" xmlns:r="http://schemas.openxmlformats.org/officeDocument/2006/relationships" xmlns:p="http://schemas.openxmlformats.org/presentationml/2006/main">
+<file path=ppt/slides/slide13.xml><?xml version="1.0" encoding="utf-8"?>
+<p:sld xmlns:r="http://schemas.openxmlformats.org/officeDocument/2006/relationships" xmlns:c="http://schemas.openxmlformats.org/drawingml/2006/chart" xmlns:a="http://schemas.openxmlformats.org/drawingml/2006/main" xmlns:dgm="http://schemas.openxmlformats.org/drawingml/2006/diagram" xmlns:dsp="http://schemas.microsoft.com/office/drawing/2008/diagram" xmlns:p="http://schemas.openxmlformats.org/presentationml/2006/main">
   <p:cSld name="Slide 11">
     <p:spTree>
       <p:nvGrpSpPr>
@@ -2899,21 +3948,27 @@
           <a:ln/>
         </p:spPr>
         <p:txBody>
-          <a:bodyPr wrap="square" rtlCol="0" anchor="ctr"/>
-          <a:lstStyle/>
-          <a:p>
-            <a:pPr indent="0" marL="0">
+          <a:bodyPr wrap="square" anchor="ctr"/>
+          <a:lstStyle/>
+          <a:p>
+            <a:pPr marL="0" lvl="0" indent="0">
               <a:buNone/>
-            </a:pPr>
-            <a:r>
-              <a:rPr lang="en-US" sz="2200" b="1" dirty="0">
-                <a:solidFill>
-                  <a:srgbClr val="20261C"/>
-                </a:solidFill>
+              <a:defRPr/>
+            </a:pPr>
+            <a:r>
+              <a:rPr lang="en-US" sz="2200" b="1">
+                <a:solidFill>
+                  <a:srgbClr val="20261c"/>
+                </a:solidFill>
+                <a:latin typeface="바탕"/>
+                <a:ea typeface="바탕"/>
               </a:rPr>
               <a:t>⑧-3  포인트 사용처 ②  직접 만들기</a:t>
             </a:r>
-            <a:endParaRPr lang="en-US" sz="2200" dirty="0"/>
+            <a:endParaRPr lang="en-US" sz="2200">
+              <a:latin typeface="바탕"/>
+              <a:ea typeface="바탕"/>
+            </a:endParaRPr>
           </a:p>
         </p:txBody>
       </p:sp>
@@ -2935,96 +3990,27 @@
           <a:ln/>
         </p:spPr>
         <p:txBody>
-          <a:bodyPr wrap="square" rtlCol="0" anchor="ctr"/>
-          <a:lstStyle/>
-          <a:p>
-            <a:pPr indent="0" marL="0">
+          <a:bodyPr wrap="square" anchor="ctr"/>
+          <a:lstStyle/>
+          <a:p>
+            <a:pPr marL="0" lvl="0" indent="0">
               <a:buNone/>
-            </a:pPr>
-            <a:r>
-              <a:rPr lang="en-US" sz="1200" dirty="0">
-                <a:solidFill>
-                  <a:srgbClr val="0E6F60"/>
-                </a:solidFill>
+              <a:defRPr/>
+            </a:pPr>
+            <a:r>
+              <a:rPr lang="en-US" sz="1200">
+                <a:solidFill>
+                  <a:srgbClr val="0e6f60"/>
+                </a:solidFill>
+                <a:latin typeface="바탕"/>
+                <a:ea typeface="바탕"/>
               </a:rPr>
               <a:t>https://caffeinecolor.com/dashboard</a:t>
             </a:r>
-            <a:endParaRPr lang="en-US" sz="1200" dirty="0"/>
-          </a:p>
-        </p:txBody>
-      </p:sp>
-      <p:sp>
-        <p:nvSpPr>
-          <p:cNvPr id="4" name="Shape 2"/>
-          <p:cNvSpPr/>
-          <p:nvPr/>
-        </p:nvSpPr>
-        <p:spPr>
-          <a:xfrm>
-            <a:off x="457200" y="1143000"/>
-            <a:ext cx="5394960" cy="3566160"/>
-          </a:xfrm>
-          <a:prstGeom prst="rect">
-            <a:avLst/>
-          </a:prstGeom>
-          <a:solidFill>
-            <a:srgbClr val="FBF9F4"/>
-          </a:solidFill>
-          <a:ln w="12700">
-            <a:solidFill>
-              <a:srgbClr val="D8D4C6"/>
-            </a:solidFill>
-            <a:prstDash val="dash"/>
-          </a:ln>
-        </p:spPr>
-      </p:sp>
-      <p:sp>
-        <p:nvSpPr>
-          <p:cNvPr id="5" name="Text 3"/>
-          <p:cNvSpPr/>
-          <p:nvPr/>
-        </p:nvSpPr>
-        <p:spPr>
-          <a:xfrm>
-            <a:off x="457200" y="2560320"/>
-            <a:ext cx="5394960" cy="731520"/>
-          </a:xfrm>
-          <a:prstGeom prst="rect">
-            <a:avLst/>
-          </a:prstGeom>
-          <a:noFill/>
-          <a:ln/>
-        </p:spPr>
-        <p:txBody>
-          <a:bodyPr wrap="square" rtlCol="0" anchor="ctr"/>
-          <a:lstStyle/>
-          <a:p>
-            <a:pPr algn="ctr" indent="0" marL="0">
-              <a:buNone/>
-            </a:pPr>
-            <a:r>
-              <a:rPr lang="en-US" sz="1300" dirty="0">
-                <a:solidFill>
-                  <a:srgbClr val="9A8C68"/>
-                </a:solidFill>
-              </a:rPr>
-              <a:t>여기에 캡처를 끼웁니다</a:t>
-            </a:r>
-            <a:endParaRPr lang="en-US" sz="1300" dirty="0"/>
-          </a:p>
-          <a:p>
-            <a:pPr algn="ctr" indent="0" marL="0">
-              <a:buNone/>
-            </a:pPr>
-            <a:r>
-              <a:rPr lang="en-US" sz="1300" dirty="0">
-                <a:solidFill>
-                  <a:srgbClr val="9A8C68"/>
-                </a:solidFill>
-              </a:rPr>
-              <a:t>(주소창이 보이도록 창째로)</a:t>
-            </a:r>
-            <a:endParaRPr lang="en-US" sz="1300" dirty="0"/>
+            <a:endParaRPr lang="en-US" sz="1200">
+              <a:latin typeface="바탕"/>
+              <a:ea typeface="바탕"/>
+            </a:endParaRPr>
           </a:p>
         </p:txBody>
       </p:sp>
@@ -3046,21 +4032,27 @@
           <a:ln/>
         </p:spPr>
         <p:txBody>
-          <a:bodyPr wrap="square" rtlCol="0" anchor="ctr"/>
-          <a:lstStyle/>
-          <a:p>
-            <a:pPr indent="0" marL="0">
+          <a:bodyPr wrap="square" anchor="ctr"/>
+          <a:lstStyle/>
+          <a:p>
+            <a:pPr marL="0" lvl="0" indent="0">
               <a:buNone/>
-            </a:pPr>
-            <a:r>
-              <a:rPr lang="en-US" sz="1200" b="1" dirty="0">
-                <a:solidFill>
-                  <a:srgbClr val="2A2320"/>
-                </a:solidFill>
+              <a:defRPr/>
+            </a:pPr>
+            <a:r>
+              <a:rPr lang="en-US" sz="1200" b="1">
+                <a:solidFill>
+                  <a:srgbClr val="2a2320"/>
+                </a:solidFill>
+                <a:latin typeface="바탕"/>
+                <a:ea typeface="바탕"/>
               </a:rPr>
               <a:t>이 화면에 반드시 보여야 하는 것</a:t>
             </a:r>
-            <a:endParaRPr lang="en-US" sz="1200" dirty="0"/>
+            <a:endParaRPr lang="en-US" sz="1200">
+              <a:latin typeface="바탕"/>
+              <a:ea typeface="바탕"/>
+            </a:endParaRPr>
           </a:p>
         </p:txBody>
       </p:sp>
@@ -3072,8 +4064,8 @@
         </p:nvSpPr>
         <p:spPr>
           <a:xfrm>
-            <a:off x="6126480" y="1463040"/>
-            <a:ext cx="2560320" cy="3200400"/>
+            <a:off x="6126480" y="1463039"/>
+            <a:ext cx="2560320" cy="1108710"/>
           </a:xfrm>
           <a:prstGeom prst="rect">
             <a:avLst/>
@@ -3082,46 +4074,109 @@
           <a:ln/>
         </p:spPr>
         <p:txBody>
-          <a:bodyPr wrap="square" rtlCol="0" anchor="ctr"/>
-          <a:lstStyle/>
-          <a:p>
-            <a:pPr marL="342900" indent="-342900">
+          <a:bodyPr wrap="square" anchor="ctr"/>
+          <a:lstStyle/>
+          <a:p>
+            <a:pPr marL="342900" lvl="0" indent="-342900">
               <a:lnSpc>
                 <a:spcPct val="125000"/>
               </a:lnSpc>
               <a:buSzPct val="100000"/>
               <a:buChar char="•"/>
-            </a:pPr>
-            <a:r>
-              <a:rPr lang="en-US" sz="1000" dirty="0">
-                <a:solidFill>
-                  <a:srgbClr val="4E4A3B"/>
-                </a:solidFill>
+              <a:defRPr/>
+            </a:pPr>
+            <a:r>
+              <a:rPr lang="en-US" sz="1000">
+                <a:solidFill>
+                  <a:srgbClr val="4e4a3b"/>
+                </a:solidFill>
+                <a:latin typeface="바탕"/>
+                <a:ea typeface="바탕"/>
               </a:rPr>
               <a:t>크레딧으로 산출물을 생성·다운로드하는 화면</a:t>
             </a:r>
-            <a:endParaRPr lang="en-US" sz="1000" dirty="0"/>
-          </a:p>
-          <a:p>
-            <a:pPr marL="342900" indent="-342900">
+            <a:endParaRPr lang="en-US" sz="1000">
+              <a:solidFill>
+                <a:srgbClr val="4e4a3b"/>
+              </a:solidFill>
+              <a:latin typeface="바탕"/>
+              <a:ea typeface="바탕"/>
+            </a:endParaRPr>
+          </a:p>
+          <a:p>
+            <a:pPr marL="342900" lvl="0" indent="-342900">
               <a:lnSpc>
                 <a:spcPct val="125000"/>
               </a:lnSpc>
               <a:buSzPct val="100000"/>
               <a:buChar char="•"/>
-            </a:pPr>
-            <a:r>
-              <a:rPr lang="en-US" sz="1000" dirty="0">
-                <a:solidFill>
-                  <a:srgbClr val="4E4A3B"/>
-                </a:solidFill>
+              <a:defRPr/>
+            </a:pPr>
+            <a:r>
+              <a:rPr lang="en-US" sz="1000">
+                <a:solidFill>
+                  <a:srgbClr val="4e4a3b"/>
+                </a:solidFill>
+                <a:latin typeface="바탕"/>
+                <a:ea typeface="바탕"/>
               </a:rPr>
               <a:t>사용처가 둘이라는 것을 보여 준다 — 팩 구매, 그리고 직접 만들기</a:t>
             </a:r>
-            <a:endParaRPr lang="en-US" sz="1000" dirty="0"/>
-          </a:p>
-        </p:txBody>
-      </p:sp>
+            <a:endParaRPr lang="en-US" sz="1000">
+              <a:latin typeface="바탕"/>
+              <a:ea typeface="바탕"/>
+            </a:endParaRPr>
+          </a:p>
+        </p:txBody>
+      </p:sp>
+      <p:pic>
+        <p:nvPicPr>
+          <p:cNvPr id="8" name="그림 7"/>
+          <p:cNvPicPr>
+            <a:picLocks noChangeAspect="1"/>
+          </p:cNvPicPr>
+          <p:nvPr/>
+        </p:nvPicPr>
+        <p:blipFill rotWithShape="1">
+          <a:blip r:embed="rId3"/>
+          <a:stretch>
+            <a:fillRect/>
+          </a:stretch>
+        </p:blipFill>
+        <p:spPr>
+          <a:xfrm>
+            <a:off x="457200" y="1143000"/>
+            <a:ext cx="2624796" cy="2402881"/>
+          </a:xfrm>
+          <a:prstGeom prst="rect">
+            <a:avLst/>
+          </a:prstGeom>
+        </p:spPr>
+      </p:pic>
+      <p:pic>
+        <p:nvPicPr>
+          <p:cNvPr id="9" name="그림 8"/>
+          <p:cNvPicPr>
+            <a:picLocks noChangeAspect="1"/>
+          </p:cNvPicPr>
+          <p:nvPr/>
+        </p:nvPicPr>
+        <p:blipFill rotWithShape="1">
+          <a:blip r:embed="rId4"/>
+          <a:stretch>
+            <a:fillRect/>
+          </a:stretch>
+        </p:blipFill>
+        <p:spPr>
+          <a:xfrm>
+            <a:off x="3156530" y="1143000"/>
+            <a:ext cx="2681260" cy="2753402"/>
+          </a:xfrm>
+          <a:prstGeom prst="rect">
+            <a:avLst/>
+          </a:prstGeom>
+        </p:spPr>
+      </p:pic>
     </p:spTree>
   </p:cSld>
   <p:clrMapOvr>
@@ -3130,8 +4185,318 @@
 </p:sld>
 </file>
 
-<file path=ppt/slides/slide12.xml><?xml version="1.0" encoding="utf-8"?>
-<p:sld xmlns:a="http://schemas.openxmlformats.org/drawingml/2006/main" xmlns:r="http://schemas.openxmlformats.org/officeDocument/2006/relationships" xmlns:p="http://schemas.openxmlformats.org/presentationml/2006/main">
+<file path=ppt/slides/slide14.xml><?xml version="1.0" encoding="utf-8"?>
+<p:sld xmlns:r="http://schemas.openxmlformats.org/officeDocument/2006/relationships" xmlns:c="http://schemas.openxmlformats.org/drawingml/2006/chart" xmlns:a="http://schemas.openxmlformats.org/drawingml/2006/main" xmlns:dgm="http://schemas.openxmlformats.org/drawingml/2006/diagram" xmlns:dsp="http://schemas.microsoft.com/office/drawing/2008/diagram" xmlns:p="http://schemas.openxmlformats.org/presentationml/2006/main">
+  <p:cSld name="Slide 11">
+    <p:spTree>
+      <p:nvGrpSpPr>
+        <p:cNvPr id="1" name=""/>
+        <p:cNvGrpSpPr/>
+        <p:nvPr/>
+      </p:nvGrpSpPr>
+      <p:grpSpPr>
+        <a:xfrm>
+          <a:off x="0" y="0"/>
+          <a:ext cx="0" cy="0"/>
+          <a:chOff x="0" y="0"/>
+          <a:chExt cx="0" cy="0"/>
+        </a:xfrm>
+      </p:grpSpPr>
+      <p:sp>
+        <p:nvSpPr>
+          <p:cNvPr id="2" name="Text 0"/>
+          <p:cNvSpPr/>
+          <p:nvPr/>
+        </p:nvSpPr>
+        <p:spPr>
+          <a:xfrm>
+            <a:off x="457200" y="274320"/>
+            <a:ext cx="8229600" cy="457200"/>
+          </a:xfrm>
+          <a:prstGeom prst="rect">
+            <a:avLst/>
+          </a:prstGeom>
+          <a:noFill/>
+          <a:ln/>
+        </p:spPr>
+        <p:txBody>
+          <a:bodyPr wrap="square" anchor="ctr"/>
+          <a:lstStyle/>
+          <a:p>
+            <a:pPr marL="0" lvl="0" indent="0">
+              <a:buNone/>
+              <a:defRPr/>
+            </a:pPr>
+            <a:r>
+              <a:rPr lang="en-US" sz="2200" b="1">
+                <a:solidFill>
+                  <a:srgbClr val="20261c"/>
+                </a:solidFill>
+                <a:latin typeface="바탕"/>
+                <a:ea typeface="바탕"/>
+              </a:rPr>
+              <a:t>⑧-3  포인트 사용처 </a:t>
+            </a:r>
+            <a:r>
+              <a:rPr lang="ko-KR" altLang="en-US" sz="2200" b="1">
+                <a:solidFill>
+                  <a:srgbClr val="20261c"/>
+                </a:solidFill>
+                <a:latin typeface="바탕"/>
+                <a:ea typeface="바탕"/>
+              </a:rPr>
+              <a:t>③</a:t>
+            </a:r>
+            <a:r>
+              <a:rPr lang="en-US" sz="2200" b="1">
+                <a:solidFill>
+                  <a:srgbClr val="20261c"/>
+                </a:solidFill>
+                <a:latin typeface="바탕"/>
+                <a:ea typeface="바탕"/>
+              </a:rPr>
+              <a:t> </a:t>
+            </a:r>
+            <a:r>
+              <a:rPr lang="ko-KR" altLang="en-US" sz="2200" b="1">
+                <a:solidFill>
+                  <a:srgbClr val="20261c"/>
+                </a:solidFill>
+                <a:latin typeface="바탕"/>
+                <a:ea typeface="바탕"/>
+              </a:rPr>
+              <a:t>파일다운로드</a:t>
+            </a:r>
+            <a:endParaRPr lang="ko-KR" altLang="en-US" sz="2200" b="1">
+              <a:solidFill>
+                <a:srgbClr val="20261c"/>
+              </a:solidFill>
+              <a:latin typeface="바탕"/>
+              <a:ea typeface="바탕"/>
+            </a:endParaRPr>
+          </a:p>
+        </p:txBody>
+      </p:sp>
+      <p:sp>
+        <p:nvSpPr>
+          <p:cNvPr id="3" name="Text 1"/>
+          <p:cNvSpPr/>
+          <p:nvPr/>
+        </p:nvSpPr>
+        <p:spPr>
+          <a:xfrm>
+            <a:off x="457200" y="749808"/>
+            <a:ext cx="8229600" cy="292608"/>
+          </a:xfrm>
+          <a:prstGeom prst="rect">
+            <a:avLst/>
+          </a:prstGeom>
+          <a:noFill/>
+          <a:ln/>
+        </p:spPr>
+        <p:txBody>
+          <a:bodyPr wrap="square" anchor="ctr"/>
+          <a:lstStyle/>
+          <a:p>
+            <a:pPr marL="0" lvl="0" indent="0">
+              <a:buNone/>
+              <a:defRPr/>
+            </a:pPr>
+            <a:r>
+              <a:rPr lang="en-US" sz="1200">
+                <a:solidFill>
+                  <a:srgbClr val="0e6f60"/>
+                </a:solidFill>
+                <a:latin typeface="바탕"/>
+                <a:ea typeface="바탕"/>
+              </a:rPr>
+              <a:t>https://caffeinecolor.com/dashboard</a:t>
+            </a:r>
+            <a:endParaRPr lang="en-US" sz="1200">
+              <a:latin typeface="바탕"/>
+              <a:ea typeface="바탕"/>
+            </a:endParaRPr>
+          </a:p>
+        </p:txBody>
+      </p:sp>
+      <p:sp>
+        <p:nvSpPr>
+          <p:cNvPr id="6" name="Text 4"/>
+          <p:cNvSpPr/>
+          <p:nvPr/>
+        </p:nvSpPr>
+        <p:spPr>
+          <a:xfrm>
+            <a:off x="6126480" y="1143000"/>
+            <a:ext cx="2560320" cy="274320"/>
+          </a:xfrm>
+          <a:prstGeom prst="rect">
+            <a:avLst/>
+          </a:prstGeom>
+          <a:noFill/>
+          <a:ln/>
+        </p:spPr>
+        <p:txBody>
+          <a:bodyPr wrap="square" anchor="ctr"/>
+          <a:lstStyle/>
+          <a:p>
+            <a:pPr marL="0" lvl="0" indent="0">
+              <a:buNone/>
+              <a:defRPr/>
+            </a:pPr>
+            <a:r>
+              <a:rPr lang="en-US" sz="1200" b="1">
+                <a:solidFill>
+                  <a:srgbClr val="2a2320"/>
+                </a:solidFill>
+                <a:latin typeface="바탕"/>
+                <a:ea typeface="바탕"/>
+              </a:rPr>
+              <a:t>이 화면에 반드시 보여야 하는 것</a:t>
+            </a:r>
+            <a:endParaRPr lang="en-US" sz="1200">
+              <a:latin typeface="바탕"/>
+              <a:ea typeface="바탕"/>
+            </a:endParaRPr>
+          </a:p>
+        </p:txBody>
+      </p:sp>
+      <p:sp>
+        <p:nvSpPr>
+          <p:cNvPr id="7" name="Text 5"/>
+          <p:cNvSpPr/>
+          <p:nvPr/>
+        </p:nvSpPr>
+        <p:spPr>
+          <a:xfrm>
+            <a:off x="6126480" y="1463040"/>
+            <a:ext cx="2560320" cy="1108710"/>
+          </a:xfrm>
+          <a:prstGeom prst="rect">
+            <a:avLst/>
+          </a:prstGeom>
+          <a:noFill/>
+          <a:ln/>
+        </p:spPr>
+        <p:txBody>
+          <a:bodyPr wrap="square" anchor="ctr"/>
+          <a:lstStyle/>
+          <a:p>
+            <a:pPr marL="342900" lvl="0" indent="-342900">
+              <a:lnSpc>
+                <a:spcPct val="125000"/>
+              </a:lnSpc>
+              <a:buSzPct val="100000"/>
+              <a:buChar char="•"/>
+              <a:defRPr/>
+            </a:pPr>
+            <a:r>
+              <a:rPr lang="en-US" sz="1000">
+                <a:solidFill>
+                  <a:srgbClr val="4e4a3b"/>
+                </a:solidFill>
+                <a:latin typeface="바탕"/>
+                <a:ea typeface="바탕"/>
+              </a:rPr>
+              <a:t>크레딧으로 산출물을 생성·다운로드하는 화면</a:t>
+            </a:r>
+            <a:endParaRPr lang="en-US" sz="1000">
+              <a:solidFill>
+                <a:srgbClr val="4e4a3b"/>
+              </a:solidFill>
+              <a:latin typeface="바탕"/>
+              <a:ea typeface="바탕"/>
+            </a:endParaRPr>
+          </a:p>
+          <a:p>
+            <a:pPr marL="342900" lvl="0" indent="-342900">
+              <a:lnSpc>
+                <a:spcPct val="125000"/>
+              </a:lnSpc>
+              <a:buSzPct val="100000"/>
+              <a:buChar char="•"/>
+              <a:defRPr/>
+            </a:pPr>
+            <a:r>
+              <a:rPr lang="en-US" sz="1000">
+                <a:solidFill>
+                  <a:srgbClr val="4e4a3b"/>
+                </a:solidFill>
+                <a:latin typeface="바탕"/>
+                <a:ea typeface="바탕"/>
+              </a:rPr>
+              <a:t>사용처가 둘이라는 것을 보여 준다 — 팩 구매, 그리고 직접 만들기</a:t>
+            </a:r>
+            <a:endParaRPr lang="en-US" sz="1000">
+              <a:latin typeface="바탕"/>
+              <a:ea typeface="바탕"/>
+            </a:endParaRPr>
+          </a:p>
+        </p:txBody>
+      </p:sp>
+      <p:pic>
+        <p:nvPicPr>
+          <p:cNvPr id="11" name="그림 10"/>
+          <p:cNvPicPr>
+            <a:picLocks noChangeAspect="1"/>
+          </p:cNvPicPr>
+          <p:nvPr/>
+        </p:nvPicPr>
+        <p:blipFill rotWithShape="1">
+          <a:blip r:embed="rId3"/>
+          <a:stretch>
+            <a:fillRect/>
+          </a:stretch>
+        </p:blipFill>
+        <p:spPr>
+          <a:xfrm>
+            <a:off x="457200" y="1367517"/>
+            <a:ext cx="4034760" cy="3775982"/>
+          </a:xfrm>
+          <a:prstGeom prst="rect">
+            <a:avLst/>
+          </a:prstGeom>
+        </p:spPr>
+      </p:pic>
+      <p:pic>
+        <p:nvPicPr>
+          <p:cNvPr id="12" name="그림 11"/>
+          <p:cNvPicPr>
+            <a:picLocks noChangeAspect="1"/>
+          </p:cNvPicPr>
+          <p:nvPr/>
+        </p:nvPicPr>
+        <p:blipFill rotWithShape="1">
+          <a:blip r:embed="rId4"/>
+          <a:stretch>
+            <a:fillRect/>
+          </a:stretch>
+        </p:blipFill>
+        <p:spPr>
+          <a:xfrm>
+            <a:off x="4572000" y="2571750"/>
+            <a:ext cx="4437673" cy="2571750"/>
+          </a:xfrm>
+          <a:prstGeom prst="rect">
+            <a:avLst/>
+          </a:prstGeom>
+        </p:spPr>
+      </p:pic>
+    </p:spTree>
+    <p:extLst>
+      <p:ext uri="{BB962C8B-B14F-4D97-AF65-F5344CB8AC3E}">
+        <p14:creationId xmlns:p14="http://schemas.microsoft.com/office/powerpoint/2010/main" val="3646351636"/>
+      </p:ext>
+    </p:extLst>
+  </p:cSld>
+  <p:clrMapOvr>
+    <a:masterClrMapping/>
+  </p:clrMapOvr>
+</p:sld>
+</file>
+
+<file path=ppt/slides/slide15.xml><?xml version="1.0" encoding="utf-8"?>
+<p:sld xmlns:r="http://schemas.openxmlformats.org/officeDocument/2006/relationships" xmlns:c="http://schemas.openxmlformats.org/drawingml/2006/chart" xmlns:a="http://schemas.openxmlformats.org/drawingml/2006/main" xmlns:dgm="http://schemas.openxmlformats.org/drawingml/2006/diagram" xmlns:dsp="http://schemas.microsoft.com/office/drawing/2008/diagram" xmlns:p="http://schemas.openxmlformats.org/presentationml/2006/main">
   <p:cSld name="Slide 12">
     <p:spTree>
       <p:nvGrpSpPr>
@@ -3165,21 +4530,27 @@
           <a:ln/>
         </p:spPr>
         <p:txBody>
-          <a:bodyPr wrap="square" rtlCol="0" anchor="ctr"/>
-          <a:lstStyle/>
-          <a:p>
-            <a:pPr indent="0" marL="0">
+          <a:bodyPr wrap="square" anchor="ctr"/>
+          <a:lstStyle/>
+          <a:p>
+            <a:pPr marL="0" lvl="0" indent="0">
               <a:buNone/>
-            </a:pPr>
-            <a:r>
-              <a:rPr lang="en-US" sz="2400" b="1" dirty="0">
-                <a:solidFill>
-                  <a:srgbClr val="20261C"/>
-                </a:solidFill>
+              <a:defRPr/>
+            </a:pPr>
+            <a:r>
+              <a:rPr lang="en-US" sz="2400" b="1">
+                <a:solidFill>
+                  <a:srgbClr val="20261c"/>
+                </a:solidFill>
+                <a:latin typeface="바탕"/>
+                <a:ea typeface="바탕"/>
               </a:rPr>
               <a:t>제출 전 확인</a:t>
             </a:r>
-            <a:endParaRPr lang="en-US" sz="2400" dirty="0"/>
+            <a:endParaRPr lang="en-US" sz="2400">
+              <a:latin typeface="바탕"/>
+              <a:ea typeface="바탕"/>
+            </a:endParaRPr>
           </a:p>
         </p:txBody>
       </p:sp>
@@ -3201,133 +4572,193 @@
           <a:ln/>
         </p:spPr>
         <p:txBody>
-          <a:bodyPr wrap="square" rtlCol="0" anchor="ctr"/>
-          <a:lstStyle/>
-          <a:p>
-            <a:pPr marL="342900" indent="-342900">
+          <a:bodyPr wrap="square" anchor="ctr"/>
+          <a:lstStyle/>
+          <a:p>
+            <a:pPr marL="342900" lvl="0" indent="-342900">
               <a:lnSpc>
                 <a:spcPct val="160000"/>
               </a:lnSpc>
               <a:buSzPct val="100000"/>
               <a:buChar char="•"/>
-            </a:pPr>
-            <a:r>
-              <a:rPr lang="en-US" sz="1400" dirty="0">
-                <a:solidFill>
-                  <a:srgbClr val="2A2320"/>
-                </a:solidFill>
+              <a:defRPr/>
+            </a:pPr>
+            <a:r>
+              <a:rPr lang="en-US" sz="1400">
+                <a:solidFill>
+                  <a:srgbClr val="2a2320"/>
+                </a:solidFill>
+                <a:latin typeface="바탕"/>
+                <a:ea typeface="바탕"/>
               </a:rPr>
               <a:t>모든 캡처에 «도메인 주소»가 보인다 — localhost 로 찍은 것은 반려된다</a:t>
             </a:r>
-            <a:endParaRPr lang="en-US" sz="1400" dirty="0"/>
-          </a:p>
-          <a:p>
-            <a:pPr marL="342900" indent="-342900">
+            <a:endParaRPr lang="en-US" sz="1400">
+              <a:solidFill>
+                <a:srgbClr val="2a2320"/>
+              </a:solidFill>
+              <a:latin typeface="바탕"/>
+              <a:ea typeface="바탕"/>
+            </a:endParaRPr>
+          </a:p>
+          <a:p>
+            <a:pPr marL="342900" lvl="0" indent="-342900">
               <a:lnSpc>
                 <a:spcPct val="160000"/>
               </a:lnSpc>
               <a:buSzPct val="100000"/>
               <a:buChar char="•"/>
-            </a:pPr>
-            <a:r>
-              <a:rPr lang="en-US" sz="1400" dirty="0">
-                <a:solidFill>
-                  <a:srgbClr val="2A2320"/>
-                </a:solidFill>
+              <a:defRPr/>
+            </a:pPr>
+            <a:r>
+              <a:rPr lang="en-US" sz="1400">
+                <a:solidFill>
+                  <a:srgbClr val="2a2320"/>
+                </a:solidFill>
+                <a:latin typeface="바탕"/>
+                <a:ea typeface="바탕"/>
               </a:rPr>
               <a:t>PDF 가 아니라 «PPT» 로 보낸다</a:t>
             </a:r>
-            <a:endParaRPr lang="en-US" sz="1400" dirty="0"/>
-          </a:p>
-          <a:p>
-            <a:pPr marL="342900" indent="-342900">
+            <a:endParaRPr lang="en-US" sz="1400">
+              <a:solidFill>
+                <a:srgbClr val="2a2320"/>
+              </a:solidFill>
+              <a:latin typeface="바탕"/>
+              <a:ea typeface="바탕"/>
+            </a:endParaRPr>
+          </a:p>
+          <a:p>
+            <a:pPr marL="342900" lvl="0" indent="-342900">
               <a:lnSpc>
                 <a:spcPct val="160000"/>
               </a:lnSpc>
               <a:buSzPct val="100000"/>
               <a:buChar char="•"/>
-            </a:pPr>
-            <a:r>
-              <a:rPr lang="en-US" sz="1400" dirty="0">
-                <a:solidFill>
-                  <a:srgbClr val="2A2320"/>
-                </a:solidFill>
+              <a:defRPr/>
+            </a:pPr>
+            <a:r>
+              <a:rPr lang="en-US" sz="1400">
+                <a:solidFill>
+                  <a:srgbClr val="2a2320"/>
+                </a:solidFill>
+                <a:latin typeface="바탕"/>
+                <a:ea typeface="바탕"/>
               </a:rPr>
               <a:t>심사 기간(10~14일)에는 홈페이지를 바꾸지 않는다 — 값·상품·판매상태·하단정보</a:t>
             </a:r>
-            <a:endParaRPr lang="en-US" sz="1400" dirty="0"/>
-          </a:p>
-          <a:p>
-            <a:pPr marL="342900" indent="-342900">
+            <a:endParaRPr lang="en-US" sz="1400">
+              <a:solidFill>
+                <a:srgbClr val="2a2320"/>
+              </a:solidFill>
+              <a:latin typeface="바탕"/>
+              <a:ea typeface="바탕"/>
+            </a:endParaRPr>
+          </a:p>
+          <a:p>
+            <a:pPr marL="342900" lvl="0" indent="-342900">
               <a:lnSpc>
                 <a:spcPct val="160000"/>
               </a:lnSpc>
               <a:buSzPct val="100000"/>
               <a:buChar char="•"/>
-            </a:pPr>
-            <a:r>
-              <a:rPr lang="en-US" sz="1400" dirty="0">
-                <a:solidFill>
-                  <a:srgbClr val="2A2320"/>
-                </a:solidFill>
+              <a:defRPr/>
+            </a:pPr>
+            <a:r>
+              <a:rPr lang="en-US" sz="1400">
+                <a:solidFill>
+                  <a:srgbClr val="2a2320"/>
+                </a:solidFill>
+                <a:latin typeface="바탕"/>
+                <a:ea typeface="바탕"/>
               </a:rPr>
               <a:t>하단정보가 사업자등록증과 완전히 같다</a:t>
             </a:r>
-            <a:endParaRPr lang="en-US" sz="1400" dirty="0"/>
-          </a:p>
-          <a:p>
-            <a:pPr marL="342900" indent="-342900">
+            <a:endParaRPr lang="en-US" sz="1400">
+              <a:solidFill>
+                <a:srgbClr val="2a2320"/>
+              </a:solidFill>
+              <a:latin typeface="바탕"/>
+              <a:ea typeface="바탕"/>
+            </a:endParaRPr>
+          </a:p>
+          <a:p>
+            <a:pPr marL="342900" lvl="0" indent="-342900">
               <a:lnSpc>
                 <a:spcPct val="160000"/>
               </a:lnSpc>
               <a:buSzPct val="100000"/>
               <a:buChar char="•"/>
-            </a:pPr>
-            <a:r>
-              <a:rPr lang="en-US" sz="1400" dirty="0">
-                <a:solidFill>
-                  <a:srgbClr val="2A2320"/>
-                </a:solidFill>
+              <a:defRPr/>
+            </a:pPr>
+            <a:r>
+              <a:rPr lang="en-US" sz="1400">
+                <a:solidFill>
+                  <a:srgbClr val="2a2320"/>
+                </a:solidFill>
+                <a:latin typeface="바탕"/>
+                <a:ea typeface="바탕"/>
               </a:rPr>
               <a:t>테스트 계정을 계약담당자에게 함께 전달한다</a:t>
             </a:r>
-            <a:endParaRPr lang="en-US" sz="1400" dirty="0"/>
-          </a:p>
-          <a:p>
-            <a:pPr marL="342900" indent="-342900">
+            <a:endParaRPr lang="en-US" sz="1400">
+              <a:solidFill>
+                <a:srgbClr val="2a2320"/>
+              </a:solidFill>
+              <a:latin typeface="바탕"/>
+              <a:ea typeface="바탕"/>
+            </a:endParaRPr>
+          </a:p>
+          <a:p>
+            <a:pPr marL="342900" lvl="0" indent="-342900">
               <a:lnSpc>
                 <a:spcPct val="160000"/>
               </a:lnSpc>
               <a:buSzPct val="100000"/>
               <a:buChar char="•"/>
-            </a:pPr>
-            <a:r>
-              <a:rPr lang="en-US" sz="1400" dirty="0">
-                <a:solidFill>
-                  <a:srgbClr val="2A2320"/>
-                </a:solidFill>
+              <a:defRPr/>
+            </a:pPr>
+            <a:r>
+              <a:rPr lang="en-US" sz="1400">
+                <a:solidFill>
+                  <a:srgbClr val="2a2320"/>
+                </a:solidFill>
+                <a:latin typeface="바탕"/>
+                <a:ea typeface="바탕"/>
               </a:rPr>
               <a:t>임의 금액 입력 충전이 없다 · 모든 옵션이 10만원 이하다</a:t>
             </a:r>
-            <a:endParaRPr lang="en-US" sz="1400" dirty="0"/>
-          </a:p>
-          <a:p>
-            <a:pPr marL="342900" indent="-342900">
+            <a:endParaRPr lang="en-US" sz="1400">
+              <a:solidFill>
+                <a:srgbClr val="2a2320"/>
+              </a:solidFill>
+              <a:latin typeface="바탕"/>
+              <a:ea typeface="바탕"/>
+            </a:endParaRPr>
+          </a:p>
+          <a:p>
+            <a:pPr marL="342900" lvl="0" indent="-342900">
               <a:lnSpc>
                 <a:spcPct val="160000"/>
               </a:lnSpc>
               <a:buSzPct val="100000"/>
               <a:buChar char="•"/>
-            </a:pPr>
-            <a:r>
-              <a:rPr lang="en-US" sz="1400" dirty="0">
-                <a:solidFill>
-                  <a:srgbClr val="2A2320"/>
-                </a:solidFill>
+              <a:defRPr/>
+            </a:pPr>
+            <a:r>
+              <a:rPr lang="en-US" sz="1400">
+                <a:solidFill>
+                  <a:srgbClr val="2a2320"/>
+                </a:solidFill>
+                <a:latin typeface="바탕"/>
+                <a:ea typeface="바탕"/>
               </a:rPr>
               <a:t>약관에 환불 수단·양도 불가·유효기간이 적혀 있다</a:t>
             </a:r>
-            <a:endParaRPr lang="en-US" sz="1400" dirty="0"/>
+            <a:endParaRPr lang="en-US" sz="1400">
+              <a:latin typeface="바탕"/>
+              <a:ea typeface="바탕"/>
+            </a:endParaRPr>
           </a:p>
         </p:txBody>
       </p:sp>
@@ -3340,7 +4771,7 @@
 </file>
 
 <file path=ppt/slides/slide2.xml><?xml version="1.0" encoding="utf-8"?>
-<p:sld xmlns:a="http://schemas.openxmlformats.org/drawingml/2006/main" xmlns:r="http://schemas.openxmlformats.org/officeDocument/2006/relationships" xmlns:p="http://schemas.openxmlformats.org/presentationml/2006/main">
+<p:sld xmlns:r="http://schemas.openxmlformats.org/officeDocument/2006/relationships" xmlns:c="http://schemas.openxmlformats.org/drawingml/2006/chart" xmlns:a="http://schemas.openxmlformats.org/drawingml/2006/main" xmlns:dgm="http://schemas.openxmlformats.org/drawingml/2006/diagram" xmlns:dsp="http://schemas.microsoft.com/office/drawing/2008/diagram" xmlns:p="http://schemas.openxmlformats.org/presentationml/2006/main">
   <p:cSld name="Slide 2">
     <p:spTree>
       <p:nvGrpSpPr>
@@ -3374,21 +4805,27 @@
           <a:ln/>
         </p:spPr>
         <p:txBody>
-          <a:bodyPr wrap="square" rtlCol="0" anchor="ctr"/>
-          <a:lstStyle/>
-          <a:p>
-            <a:pPr indent="0" marL="0">
+          <a:bodyPr wrap="square" anchor="ctr"/>
+          <a:lstStyle/>
+          <a:p>
+            <a:pPr marL="0" lvl="0" indent="0">
               <a:buNone/>
-            </a:pPr>
-            <a:r>
-              <a:rPr lang="en-US" sz="2200" b="1" dirty="0">
-                <a:solidFill>
-                  <a:srgbClr val="20261C"/>
-                </a:solidFill>
+              <a:defRPr/>
+            </a:pPr>
+            <a:r>
+              <a:rPr lang="en-US" sz="2200" b="1">
+                <a:solidFill>
+                  <a:srgbClr val="20261c"/>
+                </a:solidFill>
+                <a:latin typeface="바탕"/>
+                <a:ea typeface="바탕"/>
               </a:rPr>
               <a:t>②  하단정보</a:t>
             </a:r>
-            <a:endParaRPr lang="en-US" sz="2200" dirty="0"/>
+            <a:endParaRPr lang="en-US" sz="2200">
+              <a:latin typeface="바탕"/>
+              <a:ea typeface="바탕"/>
+            </a:endParaRPr>
           </a:p>
         </p:txBody>
       </p:sp>
@@ -3410,48 +4847,29 @@
           <a:ln/>
         </p:spPr>
         <p:txBody>
-          <a:bodyPr wrap="square" rtlCol="0" anchor="ctr"/>
-          <a:lstStyle/>
-          <a:p>
-            <a:pPr indent="0" marL="0">
+          <a:bodyPr wrap="square" anchor="ctr"/>
+          <a:lstStyle/>
+          <a:p>
+            <a:pPr marL="0" lvl="0" indent="0">
               <a:buNone/>
-            </a:pPr>
-            <a:r>
-              <a:rPr lang="en-US" sz="1200" dirty="0">
-                <a:solidFill>
-                  <a:srgbClr val="0E6F60"/>
-                </a:solidFill>
+              <a:defRPr/>
+            </a:pPr>
+            <a:r>
+              <a:rPr lang="en-US" sz="1200">
+                <a:solidFill>
+                  <a:srgbClr val="0e6f60"/>
+                </a:solidFill>
+                <a:latin typeface="바탕"/>
+                <a:ea typeface="바탕"/>
               </a:rPr>
               <a:t>https://caffeinecolor.com/</a:t>
             </a:r>
-            <a:endParaRPr lang="en-US" sz="1200" dirty="0"/>
-          </a:p>
-        </p:txBody>
-      </p:sp>
-      <p:sp>
-        <p:nvSpPr>
-          <p:cNvPr id="4" name="Shape 2"/>
-          <p:cNvSpPr/>
-          <p:nvPr/>
-        </p:nvSpPr>
-        <p:spPr>
-          <a:xfrm>
-            <a:off x="457200" y="1143000"/>
-            <a:ext cx="5394960" cy="3566160"/>
-          </a:xfrm>
-          <a:prstGeom prst="rect">
-            <a:avLst/>
-          </a:prstGeom>
-          <a:solidFill>
-            <a:srgbClr val="FBF9F4"/>
-          </a:solidFill>
-          <a:ln w="12700">
-            <a:solidFill>
-              <a:srgbClr val="D8D4C6"/>
-            </a:solidFill>
-            <a:prstDash val="dash"/>
-          </a:ln>
-        </p:spPr>
+            <a:endParaRPr lang="en-US" sz="1200">
+              <a:latin typeface="바탕"/>
+              <a:ea typeface="바탕"/>
+            </a:endParaRPr>
+          </a:p>
+        </p:txBody>
       </p:sp>
       <p:sp>
         <p:nvSpPr>
@@ -3471,35 +4889,50 @@
           <a:ln/>
         </p:spPr>
         <p:txBody>
-          <a:bodyPr wrap="square" rtlCol="0" anchor="ctr"/>
-          <a:lstStyle/>
-          <a:p>
-            <a:pPr algn="ctr" indent="0" marL="0">
+          <a:bodyPr wrap="square" anchor="ctr"/>
+          <a:lstStyle/>
+          <a:p>
+            <a:pPr marL="0" lvl="0" indent="0" algn="ctr">
               <a:buNone/>
-            </a:pPr>
-            <a:r>
-              <a:rPr lang="en-US" sz="1300" dirty="0">
-                <a:solidFill>
-                  <a:srgbClr val="9A8C68"/>
-                </a:solidFill>
+              <a:defRPr/>
+            </a:pPr>
+            <a:r>
+              <a:rPr lang="en-US" sz="1300">
+                <a:solidFill>
+                  <a:srgbClr val="9a8c68"/>
+                </a:solidFill>
+                <a:latin typeface="바탕"/>
+                <a:ea typeface="바탕"/>
               </a:rPr>
               <a:t>여기에 캡처를 끼웁니다</a:t>
             </a:r>
-            <a:endParaRPr lang="en-US" sz="1300" dirty="0"/>
-          </a:p>
-          <a:p>
-            <a:pPr algn="ctr" indent="0" marL="0">
+            <a:endParaRPr lang="en-US" sz="1300">
+              <a:solidFill>
+                <a:srgbClr val="9a8c68"/>
+              </a:solidFill>
+              <a:latin typeface="바탕"/>
+              <a:ea typeface="바탕"/>
+            </a:endParaRPr>
+          </a:p>
+          <a:p>
+            <a:pPr marL="0" lvl="0" indent="0" algn="ctr">
               <a:buNone/>
-            </a:pPr>
-            <a:r>
-              <a:rPr lang="en-US" sz="1300" dirty="0">
-                <a:solidFill>
-                  <a:srgbClr val="9A8C68"/>
-                </a:solidFill>
+              <a:defRPr/>
+            </a:pPr>
+            <a:r>
+              <a:rPr lang="en-US" sz="1300">
+                <a:solidFill>
+                  <a:srgbClr val="9a8c68"/>
+                </a:solidFill>
+                <a:latin typeface="바탕"/>
+                <a:ea typeface="바탕"/>
               </a:rPr>
               <a:t>(주소창이 보이도록 창째로)</a:t>
             </a:r>
-            <a:endParaRPr lang="en-US" sz="1300" dirty="0"/>
+            <a:endParaRPr lang="en-US" sz="1300">
+              <a:latin typeface="바탕"/>
+              <a:ea typeface="바탕"/>
+            </a:endParaRPr>
           </a:p>
         </p:txBody>
       </p:sp>
@@ -3521,21 +4954,27 @@
           <a:ln/>
         </p:spPr>
         <p:txBody>
-          <a:bodyPr wrap="square" rtlCol="0" anchor="ctr"/>
-          <a:lstStyle/>
-          <a:p>
-            <a:pPr indent="0" marL="0">
+          <a:bodyPr wrap="square" anchor="ctr"/>
+          <a:lstStyle/>
+          <a:p>
+            <a:pPr marL="0" lvl="0" indent="0">
               <a:buNone/>
-            </a:pPr>
-            <a:r>
-              <a:rPr lang="en-US" sz="1200" b="1" dirty="0">
-                <a:solidFill>
-                  <a:srgbClr val="2A2320"/>
-                </a:solidFill>
+              <a:defRPr/>
+            </a:pPr>
+            <a:r>
+              <a:rPr lang="en-US" sz="1200" b="1">
+                <a:solidFill>
+                  <a:srgbClr val="2a2320"/>
+                </a:solidFill>
+                <a:latin typeface="바탕"/>
+                <a:ea typeface="바탕"/>
               </a:rPr>
               <a:t>이 화면에 반드시 보여야 하는 것</a:t>
             </a:r>
-            <a:endParaRPr lang="en-US" sz="1200" dirty="0"/>
+            <a:endParaRPr lang="en-US" sz="1200">
+              <a:latin typeface="바탕"/>
+              <a:ea typeface="바탕"/>
+            </a:endParaRPr>
           </a:p>
         </p:txBody>
       </p:sp>
@@ -3548,7 +4987,7 @@
         <p:spPr>
           <a:xfrm>
             <a:off x="6126480" y="1463040"/>
-            <a:ext cx="2560320" cy="3200400"/>
+            <a:ext cx="2560320" cy="2580518"/>
           </a:xfrm>
           <a:prstGeom prst="rect">
             <a:avLst/>
@@ -3557,100 +4996,166 @@
           <a:ln/>
         </p:spPr>
         <p:txBody>
-          <a:bodyPr wrap="square" rtlCol="0" anchor="ctr"/>
-          <a:lstStyle/>
-          <a:p>
-            <a:pPr marL="342900" indent="-342900">
+          <a:bodyPr wrap="square" anchor="ctr"/>
+          <a:lstStyle/>
+          <a:p>
+            <a:pPr marL="342900" lvl="0" indent="-342900">
               <a:lnSpc>
                 <a:spcPct val="125000"/>
               </a:lnSpc>
               <a:buSzPct val="100000"/>
               <a:buChar char="•"/>
-            </a:pPr>
-            <a:r>
-              <a:rPr lang="en-US" sz="1000" dirty="0">
-                <a:solidFill>
-                  <a:srgbClr val="4E4A3B"/>
-                </a:solidFill>
+              <a:defRPr/>
+            </a:pPr>
+            <a:r>
+              <a:rPr lang="en-US" sz="1000">
+                <a:solidFill>
+                  <a:srgbClr val="4e4a3b"/>
+                </a:solidFill>
+                <a:latin typeface="바탕"/>
+                <a:ea typeface="바탕"/>
               </a:rPr>
               <a:t>필수 정보가 모두 보이게 푸터까지 스크롤해서 캡처</a:t>
             </a:r>
-            <a:endParaRPr lang="en-US" sz="1000" dirty="0"/>
-          </a:p>
-          <a:p>
-            <a:pPr marL="342900" indent="-342900">
+            <a:endParaRPr lang="en-US" sz="1000">
+              <a:solidFill>
+                <a:srgbClr val="4e4a3b"/>
+              </a:solidFill>
+              <a:latin typeface="바탕"/>
+              <a:ea typeface="바탕"/>
+            </a:endParaRPr>
+          </a:p>
+          <a:p>
+            <a:pPr marL="342900" lvl="0" indent="-342900">
               <a:lnSpc>
                 <a:spcPct val="125000"/>
               </a:lnSpc>
               <a:buSzPct val="100000"/>
               <a:buChar char="•"/>
-            </a:pPr>
-            <a:r>
-              <a:rPr lang="en-US" sz="1000" dirty="0">
-                <a:solidFill>
-                  <a:srgbClr val="4E4A3B"/>
-                </a:solidFill>
+              <a:defRPr/>
+            </a:pPr>
+            <a:r>
+              <a:rPr lang="en-US" sz="1000">
+                <a:solidFill>
+                  <a:srgbClr val="4e4a3b"/>
+                </a:solidFill>
+                <a:latin typeface="바탕"/>
+                <a:ea typeface="바탕"/>
               </a:rPr>
               <a:t>상호명 카페인컬러 / 사업자등록번호 608-79-25359</a:t>
             </a:r>
-            <a:endParaRPr lang="en-US" sz="1000" dirty="0"/>
-          </a:p>
-          <a:p>
-            <a:pPr marL="342900" indent="-342900">
+            <a:endParaRPr lang="en-US" sz="1000">
+              <a:solidFill>
+                <a:srgbClr val="4e4a3b"/>
+              </a:solidFill>
+              <a:latin typeface="바탕"/>
+              <a:ea typeface="바탕"/>
+            </a:endParaRPr>
+          </a:p>
+          <a:p>
+            <a:pPr marL="342900" lvl="0" indent="-342900">
               <a:lnSpc>
                 <a:spcPct val="125000"/>
               </a:lnSpc>
               <a:buSzPct val="100000"/>
               <a:buChar char="•"/>
-            </a:pPr>
-            <a:r>
-              <a:rPr lang="en-US" sz="1000" dirty="0">
-                <a:solidFill>
-                  <a:srgbClr val="4E4A3B"/>
-                </a:solidFill>
+              <a:defRPr/>
+            </a:pPr>
+            <a:r>
+              <a:rPr lang="en-US" sz="1000">
+                <a:solidFill>
+                  <a:srgbClr val="4e4a3b"/>
+                </a:solidFill>
+                <a:latin typeface="바탕"/>
+                <a:ea typeface="바탕"/>
               </a:rPr>
               <a:t>대표자명 최현 / 주소 서울특별시 강남구 학동로4길 15, 719호 동화상가 (논현동)</a:t>
             </a:r>
-            <a:endParaRPr lang="en-US" sz="1000" dirty="0"/>
-          </a:p>
-          <a:p>
-            <a:pPr marL="342900" indent="-342900">
+            <a:endParaRPr lang="en-US" sz="1000">
+              <a:solidFill>
+                <a:srgbClr val="4e4a3b"/>
+              </a:solidFill>
+              <a:latin typeface="바탕"/>
+              <a:ea typeface="바탕"/>
+            </a:endParaRPr>
+          </a:p>
+          <a:p>
+            <a:pPr marL="342900" lvl="0" indent="-342900">
               <a:lnSpc>
                 <a:spcPct val="125000"/>
               </a:lnSpc>
               <a:buSzPct val="100000"/>
               <a:buChar char="•"/>
-            </a:pPr>
-            <a:r>
-              <a:rPr lang="en-US" sz="1000" dirty="0">
-                <a:solidFill>
-                  <a:srgbClr val="4E4A3B"/>
-                </a:solidFill>
+              <a:defRPr/>
+            </a:pPr>
+            <a:r>
+              <a:rPr lang="en-US" sz="1000">
+                <a:solidFill>
+                  <a:srgbClr val="4e4a3b"/>
+                </a:solidFill>
+                <a:latin typeface="바탕"/>
+                <a:ea typeface="바탕"/>
               </a:rPr>
               <a:t>전화번호 010-6526-9808 / 통신판매업신고번호 제 2026-서울강남-04184 호</a:t>
             </a:r>
-            <a:endParaRPr lang="en-US" sz="1000" dirty="0"/>
-          </a:p>
-          <a:p>
-            <a:pPr marL="342900" indent="-342900">
+            <a:endParaRPr lang="en-US" sz="1000">
+              <a:solidFill>
+                <a:srgbClr val="4e4a3b"/>
+              </a:solidFill>
+              <a:latin typeface="바탕"/>
+              <a:ea typeface="바탕"/>
+            </a:endParaRPr>
+          </a:p>
+          <a:p>
+            <a:pPr marL="342900" lvl="0" indent="-342900">
               <a:lnSpc>
                 <a:spcPct val="125000"/>
               </a:lnSpc>
               <a:buSzPct val="100000"/>
               <a:buChar char="•"/>
-            </a:pPr>
-            <a:r>
-              <a:rPr lang="en-US" sz="1000" dirty="0">
-                <a:solidFill>
-                  <a:srgbClr val="4E4A3B"/>
-                </a:solidFill>
+              <a:defRPr/>
+            </a:pPr>
+            <a:r>
+              <a:rPr lang="en-US" sz="1000">
+                <a:solidFill>
+                  <a:srgbClr val="4e4a3b"/>
+                </a:solidFill>
+                <a:latin typeface="바탕"/>
+                <a:ea typeface="바탕"/>
               </a:rPr>
               <a:t>사업자등록증과 «완전히 동일»해야 한다 — 한 글자만 달라도 반려</a:t>
             </a:r>
-            <a:endParaRPr lang="en-US" sz="1000" dirty="0"/>
-          </a:p>
-        </p:txBody>
-      </p:sp>
+            <a:endParaRPr lang="en-US" sz="1000">
+              <a:latin typeface="바탕"/>
+              <a:ea typeface="바탕"/>
+            </a:endParaRPr>
+          </a:p>
+        </p:txBody>
+      </p:sp>
+      <p:pic>
+        <p:nvPicPr>
+          <p:cNvPr id="9" name="그림 8"/>
+          <p:cNvPicPr>
+            <a:picLocks noChangeAspect="1"/>
+          </p:cNvPicPr>
+          <p:nvPr/>
+        </p:nvPicPr>
+        <p:blipFill rotWithShape="1">
+          <a:blip r:embed="rId3"/>
+          <a:stretch>
+            <a:fillRect/>
+          </a:stretch>
+        </p:blipFill>
+        <p:spPr>
+          <a:xfrm>
+            <a:off x="457200" y="1172217"/>
+            <a:ext cx="5394960" cy="2871341"/>
+          </a:xfrm>
+          <a:prstGeom prst="rect">
+            <a:avLst/>
+          </a:prstGeom>
+        </p:spPr>
+      </p:pic>
     </p:spTree>
   </p:cSld>
   <p:clrMapOvr>
@@ -3660,7 +5165,7 @@
 </file>
 
 <file path=ppt/slides/slide3.xml><?xml version="1.0" encoding="utf-8"?>
-<p:sld xmlns:a="http://schemas.openxmlformats.org/drawingml/2006/main" xmlns:r="http://schemas.openxmlformats.org/officeDocument/2006/relationships" xmlns:p="http://schemas.openxmlformats.org/presentationml/2006/main">
+<p:sld xmlns:r="http://schemas.openxmlformats.org/officeDocument/2006/relationships" xmlns:c="http://schemas.openxmlformats.org/drawingml/2006/chart" xmlns:a="http://schemas.openxmlformats.org/drawingml/2006/main" xmlns:dgm="http://schemas.openxmlformats.org/drawingml/2006/diagram" xmlns:dsp="http://schemas.microsoft.com/office/drawing/2008/diagram" xmlns:p="http://schemas.openxmlformats.org/presentationml/2006/main">
   <p:cSld name="Slide 3">
     <p:spTree>
       <p:nvGrpSpPr>
@@ -3694,21 +5199,30 @@
           <a:ln/>
         </p:spPr>
         <p:txBody>
-          <a:bodyPr wrap="square" rtlCol="0" anchor="ctr"/>
-          <a:lstStyle/>
-          <a:p>
-            <a:pPr indent="0" marL="0">
+          <a:bodyPr wrap="square" anchor="ctr"/>
+          <a:lstStyle/>
+          <a:p>
+            <a:pPr marL="0" lvl="0" indent="0">
               <a:buNone/>
-            </a:pPr>
-            <a:r>
-              <a:rPr lang="en-US" sz="2200" b="1" dirty="0">
-                <a:solidFill>
-                  <a:srgbClr val="20261C"/>
-                </a:solidFill>
+              <a:defRPr/>
+            </a:pPr>
+            <a:r>
+              <a:rPr lang="en-US" sz="2200" b="1">
+                <a:solidFill>
+                  <a:srgbClr val="20261c"/>
+                </a:solidFill>
+                <a:latin typeface="바탕"/>
+                <a:ea typeface="바탕"/>
               </a:rPr>
               <a:t>③④  약관 및 환불 규정</a:t>
             </a:r>
-            <a:endParaRPr lang="en-US" sz="2200" dirty="0"/>
+            <a:endParaRPr lang="ko-KR" altLang="en-US" sz="2200" b="1">
+              <a:solidFill>
+                <a:srgbClr val="20261c"/>
+              </a:solidFill>
+              <a:latin typeface="바탕"/>
+              <a:ea typeface="바탕"/>
+            </a:endParaRPr>
           </a:p>
         </p:txBody>
       </p:sp>
@@ -3730,96 +5244,27 @@
           <a:ln/>
         </p:spPr>
         <p:txBody>
-          <a:bodyPr wrap="square" rtlCol="0" anchor="ctr"/>
-          <a:lstStyle/>
-          <a:p>
-            <a:pPr indent="0" marL="0">
+          <a:bodyPr wrap="square" anchor="ctr"/>
+          <a:lstStyle/>
+          <a:p>
+            <a:pPr marL="0" lvl="0" indent="0">
               <a:buNone/>
-            </a:pPr>
-            <a:r>
-              <a:rPr lang="en-US" sz="1200" dirty="0">
-                <a:solidFill>
-                  <a:srgbClr val="0E6F60"/>
-                </a:solidFill>
+              <a:defRPr/>
+            </a:pPr>
+            <a:r>
+              <a:rPr lang="en-US" sz="1200">
+                <a:solidFill>
+                  <a:srgbClr val="0e6f60"/>
+                </a:solidFill>
+                <a:latin typeface="바탕"/>
+                <a:ea typeface="바탕"/>
               </a:rPr>
               <a:t>https://caffeinecolor.com/terms</a:t>
             </a:r>
-            <a:endParaRPr lang="en-US" sz="1200" dirty="0"/>
-          </a:p>
-        </p:txBody>
-      </p:sp>
-      <p:sp>
-        <p:nvSpPr>
-          <p:cNvPr id="4" name="Shape 2"/>
-          <p:cNvSpPr/>
-          <p:nvPr/>
-        </p:nvSpPr>
-        <p:spPr>
-          <a:xfrm>
-            <a:off x="457200" y="1143000"/>
-            <a:ext cx="5394960" cy="3566160"/>
-          </a:xfrm>
-          <a:prstGeom prst="rect">
-            <a:avLst/>
-          </a:prstGeom>
-          <a:solidFill>
-            <a:srgbClr val="FBF9F4"/>
-          </a:solidFill>
-          <a:ln w="12700">
-            <a:solidFill>
-              <a:srgbClr val="D8D4C6"/>
-            </a:solidFill>
-            <a:prstDash val="dash"/>
-          </a:ln>
-        </p:spPr>
-      </p:sp>
-      <p:sp>
-        <p:nvSpPr>
-          <p:cNvPr id="5" name="Text 3"/>
-          <p:cNvSpPr/>
-          <p:nvPr/>
-        </p:nvSpPr>
-        <p:spPr>
-          <a:xfrm>
-            <a:off x="457200" y="2560320"/>
-            <a:ext cx="5394960" cy="731520"/>
-          </a:xfrm>
-          <a:prstGeom prst="rect">
-            <a:avLst/>
-          </a:prstGeom>
-          <a:noFill/>
-          <a:ln/>
-        </p:spPr>
-        <p:txBody>
-          <a:bodyPr wrap="square" rtlCol="0" anchor="ctr"/>
-          <a:lstStyle/>
-          <a:p>
-            <a:pPr algn="ctr" indent="0" marL="0">
-              <a:buNone/>
-            </a:pPr>
-            <a:r>
-              <a:rPr lang="en-US" sz="1300" dirty="0">
-                <a:solidFill>
-                  <a:srgbClr val="9A8C68"/>
-                </a:solidFill>
-              </a:rPr>
-              <a:t>여기에 캡처를 끼웁니다</a:t>
-            </a:r>
-            <a:endParaRPr lang="en-US" sz="1300" dirty="0"/>
-          </a:p>
-          <a:p>
-            <a:pPr algn="ctr" indent="0" marL="0">
-              <a:buNone/>
-            </a:pPr>
-            <a:r>
-              <a:rPr lang="en-US" sz="1300" dirty="0">
-                <a:solidFill>
-                  <a:srgbClr val="9A8C68"/>
-                </a:solidFill>
-              </a:rPr>
-              <a:t>(주소창이 보이도록 창째로)</a:t>
-            </a:r>
-            <a:endParaRPr lang="en-US" sz="1300" dirty="0"/>
+            <a:endParaRPr lang="en-US" sz="1200">
+              <a:latin typeface="바탕"/>
+              <a:ea typeface="바탕"/>
+            </a:endParaRPr>
           </a:p>
         </p:txBody>
       </p:sp>
@@ -3841,21 +5286,27 @@
           <a:ln/>
         </p:spPr>
         <p:txBody>
-          <a:bodyPr wrap="square" rtlCol="0" anchor="ctr"/>
-          <a:lstStyle/>
-          <a:p>
-            <a:pPr indent="0" marL="0">
+          <a:bodyPr wrap="square" anchor="ctr"/>
+          <a:lstStyle/>
+          <a:p>
+            <a:pPr marL="0" lvl="0" indent="0">
               <a:buNone/>
-            </a:pPr>
-            <a:r>
-              <a:rPr lang="en-US" sz="1200" b="1" dirty="0">
-                <a:solidFill>
-                  <a:srgbClr val="2A2320"/>
-                </a:solidFill>
+              <a:defRPr/>
+            </a:pPr>
+            <a:r>
+              <a:rPr lang="en-US" sz="1200" b="1">
+                <a:solidFill>
+                  <a:srgbClr val="2a2320"/>
+                </a:solidFill>
+                <a:latin typeface="바탕"/>
+                <a:ea typeface="바탕"/>
               </a:rPr>
               <a:t>이 화면에 반드시 보여야 하는 것</a:t>
             </a:r>
-            <a:endParaRPr lang="en-US" sz="1200" dirty="0"/>
+            <a:endParaRPr lang="en-US" sz="1200">
+              <a:latin typeface="바탕"/>
+              <a:ea typeface="바탕"/>
+            </a:endParaRPr>
           </a:p>
         </p:txBody>
       </p:sp>
@@ -3868,7 +5319,7 @@
         <p:spPr>
           <a:xfrm>
             <a:off x="6126480" y="1463040"/>
-            <a:ext cx="2560320" cy="3200400"/>
+            <a:ext cx="2560320" cy="1805668"/>
           </a:xfrm>
           <a:prstGeom prst="rect">
             <a:avLst/>
@@ -3877,64 +5328,137 @@
           <a:ln/>
         </p:spPr>
         <p:txBody>
-          <a:bodyPr wrap="square" rtlCol="0" anchor="ctr"/>
-          <a:lstStyle/>
-          <a:p>
-            <a:pPr marL="342900" indent="-342900">
+          <a:bodyPr wrap="square" anchor="ctr"/>
+          <a:lstStyle/>
+          <a:p>
+            <a:pPr marL="342900" lvl="0" indent="-342900">
               <a:lnSpc>
                 <a:spcPct val="125000"/>
               </a:lnSpc>
               <a:buSzPct val="100000"/>
               <a:buChar char="•"/>
-            </a:pPr>
-            <a:r>
-              <a:rPr lang="en-US" sz="1000" dirty="0">
-                <a:solidFill>
-                  <a:srgbClr val="4E4A3B"/>
-                </a:solidFill>
+              <a:defRPr/>
+            </a:pPr>
+            <a:r>
+              <a:rPr lang="en-US" sz="1000">
+                <a:solidFill>
+                  <a:srgbClr val="4e4a3b"/>
+                </a:solidFill>
+                <a:latin typeface="바탕"/>
+                <a:ea typeface="바탕"/>
               </a:rPr>
               <a:t>제6조(크레딧 및 결제) 전체 — 특히 ⑤ 유효기간 · ⑥ 양도 불가 · ⑦ 1회 10만원 이하</a:t>
             </a:r>
-            <a:endParaRPr lang="en-US" sz="1000" dirty="0"/>
-          </a:p>
-          <a:p>
-            <a:pPr marL="342900" indent="-342900">
+            <a:endParaRPr lang="en-US" sz="1000">
+              <a:solidFill>
+                <a:srgbClr val="4e4a3b"/>
+              </a:solidFill>
+              <a:latin typeface="바탕"/>
+              <a:ea typeface="바탕"/>
+            </a:endParaRPr>
+          </a:p>
+          <a:p>
+            <a:pPr marL="342900" lvl="0" indent="-342900">
               <a:lnSpc>
                 <a:spcPct val="125000"/>
               </a:lnSpc>
               <a:buSzPct val="100000"/>
               <a:buChar char="•"/>
-            </a:pPr>
-            <a:r>
-              <a:rPr lang="en-US" sz="1000" dirty="0">
-                <a:solidFill>
-                  <a:srgbClr val="4E4A3B"/>
-                </a:solidFill>
+              <a:defRPr/>
+            </a:pPr>
+            <a:r>
+              <a:rPr lang="en-US" sz="1000">
+                <a:solidFill>
+                  <a:srgbClr val="4e4a3b"/>
+                </a:solidFill>
+                <a:latin typeface="바탕"/>
+                <a:ea typeface="바탕"/>
               </a:rPr>
               <a:t>제7조(청약철회 및 환불) 전체 — 특히 ③ 구매 시점 결제 금액 기준 · ④ 결제한 수단으로 환불</a:t>
             </a:r>
-            <a:endParaRPr lang="en-US" sz="1000" dirty="0"/>
-          </a:p>
-          <a:p>
-            <a:pPr marL="342900" indent="-342900">
+            <a:endParaRPr lang="en-US" sz="1000">
+              <a:solidFill>
+                <a:srgbClr val="4e4a3b"/>
+              </a:solidFill>
+              <a:latin typeface="바탕"/>
+              <a:ea typeface="바탕"/>
+            </a:endParaRPr>
+          </a:p>
+          <a:p>
+            <a:pPr marL="342900" lvl="0" indent="-342900">
               <a:lnSpc>
                 <a:spcPct val="125000"/>
               </a:lnSpc>
               <a:buSzPct val="100000"/>
               <a:buChar char="•"/>
-            </a:pPr>
-            <a:r>
-              <a:rPr lang="en-US" sz="1000" dirty="0">
-                <a:solidFill>
-                  <a:srgbClr val="4E4A3B"/>
-                </a:solidFill>
+              <a:defRPr/>
+            </a:pPr>
+            <a:r>
+              <a:rPr lang="en-US" sz="1000">
+                <a:solidFill>
+                  <a:srgbClr val="4e4a3b"/>
+                </a:solidFill>
+                <a:latin typeface="바탕"/>
+                <a:ea typeface="바탕"/>
               </a:rPr>
               <a:t>두 조가 한 장에 안 들어가면 나눠서 두 장으로 찍는다</a:t>
             </a:r>
-            <a:endParaRPr lang="en-US" sz="1000" dirty="0"/>
-          </a:p>
-        </p:txBody>
-      </p:sp>
+            <a:endParaRPr lang="en-US" sz="1000">
+              <a:latin typeface="바탕"/>
+              <a:ea typeface="바탕"/>
+            </a:endParaRPr>
+          </a:p>
+        </p:txBody>
+      </p:sp>
+      <p:pic>
+        <p:nvPicPr>
+          <p:cNvPr id="8" name="그림 7"/>
+          <p:cNvPicPr>
+            <a:picLocks noChangeAspect="1"/>
+          </p:cNvPicPr>
+          <p:nvPr/>
+        </p:nvPicPr>
+        <p:blipFill rotWithShape="1">
+          <a:blip r:embed="rId3"/>
+          <a:srcRect b="38780"/>
+          <a:stretch>
+            <a:fillRect/>
+          </a:stretch>
+        </p:blipFill>
+        <p:spPr>
+          <a:xfrm>
+            <a:off x="457200" y="1143000"/>
+            <a:ext cx="3751781" cy="2449285"/>
+          </a:xfrm>
+          <a:prstGeom prst="rect">
+            <a:avLst/>
+          </a:prstGeom>
+        </p:spPr>
+      </p:pic>
+      <p:pic>
+        <p:nvPicPr>
+          <p:cNvPr id="9" name="그림 8"/>
+          <p:cNvPicPr>
+            <a:picLocks noChangeAspect="1"/>
+          </p:cNvPicPr>
+          <p:nvPr/>
+        </p:nvPicPr>
+        <p:blipFill rotWithShape="1">
+          <a:blip r:embed="rId4"/>
+          <a:stretch>
+            <a:fillRect/>
+          </a:stretch>
+        </p:blipFill>
+        <p:spPr>
+          <a:xfrm>
+            <a:off x="2094325" y="3005270"/>
+            <a:ext cx="3557604" cy="1839541"/>
+          </a:xfrm>
+          <a:prstGeom prst="rect">
+            <a:avLst/>
+          </a:prstGeom>
+        </p:spPr>
+      </p:pic>
     </p:spTree>
   </p:cSld>
   <p:clrMapOvr>
@@ -3944,7 +5468,7 @@
 </file>
 
 <file path=ppt/slides/slide4.xml><?xml version="1.0" encoding="utf-8"?>
-<p:sld xmlns:a="http://schemas.openxmlformats.org/drawingml/2006/main" xmlns:r="http://schemas.openxmlformats.org/officeDocument/2006/relationships" xmlns:p="http://schemas.openxmlformats.org/presentationml/2006/main">
+<p:sld xmlns:r="http://schemas.openxmlformats.org/officeDocument/2006/relationships" xmlns:c="http://schemas.openxmlformats.org/drawingml/2006/chart" xmlns:a="http://schemas.openxmlformats.org/drawingml/2006/main" xmlns:dgm="http://schemas.openxmlformats.org/drawingml/2006/diagram" xmlns:dsp="http://schemas.microsoft.com/office/drawing/2008/diagram" xmlns:p="http://schemas.openxmlformats.org/presentationml/2006/main">
   <p:cSld name="Slide 4">
     <p:spTree>
       <p:nvGrpSpPr>
@@ -3978,21 +5502,27 @@
           <a:ln/>
         </p:spPr>
         <p:txBody>
-          <a:bodyPr wrap="square" rtlCol="0" anchor="ctr"/>
-          <a:lstStyle/>
-          <a:p>
-            <a:pPr indent="0" marL="0">
+          <a:bodyPr wrap="square" anchor="ctr"/>
+          <a:lstStyle/>
+          <a:p>
+            <a:pPr marL="0" lvl="0" indent="0">
               <a:buNone/>
-            </a:pPr>
-            <a:r>
-              <a:rPr lang="en-US" sz="2200" b="1" dirty="0">
-                <a:solidFill>
-                  <a:srgbClr val="20261C"/>
-                </a:solidFill>
+              <a:defRPr/>
+            </a:pPr>
+            <a:r>
+              <a:rPr lang="en-US" sz="2200" b="1">
+                <a:solidFill>
+                  <a:srgbClr val="20261c"/>
+                </a:solidFill>
+                <a:latin typeface="바탕"/>
+                <a:ea typeface="바탕"/>
               </a:rPr>
               <a:t>⑤  로그인 경로</a:t>
             </a:r>
-            <a:endParaRPr lang="en-US" sz="2200" dirty="0"/>
+            <a:endParaRPr lang="en-US" sz="2200">
+              <a:latin typeface="바탕"/>
+              <a:ea typeface="바탕"/>
+            </a:endParaRPr>
           </a:p>
         </p:txBody>
       </p:sp>
@@ -4014,96 +5544,27 @@
           <a:ln/>
         </p:spPr>
         <p:txBody>
-          <a:bodyPr wrap="square" rtlCol="0" anchor="ctr"/>
-          <a:lstStyle/>
-          <a:p>
-            <a:pPr indent="0" marL="0">
+          <a:bodyPr wrap="square" anchor="ctr"/>
+          <a:lstStyle/>
+          <a:p>
+            <a:pPr marL="0" lvl="0" indent="0">
               <a:buNone/>
-            </a:pPr>
-            <a:r>
-              <a:rPr lang="en-US" sz="1200" dirty="0">
-                <a:solidFill>
-                  <a:srgbClr val="0E6F60"/>
-                </a:solidFill>
+              <a:defRPr/>
+            </a:pPr>
+            <a:r>
+              <a:rPr lang="en-US" sz="1200">
+                <a:solidFill>
+                  <a:srgbClr val="0e6f60"/>
+                </a:solidFill>
+                <a:latin typeface="바탕"/>
+                <a:ea typeface="바탕"/>
               </a:rPr>
               <a:t>https://caffeinecolor.com/login</a:t>
             </a:r>
-            <a:endParaRPr lang="en-US" sz="1200" dirty="0"/>
-          </a:p>
-        </p:txBody>
-      </p:sp>
-      <p:sp>
-        <p:nvSpPr>
-          <p:cNvPr id="4" name="Shape 2"/>
-          <p:cNvSpPr/>
-          <p:nvPr/>
-        </p:nvSpPr>
-        <p:spPr>
-          <a:xfrm>
-            <a:off x="457200" y="1143000"/>
-            <a:ext cx="5394960" cy="3566160"/>
-          </a:xfrm>
-          <a:prstGeom prst="rect">
-            <a:avLst/>
-          </a:prstGeom>
-          <a:solidFill>
-            <a:srgbClr val="FBF9F4"/>
-          </a:solidFill>
-          <a:ln w="12700">
-            <a:solidFill>
-              <a:srgbClr val="D8D4C6"/>
-            </a:solidFill>
-            <a:prstDash val="dash"/>
-          </a:ln>
-        </p:spPr>
-      </p:sp>
-      <p:sp>
-        <p:nvSpPr>
-          <p:cNvPr id="5" name="Text 3"/>
-          <p:cNvSpPr/>
-          <p:nvPr/>
-        </p:nvSpPr>
-        <p:spPr>
-          <a:xfrm>
-            <a:off x="457200" y="2560320"/>
-            <a:ext cx="5394960" cy="731520"/>
-          </a:xfrm>
-          <a:prstGeom prst="rect">
-            <a:avLst/>
-          </a:prstGeom>
-          <a:noFill/>
-          <a:ln/>
-        </p:spPr>
-        <p:txBody>
-          <a:bodyPr wrap="square" rtlCol="0" anchor="ctr"/>
-          <a:lstStyle/>
-          <a:p>
-            <a:pPr algn="ctr" indent="0" marL="0">
-              <a:buNone/>
-            </a:pPr>
-            <a:r>
-              <a:rPr lang="en-US" sz="1300" dirty="0">
-                <a:solidFill>
-                  <a:srgbClr val="9A8C68"/>
-                </a:solidFill>
-              </a:rPr>
-              <a:t>여기에 캡처를 끼웁니다</a:t>
-            </a:r>
-            <a:endParaRPr lang="en-US" sz="1300" dirty="0"/>
-          </a:p>
-          <a:p>
-            <a:pPr algn="ctr" indent="0" marL="0">
-              <a:buNone/>
-            </a:pPr>
-            <a:r>
-              <a:rPr lang="en-US" sz="1300" dirty="0">
-                <a:solidFill>
-                  <a:srgbClr val="9A8C68"/>
-                </a:solidFill>
-              </a:rPr>
-              <a:t>(주소창이 보이도록 창째로)</a:t>
-            </a:r>
-            <a:endParaRPr lang="en-US" sz="1300" dirty="0"/>
+            <a:endParaRPr lang="en-US" sz="1200">
+              <a:latin typeface="바탕"/>
+              <a:ea typeface="바탕"/>
+            </a:endParaRPr>
           </a:p>
         </p:txBody>
       </p:sp>
@@ -4125,21 +5586,27 @@
           <a:ln/>
         </p:spPr>
         <p:txBody>
-          <a:bodyPr wrap="square" rtlCol="0" anchor="ctr"/>
-          <a:lstStyle/>
-          <a:p>
-            <a:pPr indent="0" marL="0">
+          <a:bodyPr wrap="square" anchor="ctr"/>
+          <a:lstStyle/>
+          <a:p>
+            <a:pPr marL="0" lvl="0" indent="0">
               <a:buNone/>
-            </a:pPr>
-            <a:r>
-              <a:rPr lang="en-US" sz="1200" b="1" dirty="0">
-                <a:solidFill>
-                  <a:srgbClr val="2A2320"/>
-                </a:solidFill>
+              <a:defRPr/>
+            </a:pPr>
+            <a:r>
+              <a:rPr lang="en-US" sz="1200" b="1">
+                <a:solidFill>
+                  <a:srgbClr val="2a2320"/>
+                </a:solidFill>
+                <a:latin typeface="바탕"/>
+                <a:ea typeface="바탕"/>
               </a:rPr>
               <a:t>이 화면에 반드시 보여야 하는 것</a:t>
             </a:r>
-            <a:endParaRPr lang="en-US" sz="1200" dirty="0"/>
+            <a:endParaRPr lang="en-US" sz="1200">
+              <a:latin typeface="바탕"/>
+              <a:ea typeface="바탕"/>
+            </a:endParaRPr>
           </a:p>
         </p:txBody>
       </p:sp>
@@ -4152,7 +5619,7 @@
         <p:spPr>
           <a:xfrm>
             <a:off x="6126480" y="1463040"/>
-            <a:ext cx="2560320" cy="3200400"/>
+            <a:ext cx="2560320" cy="1438275"/>
           </a:xfrm>
           <a:prstGeom prst="rect">
             <a:avLst/>
@@ -4161,64 +5628,112 @@
           <a:ln/>
         </p:spPr>
         <p:txBody>
-          <a:bodyPr wrap="square" rtlCol="0" anchor="ctr"/>
-          <a:lstStyle/>
-          <a:p>
-            <a:pPr marL="342900" indent="-342900">
+          <a:bodyPr wrap="square" anchor="ctr"/>
+          <a:lstStyle/>
+          <a:p>
+            <a:pPr marL="342900" lvl="0" indent="-342900">
               <a:lnSpc>
                 <a:spcPct val="125000"/>
               </a:lnSpc>
               <a:buSzPct val="100000"/>
               <a:buChar char="•"/>
-            </a:pPr>
-            <a:r>
-              <a:rPr lang="en-US" sz="1000" dirty="0">
-                <a:solidFill>
-                  <a:srgbClr val="4E4A3B"/>
-                </a:solidFill>
+              <a:defRPr/>
+            </a:pPr>
+            <a:r>
+              <a:rPr lang="en-US" sz="1000">
+                <a:solidFill>
+                  <a:srgbClr val="4e4a3b"/>
+                </a:solidFill>
+                <a:latin typeface="바탕"/>
+                <a:ea typeface="바탕"/>
               </a:rPr>
               <a:t>로그인 화면과, 로그인을 누르는 경로(헤더 버튼)까지</a:t>
             </a:r>
-            <a:endParaRPr lang="en-US" sz="1000" dirty="0"/>
-          </a:p>
-          <a:p>
-            <a:pPr marL="342900" indent="-342900">
+            <a:endParaRPr lang="en-US" sz="1000">
+              <a:solidFill>
+                <a:srgbClr val="4e4a3b"/>
+              </a:solidFill>
+              <a:latin typeface="바탕"/>
+              <a:ea typeface="바탕"/>
+            </a:endParaRPr>
+          </a:p>
+          <a:p>
+            <a:pPr marL="342900" lvl="0" indent="-342900">
               <a:lnSpc>
                 <a:spcPct val="125000"/>
               </a:lnSpc>
               <a:buSzPct val="100000"/>
               <a:buChar char="•"/>
-            </a:pPr>
-            <a:r>
-              <a:rPr lang="en-US" sz="1000" dirty="0">
-                <a:solidFill>
-                  <a:srgbClr val="4E4A3B"/>
-                </a:solidFill>
+              <a:defRPr/>
+            </a:pPr>
+            <a:r>
+              <a:rPr lang="en-US" sz="1000">
+                <a:solidFill>
+                  <a:srgbClr val="4e4a3b"/>
+                </a:solidFill>
+                <a:latin typeface="바탕"/>
+                <a:ea typeface="바탕"/>
               </a:rPr>
               <a:t>심사관에게 전달할 테스트 계정으로 실제 로그인하는 흐름</a:t>
             </a:r>
-            <a:endParaRPr lang="en-US" sz="1000" dirty="0"/>
-          </a:p>
-          <a:p>
-            <a:pPr marL="342900" indent="-342900">
+            <a:endParaRPr lang="en-US" sz="1000">
+              <a:solidFill>
+                <a:srgbClr val="4e4a3b"/>
+              </a:solidFill>
+              <a:latin typeface="바탕"/>
+              <a:ea typeface="바탕"/>
+            </a:endParaRPr>
+          </a:p>
+          <a:p>
+            <a:pPr marL="342900" lvl="0" indent="-342900">
               <a:lnSpc>
                 <a:spcPct val="125000"/>
               </a:lnSpc>
               <a:buSzPct val="100000"/>
               <a:buChar char="•"/>
-            </a:pPr>
-            <a:r>
-              <a:rPr lang="en-US" sz="1000" dirty="0">
-                <a:solidFill>
-                  <a:srgbClr val="4E4A3B"/>
-                </a:solidFill>
+              <a:defRPr/>
+            </a:pPr>
+            <a:r>
+              <a:rPr lang="en-US" sz="1000">
+                <a:solidFill>
+                  <a:srgbClr val="4e4a3b"/>
+                </a:solidFill>
+                <a:latin typeface="바탕"/>
+                <a:ea typeface="바탕"/>
               </a:rPr>
               <a:t>회원가입 경로도 함께 찍어 두면 안전하다</a:t>
             </a:r>
-            <a:endParaRPr lang="en-US" sz="1000" dirty="0"/>
-          </a:p>
-        </p:txBody>
-      </p:sp>
+            <a:endParaRPr lang="en-US" sz="1000">
+              <a:latin typeface="바탕"/>
+              <a:ea typeface="바탕"/>
+            </a:endParaRPr>
+          </a:p>
+        </p:txBody>
+      </p:sp>
+      <p:pic>
+        <p:nvPicPr>
+          <p:cNvPr id="9" name="그림 8"/>
+          <p:cNvPicPr>
+            <a:picLocks noChangeAspect="1"/>
+          </p:cNvPicPr>
+          <p:nvPr/>
+        </p:nvPicPr>
+        <p:blipFill rotWithShape="1">
+          <a:blip r:embed="rId3"/>
+          <a:stretch>
+            <a:fillRect/>
+          </a:stretch>
+        </p:blipFill>
+        <p:spPr>
+          <a:xfrm>
+            <a:off x="457200" y="1143000"/>
+            <a:ext cx="4638534" cy="3904395"/>
+          </a:xfrm>
+          <a:prstGeom prst="rect">
+            <a:avLst/>
+          </a:prstGeom>
+        </p:spPr>
+      </p:pic>
     </p:spTree>
   </p:cSld>
   <p:clrMapOvr>
@@ -4228,7 +5743,7 @@
 </file>
 
 <file path=ppt/slides/slide5.xml><?xml version="1.0" encoding="utf-8"?>
-<p:sld xmlns:a="http://schemas.openxmlformats.org/drawingml/2006/main" xmlns:r="http://schemas.openxmlformats.org/officeDocument/2006/relationships" xmlns:p="http://schemas.openxmlformats.org/presentationml/2006/main">
+<p:sld xmlns:r="http://schemas.openxmlformats.org/officeDocument/2006/relationships" xmlns:c="http://schemas.openxmlformats.org/drawingml/2006/chart" xmlns:a="http://schemas.openxmlformats.org/drawingml/2006/main" xmlns:dgm="http://schemas.openxmlformats.org/drawingml/2006/diagram" xmlns:dsp="http://schemas.microsoft.com/office/drawing/2008/diagram" xmlns:p="http://schemas.openxmlformats.org/presentationml/2006/main">
   <p:cSld name="Slide 5">
     <p:spTree>
       <p:nvGrpSpPr>
@@ -4262,21 +5777,27 @@
           <a:ln/>
         </p:spPr>
         <p:txBody>
-          <a:bodyPr wrap="square" rtlCol="0" anchor="ctr"/>
-          <a:lstStyle/>
-          <a:p>
-            <a:pPr indent="0" marL="0">
+          <a:bodyPr wrap="square" anchor="ctr"/>
+          <a:lstStyle/>
+          <a:p>
+            <a:pPr marL="0" lvl="0" indent="0">
               <a:buNone/>
-            </a:pPr>
-            <a:r>
-              <a:rPr lang="en-US" sz="2200" b="1" dirty="0">
-                <a:solidFill>
-                  <a:srgbClr val="20261C"/>
-                </a:solidFill>
+              <a:defRPr/>
+            </a:pPr>
+            <a:r>
+              <a:rPr lang="en-US" sz="2200" b="1">
+                <a:solidFill>
+                  <a:srgbClr val="20261c"/>
+                </a:solidFill>
+                <a:latin typeface="바탕"/>
+                <a:ea typeface="바탕"/>
               </a:rPr>
               <a:t>⑥-1  상품 선택 — 목록</a:t>
             </a:r>
-            <a:endParaRPr lang="en-US" sz="2200" dirty="0"/>
+            <a:endParaRPr lang="en-US" sz="2200">
+              <a:latin typeface="바탕"/>
+              <a:ea typeface="바탕"/>
+            </a:endParaRPr>
           </a:p>
         </p:txBody>
       </p:sp>
@@ -4298,96 +5819,27 @@
           <a:ln/>
         </p:spPr>
         <p:txBody>
-          <a:bodyPr wrap="square" rtlCol="0" anchor="ctr"/>
-          <a:lstStyle/>
-          <a:p>
-            <a:pPr indent="0" marL="0">
+          <a:bodyPr wrap="square" anchor="ctr"/>
+          <a:lstStyle/>
+          <a:p>
+            <a:pPr marL="0" lvl="0" indent="0">
               <a:buNone/>
-            </a:pPr>
-            <a:r>
-              <a:rPr lang="en-US" sz="1200" dirty="0">
-                <a:solidFill>
-                  <a:srgbClr val="0E6F60"/>
-                </a:solidFill>
+              <a:defRPr/>
+            </a:pPr>
+            <a:r>
+              <a:rPr lang="en-US" sz="1200">
+                <a:solidFill>
+                  <a:srgbClr val="0e6f60"/>
+                </a:solidFill>
+                <a:latin typeface="바탕"/>
+                <a:ea typeface="바탕"/>
               </a:rPr>
               <a:t>https://caffeinecolor.com/packages</a:t>
             </a:r>
-            <a:endParaRPr lang="en-US" sz="1200" dirty="0"/>
-          </a:p>
-        </p:txBody>
-      </p:sp>
-      <p:sp>
-        <p:nvSpPr>
-          <p:cNvPr id="4" name="Shape 2"/>
-          <p:cNvSpPr/>
-          <p:nvPr/>
-        </p:nvSpPr>
-        <p:spPr>
-          <a:xfrm>
-            <a:off x="457200" y="1143000"/>
-            <a:ext cx="5394960" cy="3566160"/>
-          </a:xfrm>
-          <a:prstGeom prst="rect">
-            <a:avLst/>
-          </a:prstGeom>
-          <a:solidFill>
-            <a:srgbClr val="FBF9F4"/>
-          </a:solidFill>
-          <a:ln w="12700">
-            <a:solidFill>
-              <a:srgbClr val="D8D4C6"/>
-            </a:solidFill>
-            <a:prstDash val="dash"/>
-          </a:ln>
-        </p:spPr>
-      </p:sp>
-      <p:sp>
-        <p:nvSpPr>
-          <p:cNvPr id="5" name="Text 3"/>
-          <p:cNvSpPr/>
-          <p:nvPr/>
-        </p:nvSpPr>
-        <p:spPr>
-          <a:xfrm>
-            <a:off x="457200" y="2560320"/>
-            <a:ext cx="5394960" cy="731520"/>
-          </a:xfrm>
-          <a:prstGeom prst="rect">
-            <a:avLst/>
-          </a:prstGeom>
-          <a:noFill/>
-          <a:ln/>
-        </p:spPr>
-        <p:txBody>
-          <a:bodyPr wrap="square" rtlCol="0" anchor="ctr"/>
-          <a:lstStyle/>
-          <a:p>
-            <a:pPr algn="ctr" indent="0" marL="0">
-              <a:buNone/>
-            </a:pPr>
-            <a:r>
-              <a:rPr lang="en-US" sz="1300" dirty="0">
-                <a:solidFill>
-                  <a:srgbClr val="9A8C68"/>
-                </a:solidFill>
-              </a:rPr>
-              <a:t>여기에 캡처를 끼웁니다</a:t>
-            </a:r>
-            <a:endParaRPr lang="en-US" sz="1300" dirty="0"/>
-          </a:p>
-          <a:p>
-            <a:pPr algn="ctr" indent="0" marL="0">
-              <a:buNone/>
-            </a:pPr>
-            <a:r>
-              <a:rPr lang="en-US" sz="1300" dirty="0">
-                <a:solidFill>
-                  <a:srgbClr val="9A8C68"/>
-                </a:solidFill>
-              </a:rPr>
-              <a:t>(주소창이 보이도록 창째로)</a:t>
-            </a:r>
-            <a:endParaRPr lang="en-US" sz="1300" dirty="0"/>
+            <a:endParaRPr lang="en-US" sz="1200">
+              <a:latin typeface="바탕"/>
+              <a:ea typeface="바탕"/>
+            </a:endParaRPr>
           </a:p>
         </p:txBody>
       </p:sp>
@@ -4409,21 +5861,27 @@
           <a:ln/>
         </p:spPr>
         <p:txBody>
-          <a:bodyPr wrap="square" rtlCol="0" anchor="ctr"/>
-          <a:lstStyle/>
-          <a:p>
-            <a:pPr indent="0" marL="0">
+          <a:bodyPr wrap="square" anchor="ctr"/>
+          <a:lstStyle/>
+          <a:p>
+            <a:pPr marL="0" lvl="0" indent="0">
               <a:buNone/>
-            </a:pPr>
-            <a:r>
-              <a:rPr lang="en-US" sz="1200" b="1" dirty="0">
-                <a:solidFill>
-                  <a:srgbClr val="2A2320"/>
-                </a:solidFill>
+              <a:defRPr/>
+            </a:pPr>
+            <a:r>
+              <a:rPr lang="en-US" sz="1200" b="1">
+                <a:solidFill>
+                  <a:srgbClr val="2a2320"/>
+                </a:solidFill>
+                <a:latin typeface="바탕"/>
+                <a:ea typeface="바탕"/>
               </a:rPr>
               <a:t>이 화면에 반드시 보여야 하는 것</a:t>
             </a:r>
-            <a:endParaRPr lang="en-US" sz="1200" dirty="0"/>
+            <a:endParaRPr lang="en-US" sz="1200">
+              <a:latin typeface="바탕"/>
+              <a:ea typeface="바탕"/>
+            </a:endParaRPr>
           </a:p>
         </p:txBody>
       </p:sp>
@@ -4436,7 +5894,7 @@
         <p:spPr>
           <a:xfrm>
             <a:off x="6126480" y="1463040"/>
-            <a:ext cx="2560320" cy="3200400"/>
+            <a:ext cx="2560320" cy="1349003"/>
           </a:xfrm>
           <a:prstGeom prst="rect">
             <a:avLst/>
@@ -4445,46 +5903,85 @@
           <a:ln/>
         </p:spPr>
         <p:txBody>
-          <a:bodyPr wrap="square" rtlCol="0" anchor="ctr"/>
-          <a:lstStyle/>
-          <a:p>
-            <a:pPr marL="342900" indent="-342900">
+          <a:bodyPr wrap="square" anchor="ctr"/>
+          <a:lstStyle/>
+          <a:p>
+            <a:pPr marL="342900" lvl="0" indent="-342900">
               <a:lnSpc>
                 <a:spcPct val="125000"/>
               </a:lnSpc>
               <a:buSzPct val="100000"/>
               <a:buChar char="•"/>
-            </a:pPr>
-            <a:r>
-              <a:rPr lang="en-US" sz="1000" dirty="0">
-                <a:solidFill>
-                  <a:srgbClr val="4E4A3B"/>
-                </a:solidFill>
+              <a:defRPr/>
+            </a:pPr>
+            <a:r>
+              <a:rPr lang="en-US" sz="1000">
+                <a:solidFill>
+                  <a:srgbClr val="4e4a3b"/>
+                </a:solidFill>
+                <a:latin typeface="바탕"/>
+                <a:ea typeface="바탕"/>
               </a:rPr>
               <a:t>AI팩 목록. 등급마다 «값이 보여야» 한다 — 값 없이 문의만 있으면 입점 불가</a:t>
             </a:r>
-            <a:endParaRPr lang="en-US" sz="1000" dirty="0"/>
-          </a:p>
-          <a:p>
-            <a:pPr marL="342900" indent="-342900">
+            <a:endParaRPr lang="en-US" sz="1000">
+              <a:solidFill>
+                <a:srgbClr val="4e4a3b"/>
+              </a:solidFill>
+              <a:latin typeface="바탕"/>
+              <a:ea typeface="바탕"/>
+            </a:endParaRPr>
+          </a:p>
+          <a:p>
+            <a:pPr marL="342900" lvl="0" indent="-342900">
               <a:lnSpc>
                 <a:spcPct val="125000"/>
               </a:lnSpc>
               <a:buSzPct val="100000"/>
               <a:buChar char="•"/>
-            </a:pPr>
-            <a:r>
-              <a:rPr lang="en-US" sz="1000" dirty="0">
-                <a:solidFill>
-                  <a:srgbClr val="4E4A3B"/>
-                </a:solidFill>
+              <a:defRPr/>
+            </a:pPr>
+            <a:r>
+              <a:rPr lang="en-US" sz="1000">
+                <a:solidFill>
+                  <a:srgbClr val="4e4a3b"/>
+                </a:solidFill>
+                <a:latin typeface="바탕"/>
+                <a:ea typeface="바탕"/>
               </a:rPr>
               <a:t>값은 크레딧으로 표기된다 (예: 503크레딧)</a:t>
             </a:r>
-            <a:endParaRPr lang="en-US" sz="1000" dirty="0"/>
-          </a:p>
-        </p:txBody>
-      </p:sp>
+            <a:endParaRPr lang="en-US" sz="1000">
+              <a:latin typeface="바탕"/>
+              <a:ea typeface="바탕"/>
+            </a:endParaRPr>
+          </a:p>
+        </p:txBody>
+      </p:sp>
+      <p:pic>
+        <p:nvPicPr>
+          <p:cNvPr id="9" name="그림 8"/>
+          <p:cNvPicPr>
+            <a:picLocks noChangeAspect="1"/>
+          </p:cNvPicPr>
+          <p:nvPr/>
+        </p:nvPicPr>
+        <p:blipFill rotWithShape="1">
+          <a:blip r:embed="rId3"/>
+          <a:stretch>
+            <a:fillRect/>
+          </a:stretch>
+        </p:blipFill>
+        <p:spPr>
+          <a:xfrm>
+            <a:off x="457199" y="1143000"/>
+            <a:ext cx="3474014" cy="4000500"/>
+          </a:xfrm>
+          <a:prstGeom prst="rect">
+            <a:avLst/>
+          </a:prstGeom>
+        </p:spPr>
+      </p:pic>
     </p:spTree>
   </p:cSld>
   <p:clrMapOvr>
@@ -4494,7 +5991,7 @@
 </file>
 
 <file path=ppt/slides/slide6.xml><?xml version="1.0" encoding="utf-8"?>
-<p:sld xmlns:a="http://schemas.openxmlformats.org/drawingml/2006/main" xmlns:r="http://schemas.openxmlformats.org/officeDocument/2006/relationships" xmlns:p="http://schemas.openxmlformats.org/presentationml/2006/main">
+<p:sld xmlns:r="http://schemas.openxmlformats.org/officeDocument/2006/relationships" xmlns:c="http://schemas.openxmlformats.org/drawingml/2006/chart" xmlns:a="http://schemas.openxmlformats.org/drawingml/2006/main" xmlns:dgm="http://schemas.openxmlformats.org/drawingml/2006/diagram" xmlns:dsp="http://schemas.microsoft.com/office/drawing/2008/diagram" xmlns:p="http://schemas.openxmlformats.org/presentationml/2006/main">
   <p:cSld name="Slide 6">
     <p:spTree>
       <p:nvGrpSpPr>
@@ -4528,21 +6025,27 @@
           <a:ln/>
         </p:spPr>
         <p:txBody>
-          <a:bodyPr wrap="square" rtlCol="0" anchor="ctr"/>
-          <a:lstStyle/>
-          <a:p>
-            <a:pPr indent="0" marL="0">
+          <a:bodyPr wrap="square" anchor="ctr"/>
+          <a:lstStyle/>
+          <a:p>
+            <a:pPr marL="0" lvl="0" indent="0">
               <a:buNone/>
-            </a:pPr>
-            <a:r>
-              <a:rPr lang="en-US" sz="2200" b="1" dirty="0">
-                <a:solidFill>
-                  <a:srgbClr val="20261C"/>
-                </a:solidFill>
+              <a:defRPr/>
+            </a:pPr>
+            <a:r>
+              <a:rPr lang="en-US" sz="2200" b="1">
+                <a:solidFill>
+                  <a:srgbClr val="20261c"/>
+                </a:solidFill>
+                <a:latin typeface="바탕"/>
+                <a:ea typeface="바탕"/>
               </a:rPr>
               <a:t>⑥-2  상품 선택 — 상세와 구매 버튼</a:t>
             </a:r>
-            <a:endParaRPr lang="en-US" sz="2200" dirty="0"/>
+            <a:endParaRPr lang="en-US" sz="2200">
+              <a:latin typeface="바탕"/>
+              <a:ea typeface="바탕"/>
+            </a:endParaRPr>
           </a:p>
         </p:txBody>
       </p:sp>
@@ -4564,96 +6067,27 @@
           <a:ln/>
         </p:spPr>
         <p:txBody>
-          <a:bodyPr wrap="square" rtlCol="0" anchor="ctr"/>
-          <a:lstStyle/>
-          <a:p>
-            <a:pPr indent="0" marL="0">
+          <a:bodyPr wrap="square" anchor="ctr"/>
+          <a:lstStyle/>
+          <a:p>
+            <a:pPr marL="0" lvl="0" indent="0">
               <a:buNone/>
-            </a:pPr>
-            <a:r>
-              <a:rPr lang="en-US" sz="1200" dirty="0">
-                <a:solidFill>
-                  <a:srgbClr val="0E6F60"/>
-                </a:solidFill>
+              <a:defRPr/>
+            </a:pPr>
+            <a:r>
+              <a:rPr lang="en-US" sz="1200">
+                <a:solidFill>
+                  <a:srgbClr val="0e6f60"/>
+                </a:solidFill>
+                <a:latin typeface="바탕"/>
+                <a:ea typeface="바탕"/>
               </a:rPr>
               <a:t>https://caffeinecolor.com/packages/lms</a:t>
             </a:r>
-            <a:endParaRPr lang="en-US" sz="1200" dirty="0"/>
-          </a:p>
-        </p:txBody>
-      </p:sp>
-      <p:sp>
-        <p:nvSpPr>
-          <p:cNvPr id="4" name="Shape 2"/>
-          <p:cNvSpPr/>
-          <p:nvPr/>
-        </p:nvSpPr>
-        <p:spPr>
-          <a:xfrm>
-            <a:off x="457200" y="1143000"/>
-            <a:ext cx="5394960" cy="3566160"/>
-          </a:xfrm>
-          <a:prstGeom prst="rect">
-            <a:avLst/>
-          </a:prstGeom>
-          <a:solidFill>
-            <a:srgbClr val="FBF9F4"/>
-          </a:solidFill>
-          <a:ln w="12700">
-            <a:solidFill>
-              <a:srgbClr val="D8D4C6"/>
-            </a:solidFill>
-            <a:prstDash val="dash"/>
-          </a:ln>
-        </p:spPr>
-      </p:sp>
-      <p:sp>
-        <p:nvSpPr>
-          <p:cNvPr id="5" name="Text 3"/>
-          <p:cNvSpPr/>
-          <p:nvPr/>
-        </p:nvSpPr>
-        <p:spPr>
-          <a:xfrm>
-            <a:off x="457200" y="2560320"/>
-            <a:ext cx="5394960" cy="731520"/>
-          </a:xfrm>
-          <a:prstGeom prst="rect">
-            <a:avLst/>
-          </a:prstGeom>
-          <a:noFill/>
-          <a:ln/>
-        </p:spPr>
-        <p:txBody>
-          <a:bodyPr wrap="square" rtlCol="0" anchor="ctr"/>
-          <a:lstStyle/>
-          <a:p>
-            <a:pPr algn="ctr" indent="0" marL="0">
-              <a:buNone/>
-            </a:pPr>
-            <a:r>
-              <a:rPr lang="en-US" sz="1300" dirty="0">
-                <a:solidFill>
-                  <a:srgbClr val="9A8C68"/>
-                </a:solidFill>
-              </a:rPr>
-              <a:t>여기에 캡처를 끼웁니다</a:t>
-            </a:r>
-            <a:endParaRPr lang="en-US" sz="1300" dirty="0"/>
-          </a:p>
-          <a:p>
-            <a:pPr algn="ctr" indent="0" marL="0">
-              <a:buNone/>
-            </a:pPr>
-            <a:r>
-              <a:rPr lang="en-US" sz="1300" dirty="0">
-                <a:solidFill>
-                  <a:srgbClr val="9A8C68"/>
-                </a:solidFill>
-              </a:rPr>
-              <a:t>(주소창이 보이도록 창째로)</a:t>
-            </a:r>
-            <a:endParaRPr lang="en-US" sz="1300" dirty="0"/>
+            <a:endParaRPr lang="en-US" sz="1200">
+              <a:latin typeface="바탕"/>
+              <a:ea typeface="바탕"/>
+            </a:endParaRPr>
           </a:p>
         </p:txBody>
       </p:sp>
@@ -4675,21 +6109,27 @@
           <a:ln/>
         </p:spPr>
         <p:txBody>
-          <a:bodyPr wrap="square" rtlCol="0" anchor="ctr"/>
-          <a:lstStyle/>
-          <a:p>
-            <a:pPr indent="0" marL="0">
+          <a:bodyPr wrap="square" anchor="ctr"/>
+          <a:lstStyle/>
+          <a:p>
+            <a:pPr marL="0" lvl="0" indent="0">
               <a:buNone/>
-            </a:pPr>
-            <a:r>
-              <a:rPr lang="en-US" sz="1200" b="1" dirty="0">
-                <a:solidFill>
-                  <a:srgbClr val="2A2320"/>
-                </a:solidFill>
+              <a:defRPr/>
+            </a:pPr>
+            <a:r>
+              <a:rPr lang="en-US" sz="1200" b="1">
+                <a:solidFill>
+                  <a:srgbClr val="2a2320"/>
+                </a:solidFill>
+                <a:latin typeface="바탕"/>
+                <a:ea typeface="바탕"/>
               </a:rPr>
               <a:t>이 화면에 반드시 보여야 하는 것</a:t>
             </a:r>
-            <a:endParaRPr lang="en-US" sz="1200" dirty="0"/>
+            <a:endParaRPr lang="en-US" sz="1200">
+              <a:latin typeface="바탕"/>
+              <a:ea typeface="바탕"/>
+            </a:endParaRPr>
           </a:p>
         </p:txBody>
       </p:sp>
@@ -4702,7 +6142,7 @@
         <p:spPr>
           <a:xfrm>
             <a:off x="6126480" y="1463040"/>
-            <a:ext cx="2560320" cy="3200400"/>
+            <a:ext cx="2560320" cy="1680209"/>
           </a:xfrm>
           <a:prstGeom prst="rect">
             <a:avLst/>
@@ -4711,64 +6151,112 @@
           <a:ln/>
         </p:spPr>
         <p:txBody>
-          <a:bodyPr wrap="square" rtlCol="0" anchor="ctr"/>
-          <a:lstStyle/>
-          <a:p>
-            <a:pPr marL="342900" indent="-342900">
+          <a:bodyPr wrap="square" anchor="ctr"/>
+          <a:lstStyle/>
+          <a:p>
+            <a:pPr marL="342900" lvl="0" indent="-342900">
               <a:lnSpc>
                 <a:spcPct val="125000"/>
               </a:lnSpc>
               <a:buSzPct val="100000"/>
               <a:buChar char="•"/>
-            </a:pPr>
-            <a:r>
-              <a:rPr lang="en-US" sz="1000" dirty="0">
-                <a:solidFill>
-                  <a:srgbClr val="4E4A3B"/>
-                </a:solidFill>
+              <a:defRPr/>
+            </a:pPr>
+            <a:r>
+              <a:rPr lang="en-US" sz="1000">
+                <a:solidFill>
+                  <a:srgbClr val="4e4a3b"/>
+                </a:solidFill>
+                <a:latin typeface="바탕"/>
+                <a:ea typeface="바탕"/>
               </a:rPr>
               <a:t>심사 기간에는 «플러스» 등급만 구매 버튼이 열린다(나머지는 「판매 준비 중」)</a:t>
             </a:r>
-            <a:endParaRPr lang="en-US" sz="1000" dirty="0"/>
-          </a:p>
-          <a:p>
-            <a:pPr marL="342900" indent="-342900">
+            <a:endParaRPr lang="en-US" sz="1000">
+              <a:solidFill>
+                <a:srgbClr val="4e4a3b"/>
+              </a:solidFill>
+              <a:latin typeface="바탕"/>
+              <a:ea typeface="바탕"/>
+            </a:endParaRPr>
+          </a:p>
+          <a:p>
+            <a:pPr marL="342900" lvl="0" indent="-342900">
               <a:lnSpc>
                 <a:spcPct val="125000"/>
               </a:lnSpc>
               <a:buSzPct val="100000"/>
               <a:buChar char="•"/>
-            </a:pPr>
-            <a:r>
-              <a:rPr lang="en-US" sz="1000" dirty="0">
-                <a:solidFill>
-                  <a:srgbClr val="4E4A3B"/>
-                </a:solidFill>
+              <a:defRPr/>
+            </a:pPr>
+            <a:r>
+              <a:rPr lang="en-US" sz="1000">
+                <a:solidFill>
+                  <a:srgbClr val="4e4a3b"/>
+                </a:solidFill>
+                <a:latin typeface="바탕"/>
+                <a:ea typeface="바탕"/>
               </a:rPr>
               <a:t>구매 버튼에 필요한 크레딧이 적혀 있는 화면</a:t>
             </a:r>
-            <a:endParaRPr lang="en-US" sz="1000" dirty="0"/>
-          </a:p>
-          <a:p>
-            <a:pPr marL="342900" indent="-342900">
+            <a:endParaRPr lang="en-US" sz="1000">
+              <a:solidFill>
+                <a:srgbClr val="4e4a3b"/>
+              </a:solidFill>
+              <a:latin typeface="바탕"/>
+              <a:ea typeface="바탕"/>
+            </a:endParaRPr>
+          </a:p>
+          <a:p>
+            <a:pPr marL="342900" lvl="0" indent="-342900">
               <a:lnSpc>
                 <a:spcPct val="125000"/>
               </a:lnSpc>
               <a:buSzPct val="100000"/>
               <a:buChar char="•"/>
-            </a:pPr>
-            <a:r>
-              <a:rPr lang="en-US" sz="1000" dirty="0">
-                <a:solidFill>
-                  <a:srgbClr val="4E4A3B"/>
-                </a:solidFill>
+              <a:defRPr/>
+            </a:pPr>
+            <a:r>
+              <a:rPr lang="en-US" sz="1000">
+                <a:solidFill>
+                  <a:srgbClr val="4e4a3b"/>
+                </a:solidFill>
+                <a:latin typeface="바탕"/>
+                <a:ea typeface="바탕"/>
               </a:rPr>
               <a:t>여기서 크레딧이 모자라면 충전으로 가는 흐름이 이어진다</a:t>
             </a:r>
-            <a:endParaRPr lang="en-US" sz="1000" dirty="0"/>
-          </a:p>
-        </p:txBody>
-      </p:sp>
+            <a:endParaRPr lang="en-US" sz="1000">
+              <a:latin typeface="바탕"/>
+              <a:ea typeface="바탕"/>
+            </a:endParaRPr>
+          </a:p>
+        </p:txBody>
+      </p:sp>
+      <p:pic>
+        <p:nvPicPr>
+          <p:cNvPr id="8" name="그림 7"/>
+          <p:cNvPicPr>
+            <a:picLocks noChangeAspect="1"/>
+          </p:cNvPicPr>
+          <p:nvPr/>
+        </p:nvPicPr>
+        <p:blipFill rotWithShape="1">
+          <a:blip r:embed="rId3"/>
+          <a:stretch>
+            <a:fillRect/>
+          </a:stretch>
+        </p:blipFill>
+        <p:spPr>
+          <a:xfrm>
+            <a:off x="457200" y="1143000"/>
+            <a:ext cx="3420899" cy="4000500"/>
+          </a:xfrm>
+          <a:prstGeom prst="rect">
+            <a:avLst/>
+          </a:prstGeom>
+        </p:spPr>
+      </p:pic>
     </p:spTree>
   </p:cSld>
   <p:clrMapOvr>
@@ -4778,7 +6266,7 @@
 </file>
 
 <file path=ppt/slides/slide7.xml><?xml version="1.0" encoding="utf-8"?>
-<p:sld xmlns:a="http://schemas.openxmlformats.org/drawingml/2006/main" xmlns:r="http://schemas.openxmlformats.org/officeDocument/2006/relationships" xmlns:p="http://schemas.openxmlformats.org/presentationml/2006/main">
+<p:sld xmlns:r="http://schemas.openxmlformats.org/officeDocument/2006/relationships" xmlns:c="http://schemas.openxmlformats.org/drawingml/2006/chart" xmlns:a="http://schemas.openxmlformats.org/drawingml/2006/main" xmlns:dgm="http://schemas.openxmlformats.org/drawingml/2006/diagram" xmlns:dsp="http://schemas.microsoft.com/office/drawing/2008/diagram" xmlns:p="http://schemas.openxmlformats.org/presentationml/2006/main">
   <p:cSld name="Slide 7">
     <p:spTree>
       <p:nvGrpSpPr>
@@ -4812,21 +6300,27 @@
           <a:ln/>
         </p:spPr>
         <p:txBody>
-          <a:bodyPr wrap="square" rtlCol="0" anchor="ctr"/>
-          <a:lstStyle/>
-          <a:p>
-            <a:pPr indent="0" marL="0">
+          <a:bodyPr wrap="square" anchor="ctr"/>
+          <a:lstStyle/>
+          <a:p>
+            <a:pPr marL="0" lvl="0" indent="0">
               <a:buNone/>
-            </a:pPr>
-            <a:r>
-              <a:rPr lang="en-US" sz="2200" b="1" dirty="0">
-                <a:solidFill>
-                  <a:srgbClr val="20261C"/>
-                </a:solidFill>
+              <a:defRPr/>
+            </a:pPr>
+            <a:r>
+              <a:rPr lang="en-US" sz="2200" b="1">
+                <a:solidFill>
+                  <a:srgbClr val="20261c"/>
+                </a:solidFill>
+                <a:latin typeface="바탕"/>
+                <a:ea typeface="바탕"/>
               </a:rPr>
               <a:t>⑦-1  포인트 충전 — 금액 선택</a:t>
             </a:r>
-            <a:endParaRPr lang="en-US" sz="2200" dirty="0"/>
+            <a:endParaRPr lang="en-US" sz="2200">
+              <a:latin typeface="바탕"/>
+              <a:ea typeface="바탕"/>
+            </a:endParaRPr>
           </a:p>
         </p:txBody>
       </p:sp>
@@ -4848,96 +6342,27 @@
           <a:ln/>
         </p:spPr>
         <p:txBody>
-          <a:bodyPr wrap="square" rtlCol="0" anchor="ctr"/>
-          <a:lstStyle/>
-          <a:p>
-            <a:pPr indent="0" marL="0">
+          <a:bodyPr wrap="square" anchor="ctr"/>
+          <a:lstStyle/>
+          <a:p>
+            <a:pPr marL="0" lvl="0" indent="0">
               <a:buNone/>
-            </a:pPr>
-            <a:r>
-              <a:rPr lang="en-US" sz="1200" dirty="0">
-                <a:solidFill>
-                  <a:srgbClr val="0E6F60"/>
-                </a:solidFill>
+              <a:defRPr/>
+            </a:pPr>
+            <a:r>
+              <a:rPr lang="en-US" sz="1200">
+                <a:solidFill>
+                  <a:srgbClr val="0e6f60"/>
+                </a:solidFill>
+                <a:latin typeface="바탕"/>
+                <a:ea typeface="바탕"/>
               </a:rPr>
               <a:t>https://caffeinecolor.com/dashboard/billing</a:t>
             </a:r>
-            <a:endParaRPr lang="en-US" sz="1200" dirty="0"/>
-          </a:p>
-        </p:txBody>
-      </p:sp>
-      <p:sp>
-        <p:nvSpPr>
-          <p:cNvPr id="4" name="Shape 2"/>
-          <p:cNvSpPr/>
-          <p:nvPr/>
-        </p:nvSpPr>
-        <p:spPr>
-          <a:xfrm>
-            <a:off x="457200" y="1143000"/>
-            <a:ext cx="5394960" cy="3566160"/>
-          </a:xfrm>
-          <a:prstGeom prst="rect">
-            <a:avLst/>
-          </a:prstGeom>
-          <a:solidFill>
-            <a:srgbClr val="FBF9F4"/>
-          </a:solidFill>
-          <a:ln w="12700">
-            <a:solidFill>
-              <a:srgbClr val="D8D4C6"/>
-            </a:solidFill>
-            <a:prstDash val="dash"/>
-          </a:ln>
-        </p:spPr>
-      </p:sp>
-      <p:sp>
-        <p:nvSpPr>
-          <p:cNvPr id="5" name="Text 3"/>
-          <p:cNvSpPr/>
-          <p:nvPr/>
-        </p:nvSpPr>
-        <p:spPr>
-          <a:xfrm>
-            <a:off x="457200" y="2560320"/>
-            <a:ext cx="5394960" cy="731520"/>
-          </a:xfrm>
-          <a:prstGeom prst="rect">
-            <a:avLst/>
-          </a:prstGeom>
-          <a:noFill/>
-          <a:ln/>
-        </p:spPr>
-        <p:txBody>
-          <a:bodyPr wrap="square" rtlCol="0" anchor="ctr"/>
-          <a:lstStyle/>
-          <a:p>
-            <a:pPr algn="ctr" indent="0" marL="0">
-              <a:buNone/>
-            </a:pPr>
-            <a:r>
-              <a:rPr lang="en-US" sz="1300" dirty="0">
-                <a:solidFill>
-                  <a:srgbClr val="9A8C68"/>
-                </a:solidFill>
-              </a:rPr>
-              <a:t>여기에 캡처를 끼웁니다</a:t>
-            </a:r>
-            <a:endParaRPr lang="en-US" sz="1300" dirty="0"/>
-          </a:p>
-          <a:p>
-            <a:pPr algn="ctr" indent="0" marL="0">
-              <a:buNone/>
-            </a:pPr>
-            <a:r>
-              <a:rPr lang="en-US" sz="1300" dirty="0">
-                <a:solidFill>
-                  <a:srgbClr val="9A8C68"/>
-                </a:solidFill>
-              </a:rPr>
-              <a:t>(주소창이 보이도록 창째로)</a:t>
-            </a:r>
-            <a:endParaRPr lang="en-US" sz="1300" dirty="0"/>
+            <a:endParaRPr lang="en-US" sz="1200">
+              <a:latin typeface="바탕"/>
+              <a:ea typeface="바탕"/>
+            </a:endParaRPr>
           </a:p>
         </p:txBody>
       </p:sp>
@@ -4959,21 +6384,27 @@
           <a:ln/>
         </p:spPr>
         <p:txBody>
-          <a:bodyPr wrap="square" rtlCol="0" anchor="ctr"/>
-          <a:lstStyle/>
-          <a:p>
-            <a:pPr indent="0" marL="0">
+          <a:bodyPr wrap="square" anchor="ctr"/>
+          <a:lstStyle/>
+          <a:p>
+            <a:pPr marL="0" lvl="0" indent="0">
               <a:buNone/>
-            </a:pPr>
-            <a:r>
-              <a:rPr lang="en-US" sz="1200" b="1" dirty="0">
-                <a:solidFill>
-                  <a:srgbClr val="2A2320"/>
-                </a:solidFill>
+              <a:defRPr/>
+            </a:pPr>
+            <a:r>
+              <a:rPr lang="en-US" sz="1200" b="1">
+                <a:solidFill>
+                  <a:srgbClr val="2a2320"/>
+                </a:solidFill>
+                <a:latin typeface="바탕"/>
+                <a:ea typeface="바탕"/>
               </a:rPr>
               <a:t>이 화면에 반드시 보여야 하는 것</a:t>
             </a:r>
-            <a:endParaRPr lang="en-US" sz="1200" dirty="0"/>
+            <a:endParaRPr lang="en-US" sz="1200">
+              <a:latin typeface="바탕"/>
+              <a:ea typeface="바탕"/>
+            </a:endParaRPr>
           </a:p>
         </p:txBody>
       </p:sp>
@@ -4986,7 +6417,7 @@
         <p:spPr>
           <a:xfrm>
             <a:off x="6126480" y="1463040"/>
-            <a:ext cx="2560320" cy="3200400"/>
+            <a:ext cx="2560320" cy="3125560"/>
           </a:xfrm>
           <a:prstGeom prst="rect">
             <a:avLst/>
@@ -4995,82 +6426,448 @@
           <a:ln/>
         </p:spPr>
         <p:txBody>
-          <a:bodyPr wrap="square" rtlCol="0" anchor="ctr"/>
-          <a:lstStyle/>
-          <a:p>
-            <a:pPr marL="342900" indent="-342900">
+          <a:bodyPr wrap="square" anchor="ctr"/>
+          <a:lstStyle/>
+          <a:p>
+            <a:pPr marL="342900" lvl="0" indent="-342900">
               <a:lnSpc>
                 <a:spcPct val="125000"/>
               </a:lnSpc>
               <a:buSzPct val="100000"/>
               <a:buChar char="•"/>
-            </a:pPr>
-            <a:r>
-              <a:rPr lang="en-US" sz="1000" dirty="0">
-                <a:solidFill>
-                  <a:srgbClr val="4E4A3B"/>
-                </a:solidFill>
+              <a:defRPr/>
+            </a:pPr>
+            <a:r>
+              <a:rPr lang="en-US" sz="1000">
+                <a:solidFill>
+                  <a:srgbClr val="4e4a3b"/>
+                </a:solidFill>
+                <a:latin typeface="바탕"/>
+                <a:ea typeface="바탕"/>
               </a:rPr>
               <a:t>서비스 명칭(크레딧 충전)과 «선택형» 금액 옵션이 한 화면에</a:t>
             </a:r>
-            <a:endParaRPr lang="en-US" sz="1000" dirty="0"/>
-          </a:p>
-          <a:p>
-            <a:pPr marL="342900" indent="-342900">
+            <a:endParaRPr lang="en-US" sz="1000">
+              <a:solidFill>
+                <a:srgbClr val="4e4a3b"/>
+              </a:solidFill>
+              <a:latin typeface="바탕"/>
+              <a:ea typeface="바탕"/>
+            </a:endParaRPr>
+          </a:p>
+          <a:p>
+            <a:pPr marL="342900" lvl="0" indent="-342900">
               <a:lnSpc>
                 <a:spcPct val="125000"/>
               </a:lnSpc>
               <a:buSzPct val="100000"/>
               <a:buChar char="•"/>
-            </a:pPr>
-            <a:r>
-              <a:rPr lang="en-US" sz="1000" dirty="0">
-                <a:solidFill>
-                  <a:srgbClr val="4E4A3B"/>
-                </a:solidFill>
+              <a:defRPr/>
+            </a:pPr>
+            <a:r>
+              <a:rPr lang="en-US" sz="1000">
+                <a:solidFill>
+                  <a:srgbClr val="4e4a3b"/>
+                </a:solidFill>
+                <a:latin typeface="바탕"/>
+                <a:ea typeface="바탕"/>
               </a:rPr>
               <a:t>옵션: 5,000원(55크레딧) · 10,000원(120크레딧) · 20,000원(260크레딧) · 50,000원(650크레딧) · 99,000원(1287크레딧)</a:t>
             </a:r>
-            <a:endParaRPr lang="en-US" sz="1000" dirty="0"/>
-          </a:p>
-          <a:p>
-            <a:pPr marL="342900" indent="-342900">
+            <a:r>
+              <a:rPr lang="en-US" altLang="ko-KR" sz="1000">
+                <a:solidFill>
+                  <a:srgbClr val="4e4a3b"/>
+                </a:solidFill>
+                <a:latin typeface="바탕"/>
+                <a:ea typeface="바탕"/>
+              </a:rPr>
+              <a:t>,</a:t>
+            </a:r>
+            <a:r>
+              <a:rPr lang="ko-KR" altLang="en-US" sz="1000">
+                <a:solidFill>
+                  <a:srgbClr val="4e4a3b"/>
+                </a:solidFill>
+                <a:latin typeface="바탕"/>
+                <a:ea typeface="바탕"/>
+              </a:rPr>
+              <a:t> 충전횟수 제한없음</a:t>
+            </a:r>
+            <a:r>
+              <a:rPr lang="en-US" altLang="ko-KR" sz="1000">
+                <a:solidFill>
+                  <a:srgbClr val="4e4a3b"/>
+                </a:solidFill>
+                <a:latin typeface="바탕"/>
+                <a:ea typeface="바탕"/>
+              </a:rPr>
+              <a:t>.</a:t>
+            </a:r>
+            <a:r>
+              <a:rPr lang="ko-KR" altLang="en-US" sz="1000">
+                <a:solidFill>
+                  <a:srgbClr val="4e4a3b"/>
+                </a:solidFill>
+                <a:latin typeface="바탕"/>
+                <a:ea typeface="바탕"/>
+              </a:rPr>
+              <a:t> </a:t>
+            </a:r>
+            <a:r>
+              <a:rPr lang="en-US" altLang="ko-KR" sz="1000">
+                <a:solidFill>
+                  <a:srgbClr val="4e4a3b"/>
+                </a:solidFill>
+                <a:latin typeface="바탕"/>
+                <a:ea typeface="바탕"/>
+              </a:rPr>
+              <a:t>(</a:t>
+            </a:r>
+            <a:r>
+              <a:rPr lang="ko-KR" altLang="en-US" sz="1000">
+                <a:solidFill>
+                  <a:srgbClr val="4e4a3b"/>
+                </a:solidFill>
+                <a:latin typeface="바탕"/>
+                <a:ea typeface="바탕"/>
+              </a:rPr>
+              <a:t>보너스 </a:t>
+            </a:r>
+            <a:r>
+              <a:rPr lang="en-US" altLang="ko-KR" sz="1000">
+                <a:solidFill>
+                  <a:srgbClr val="4e4a3b"/>
+                </a:solidFill>
+                <a:latin typeface="바탕"/>
+                <a:ea typeface="바탕"/>
+              </a:rPr>
+              <a:t>10%</a:t>
+            </a:r>
+            <a:r>
+              <a:rPr lang="ko-KR" altLang="en-US" sz="1000">
+                <a:solidFill>
+                  <a:srgbClr val="4e4a3b"/>
+                </a:solidFill>
+                <a:latin typeface="바탕"/>
+                <a:ea typeface="바탕"/>
+              </a:rPr>
+              <a:t> 추가 충전</a:t>
+            </a:r>
+            <a:r>
+              <a:rPr lang="en-US" altLang="ko-KR" sz="1000">
+                <a:solidFill>
+                  <a:srgbClr val="4e4a3b"/>
+                </a:solidFill>
+                <a:latin typeface="바탕"/>
+                <a:ea typeface="바탕"/>
+              </a:rPr>
+              <a:t>)</a:t>
+            </a:r>
+            <a:endParaRPr lang="en-US" altLang="ko-KR" sz="1000">
+              <a:solidFill>
+                <a:srgbClr val="4e4a3b"/>
+              </a:solidFill>
+              <a:latin typeface="바탕"/>
+              <a:ea typeface="바탕"/>
+            </a:endParaRPr>
+          </a:p>
+          <a:p>
+            <a:pPr marL="342900" lvl="0" indent="-342900">
               <a:lnSpc>
                 <a:spcPct val="125000"/>
               </a:lnSpc>
               <a:buSzPct val="100000"/>
               <a:buChar char="•"/>
-            </a:pPr>
-            <a:r>
-              <a:rPr lang="en-US" sz="1000" dirty="0">
-                <a:solidFill>
-                  <a:srgbClr val="4E4A3B"/>
-                </a:solidFill>
+              <a:defRPr/>
+            </a:pPr>
+            <a:r>
+              <a:rPr lang="en-US" sz="1000">
+                <a:solidFill>
+                  <a:srgbClr val="4e4a3b"/>
+                </a:solidFill>
+                <a:latin typeface="바탕"/>
+                <a:ea typeface="바탕"/>
               </a:rPr>
               <a:t>전부 100,000원 이하 — 임의 금액 입력칸이 없다는 것이 보여야 한다</a:t>
             </a:r>
-            <a:endParaRPr lang="en-US" sz="1000" dirty="0"/>
-          </a:p>
-          <a:p>
-            <a:pPr marL="342900" indent="-342900">
+            <a:endParaRPr lang="en-US" sz="1000">
+              <a:solidFill>
+                <a:srgbClr val="4e4a3b"/>
+              </a:solidFill>
+              <a:latin typeface="바탕"/>
+              <a:ea typeface="바탕"/>
+            </a:endParaRPr>
+          </a:p>
+          <a:p>
+            <a:pPr marL="342900" lvl="0" indent="-342900">
               <a:lnSpc>
                 <a:spcPct val="125000"/>
               </a:lnSpc>
               <a:buSzPct val="100000"/>
               <a:buChar char="•"/>
-            </a:pPr>
-            <a:r>
-              <a:rPr lang="en-US" sz="1000" dirty="0">
-                <a:solidFill>
-                  <a:srgbClr val="4E4A3B"/>
-                </a:solidFill>
-              </a:rPr>
-              <a:t>⚠ 로그인 뒤 화면이라 테스트 계정으로 들어가서 찍는다</a:t>
-            </a:r>
-            <a:endParaRPr lang="en-US" sz="1000" dirty="0"/>
-          </a:p>
-        </p:txBody>
-      </p:sp>
+              <a:defRPr/>
+            </a:pPr>
+            <a:r>
+              <a:rPr lang="en-US" sz="1000">
+                <a:solidFill>
+                  <a:srgbClr val="4e4a3b"/>
+                </a:solidFill>
+                <a:latin typeface="바탕"/>
+              </a:rPr>
+              <a:t>⚠</a:t>
+            </a:r>
+            <a:r>
+              <a:rPr lang="en-US" sz="1000">
+                <a:solidFill>
+                  <a:srgbClr val="4e4a3b"/>
+                </a:solidFill>
+                <a:latin typeface="바탕"/>
+                <a:ea typeface="바탕"/>
+              </a:rPr>
+              <a:t> 로그인 뒤 화면이라 테스트 계정으로 들어가서 찍는다</a:t>
+            </a:r>
+            <a:endParaRPr lang="en-US" sz="1000">
+              <a:solidFill>
+                <a:srgbClr val="4e4a3b"/>
+              </a:solidFill>
+              <a:latin typeface="바탕"/>
+              <a:ea typeface="바탕"/>
+            </a:endParaRPr>
+          </a:p>
+          <a:p>
+            <a:pPr marL="342900" lvl="0" indent="-342900">
+              <a:lnSpc>
+                <a:spcPct val="125000"/>
+              </a:lnSpc>
+              <a:buSzPct val="100000"/>
+              <a:buChar char="•"/>
+              <a:defRPr/>
+            </a:pPr>
+            <a:r>
+              <a:rPr lang="en-US" sz="1000">
+                <a:solidFill>
+                  <a:srgbClr val="4e4a3b"/>
+                </a:solidFill>
+                <a:latin typeface="바탕"/>
+                <a:ea typeface="바탕"/>
+              </a:rPr>
+              <a:t>심사 기간에는 «</a:t>
+            </a:r>
+            <a:r>
+              <a:rPr lang="en-US" altLang="ko-KR" sz="1000">
+                <a:solidFill>
+                  <a:srgbClr val="4e4a3b"/>
+                </a:solidFill>
+                <a:latin typeface="바탕"/>
+                <a:ea typeface="바탕"/>
+              </a:rPr>
+              <a:t>5</a:t>
+            </a:r>
+            <a:r>
+              <a:rPr lang="ko-KR" altLang="en-US" sz="1000">
+                <a:solidFill>
+                  <a:srgbClr val="4e4a3b"/>
+                </a:solidFill>
+                <a:latin typeface="바탕"/>
+                <a:ea typeface="바탕"/>
+              </a:rPr>
+              <a:t>만원</a:t>
+            </a:r>
+            <a:r>
+              <a:rPr lang="en-US" altLang="ko-KR" sz="1000">
+                <a:solidFill>
+                  <a:srgbClr val="4e4a3b"/>
+                </a:solidFill>
+                <a:latin typeface="바탕"/>
+                <a:ea typeface="바탕"/>
+              </a:rPr>
+              <a:t>,</a:t>
+            </a:r>
+            <a:r>
+              <a:rPr lang="ko-KR" altLang="en-US" sz="1000">
+                <a:solidFill>
+                  <a:srgbClr val="4e4a3b"/>
+                </a:solidFill>
+                <a:latin typeface="바탕"/>
+                <a:ea typeface="바탕"/>
+              </a:rPr>
+              <a:t> </a:t>
+            </a:r>
+            <a:r>
+              <a:rPr lang="en-US" altLang="ko-KR" sz="1000">
+                <a:solidFill>
+                  <a:srgbClr val="4e4a3b"/>
+                </a:solidFill>
+                <a:latin typeface="바탕"/>
+                <a:ea typeface="바탕"/>
+              </a:rPr>
+              <a:t>550</a:t>
+            </a:r>
+            <a:r>
+              <a:rPr lang="ko-KR" altLang="en-US" sz="1000">
+                <a:solidFill>
+                  <a:srgbClr val="4e4a3b"/>
+                </a:solidFill>
+                <a:latin typeface="바탕"/>
+                <a:ea typeface="바탕"/>
+              </a:rPr>
+              <a:t>크레딧 </a:t>
+            </a:r>
+            <a:r>
+              <a:rPr lang="en-US" sz="1000">
+                <a:solidFill>
+                  <a:srgbClr val="4e4a3b"/>
+                </a:solidFill>
+                <a:latin typeface="바탕"/>
+                <a:ea typeface="바탕"/>
+              </a:rPr>
+              <a:t>» </a:t>
+            </a:r>
+            <a:r>
+              <a:rPr lang="ko-KR" altLang="en-US" sz="1000">
+                <a:solidFill>
+                  <a:srgbClr val="4e4a3b"/>
+                </a:solidFill>
+                <a:latin typeface="바탕"/>
+                <a:ea typeface="바탕"/>
+              </a:rPr>
+              <a:t>충전</a:t>
+            </a:r>
+            <a:r>
+              <a:rPr lang="en-US" altLang="ko-KR" sz="1000">
+                <a:solidFill>
+                  <a:srgbClr val="4e4a3b"/>
+                </a:solidFill>
+                <a:latin typeface="바탕"/>
+                <a:ea typeface="바탕"/>
+              </a:rPr>
+              <a:t>(</a:t>
+            </a:r>
+            <a:r>
+              <a:rPr lang="ko-KR" altLang="en-US" sz="1000">
+                <a:solidFill>
+                  <a:srgbClr val="4e4a3b"/>
+                </a:solidFill>
+                <a:latin typeface="바탕"/>
+                <a:ea typeface="바탕"/>
+              </a:rPr>
+              <a:t>최대 </a:t>
+            </a:r>
+            <a:r>
+              <a:rPr lang="en-US" altLang="ko-KR" sz="1000">
+                <a:solidFill>
+                  <a:srgbClr val="4e4a3b"/>
+                </a:solidFill>
+                <a:latin typeface="바탕"/>
+                <a:ea typeface="바탕"/>
+              </a:rPr>
+              <a:t>2</a:t>
+            </a:r>
+            <a:r>
+              <a:rPr lang="ko-KR" altLang="en-US" sz="1000">
+                <a:solidFill>
+                  <a:srgbClr val="4e4a3b"/>
+                </a:solidFill>
+                <a:latin typeface="바탕"/>
+                <a:ea typeface="바탕"/>
+              </a:rPr>
+              <a:t>회 가능</a:t>
+            </a:r>
+            <a:r>
+              <a:rPr lang="en-US" altLang="ko-KR" sz="1000">
+                <a:solidFill>
+                  <a:srgbClr val="4e4a3b"/>
+                </a:solidFill>
+                <a:latin typeface="바탕"/>
+                <a:ea typeface="바탕"/>
+              </a:rPr>
+              <a:t>)</a:t>
+            </a:r>
+            <a:r>
+              <a:rPr lang="en-US" sz="1000">
+                <a:solidFill>
+                  <a:srgbClr val="4e4a3b"/>
+                </a:solidFill>
+                <a:latin typeface="바탕"/>
+                <a:ea typeface="바탕"/>
+              </a:rPr>
+              <a:t>만 </a:t>
+            </a:r>
+            <a:r>
+              <a:rPr lang="ko-KR" altLang="en-US" sz="1000">
+                <a:solidFill>
+                  <a:srgbClr val="4e4a3b"/>
+                </a:solidFill>
+                <a:latin typeface="바탕"/>
+                <a:ea typeface="바탕"/>
+              </a:rPr>
+              <a:t>충전하기</a:t>
+            </a:r>
+            <a:r>
+              <a:rPr lang="en-US" sz="1000">
+                <a:solidFill>
+                  <a:srgbClr val="4e4a3b"/>
+                </a:solidFill>
+                <a:latin typeface="바탕"/>
+                <a:ea typeface="바탕"/>
+              </a:rPr>
+              <a:t> 버튼이 열린다(나머지는 「</a:t>
+            </a:r>
+            <a:r>
+              <a:rPr lang="ko-KR" altLang="en-US" sz="1000">
+                <a:solidFill>
+                  <a:srgbClr val="4e4a3b"/>
+                </a:solidFill>
+                <a:latin typeface="바탕"/>
+                <a:ea typeface="바탕"/>
+              </a:rPr>
+              <a:t>결제 심사 준비</a:t>
+            </a:r>
+            <a:r>
+              <a:rPr lang="en-US" sz="1000">
+                <a:solidFill>
+                  <a:srgbClr val="4e4a3b"/>
+                </a:solidFill>
+                <a:latin typeface="바탕"/>
+                <a:ea typeface="바탕"/>
+              </a:rPr>
+              <a:t> 중」)</a:t>
+            </a:r>
+            <a:endParaRPr lang="en-US" sz="1000">
+              <a:solidFill>
+                <a:srgbClr val="4e4a3b"/>
+              </a:solidFill>
+              <a:latin typeface="바탕"/>
+              <a:ea typeface="바탕"/>
+            </a:endParaRPr>
+          </a:p>
+        </p:txBody>
+      </p:sp>
+      <p:pic>
+        <p:nvPicPr>
+          <p:cNvPr id="8" name="그림 7"/>
+          <p:cNvPicPr>
+            <a:picLocks noChangeAspect="1"/>
+          </p:cNvPicPr>
+          <p:nvPr/>
+        </p:nvPicPr>
+        <p:blipFill rotWithShape="1">
+          <a:blip r:embed="rId3"/>
+          <a:stretch>
+            <a:fillRect/>
+          </a:stretch>
+        </p:blipFill>
+        <p:spPr>
+          <a:xfrm>
+            <a:off x="457200" y="1142999"/>
+            <a:ext cx="4283481" cy="4000500"/>
+          </a:xfrm>
+          <a:prstGeom prst="rect">
+            <a:avLst/>
+          </a:prstGeom>
+        </p:spPr>
+      </p:pic>
     </p:spTree>
   </p:cSld>
   <p:clrMapOvr>
@@ -5080,7 +6877,7 @@
 </file>
 
 <file path=ppt/slides/slide8.xml><?xml version="1.0" encoding="utf-8"?>
-<p:sld xmlns:a="http://schemas.openxmlformats.org/drawingml/2006/main" xmlns:r="http://schemas.openxmlformats.org/officeDocument/2006/relationships" xmlns:p="http://schemas.openxmlformats.org/presentationml/2006/main">
+<p:sld xmlns:r="http://schemas.openxmlformats.org/officeDocument/2006/relationships" xmlns:c="http://schemas.openxmlformats.org/drawingml/2006/chart" xmlns:a="http://schemas.openxmlformats.org/drawingml/2006/main" xmlns:dgm="http://schemas.openxmlformats.org/drawingml/2006/diagram" xmlns:dsp="http://schemas.microsoft.com/office/drawing/2008/diagram" xmlns:p="http://schemas.openxmlformats.org/presentationml/2006/main">
   <p:cSld name="Slide 8">
     <p:spTree>
       <p:nvGrpSpPr>
@@ -5114,21 +6911,60 @@
           <a:ln/>
         </p:spPr>
         <p:txBody>
-          <a:bodyPr wrap="square" rtlCol="0" anchor="ctr"/>
-          <a:lstStyle/>
-          <a:p>
-            <a:pPr indent="0" marL="0">
+          <a:bodyPr wrap="square" anchor="ctr"/>
+          <a:lstStyle/>
+          <a:p>
+            <a:pPr marL="0" lvl="0" indent="0">
               <a:buNone/>
-            </a:pPr>
-            <a:r>
-              <a:rPr lang="en-US" sz="2200" b="1" dirty="0">
-                <a:solidFill>
-                  <a:srgbClr val="20261C"/>
-                </a:solidFill>
+              <a:defRPr/>
+            </a:pPr>
+            <a:r>
+              <a:rPr lang="en-US" sz="2200" b="1">
+                <a:solidFill>
+                  <a:srgbClr val="20261c"/>
+                </a:solidFill>
+                <a:latin typeface="바탕"/>
+                <a:ea typeface="바탕"/>
               </a:rPr>
               <a:t>⑦-2  카드 결제창</a:t>
             </a:r>
-            <a:endParaRPr lang="en-US" sz="2200" dirty="0"/>
+            <a:r>
+              <a:rPr lang="ko-KR" altLang="en-US" sz="2200" b="1">
+                <a:solidFill>
+                  <a:srgbClr val="20261c"/>
+                </a:solidFill>
+                <a:latin typeface="바탕"/>
+                <a:ea typeface="바탕"/>
+              </a:rPr>
+              <a:t> </a:t>
+            </a:r>
+            <a:r>
+              <a:rPr lang="en-US" sz="2200" b="1">
+                <a:solidFill>
+                  <a:srgbClr val="20261c"/>
+                </a:solidFill>
+                <a:latin typeface="바탕"/>
+                <a:ea typeface="바탕"/>
+              </a:rPr>
+              <a:t>— ①</a:t>
+            </a:r>
+            <a:r>
+              <a:rPr lang="ko-KR" altLang="en-US" sz="2200" b="1">
+                <a:solidFill>
+                  <a:srgbClr val="20261c"/>
+                </a:solidFill>
+                <a:latin typeface="바탕"/>
+                <a:ea typeface="바탕"/>
+              </a:rPr>
+              <a:t> 결제 방법 선택</a:t>
+            </a:r>
+            <a:endParaRPr lang="ko-KR" altLang="en-US" sz="2200" b="1">
+              <a:solidFill>
+                <a:srgbClr val="20261c"/>
+              </a:solidFill>
+              <a:latin typeface="바탕"/>
+              <a:ea typeface="바탕"/>
+            </a:endParaRPr>
           </a:p>
         </p:txBody>
       </p:sp>
@@ -5150,96 +6986,27 @@
           <a:ln/>
         </p:spPr>
         <p:txBody>
-          <a:bodyPr wrap="square" rtlCol="0" anchor="ctr"/>
-          <a:lstStyle/>
-          <a:p>
-            <a:pPr indent="0" marL="0">
+          <a:bodyPr wrap="square" anchor="ctr"/>
+          <a:lstStyle/>
+          <a:p>
+            <a:pPr marL="0" lvl="0" indent="0">
               <a:buNone/>
-            </a:pPr>
-            <a:r>
-              <a:rPr lang="en-US" sz="1200" dirty="0">
-                <a:solidFill>
-                  <a:srgbClr val="0E6F60"/>
-                </a:solidFill>
+              <a:defRPr/>
+            </a:pPr>
+            <a:r>
+              <a:rPr lang="en-US" sz="1200">
+                <a:solidFill>
+                  <a:srgbClr val="0e6f60"/>
+                </a:solidFill>
+                <a:latin typeface="바탕"/>
+                <a:ea typeface="바탕"/>
               </a:rPr>
               <a:t>https://caffeinecolor.com/dashboard/billing</a:t>
             </a:r>
-            <a:endParaRPr lang="en-US" sz="1200" dirty="0"/>
-          </a:p>
-        </p:txBody>
-      </p:sp>
-      <p:sp>
-        <p:nvSpPr>
-          <p:cNvPr id="4" name="Shape 2"/>
-          <p:cNvSpPr/>
-          <p:nvPr/>
-        </p:nvSpPr>
-        <p:spPr>
-          <a:xfrm>
-            <a:off x="457200" y="1143000"/>
-            <a:ext cx="5394960" cy="3566160"/>
-          </a:xfrm>
-          <a:prstGeom prst="rect">
-            <a:avLst/>
-          </a:prstGeom>
-          <a:solidFill>
-            <a:srgbClr val="FBF9F4"/>
-          </a:solidFill>
-          <a:ln w="12700">
-            <a:solidFill>
-              <a:srgbClr val="D8D4C6"/>
-            </a:solidFill>
-            <a:prstDash val="dash"/>
-          </a:ln>
-        </p:spPr>
-      </p:sp>
-      <p:sp>
-        <p:nvSpPr>
-          <p:cNvPr id="5" name="Text 3"/>
-          <p:cNvSpPr/>
-          <p:nvPr/>
-        </p:nvSpPr>
-        <p:spPr>
-          <a:xfrm>
-            <a:off x="457200" y="2560320"/>
-            <a:ext cx="5394960" cy="731520"/>
-          </a:xfrm>
-          <a:prstGeom prst="rect">
-            <a:avLst/>
-          </a:prstGeom>
-          <a:noFill/>
-          <a:ln/>
-        </p:spPr>
-        <p:txBody>
-          <a:bodyPr wrap="square" rtlCol="0" anchor="ctr"/>
-          <a:lstStyle/>
-          <a:p>
-            <a:pPr algn="ctr" indent="0" marL="0">
-              <a:buNone/>
-            </a:pPr>
-            <a:r>
-              <a:rPr lang="en-US" sz="1300" dirty="0">
-                <a:solidFill>
-                  <a:srgbClr val="9A8C68"/>
-                </a:solidFill>
-              </a:rPr>
-              <a:t>여기에 캡처를 끼웁니다</a:t>
-            </a:r>
-            <a:endParaRPr lang="en-US" sz="1300" dirty="0"/>
-          </a:p>
-          <a:p>
-            <a:pPr algn="ctr" indent="0" marL="0">
-              <a:buNone/>
-            </a:pPr>
-            <a:r>
-              <a:rPr lang="en-US" sz="1300" dirty="0">
-                <a:solidFill>
-                  <a:srgbClr val="9A8C68"/>
-                </a:solidFill>
-              </a:rPr>
-              <a:t>(주소창이 보이도록 창째로)</a:t>
-            </a:r>
-            <a:endParaRPr lang="en-US" sz="1300" dirty="0"/>
+            <a:endParaRPr lang="en-US" sz="1200">
+              <a:latin typeface="바탕"/>
+              <a:ea typeface="바탕"/>
+            </a:endParaRPr>
           </a:p>
         </p:txBody>
       </p:sp>
@@ -5261,21 +7028,27 @@
           <a:ln/>
         </p:spPr>
         <p:txBody>
-          <a:bodyPr wrap="square" rtlCol="0" anchor="ctr"/>
-          <a:lstStyle/>
-          <a:p>
-            <a:pPr indent="0" marL="0">
+          <a:bodyPr wrap="square" anchor="ctr"/>
+          <a:lstStyle/>
+          <a:p>
+            <a:pPr marL="0" lvl="0" indent="0">
               <a:buNone/>
-            </a:pPr>
-            <a:r>
-              <a:rPr lang="en-US" sz="1200" b="1" dirty="0">
-                <a:solidFill>
-                  <a:srgbClr val="2A2320"/>
-                </a:solidFill>
+              <a:defRPr/>
+            </a:pPr>
+            <a:r>
+              <a:rPr lang="en-US" sz="1200" b="1">
+                <a:solidFill>
+                  <a:srgbClr val="2a2320"/>
+                </a:solidFill>
+                <a:latin typeface="바탕"/>
+                <a:ea typeface="바탕"/>
               </a:rPr>
               <a:t>이 화면에 반드시 보여야 하는 것</a:t>
             </a:r>
-            <a:endParaRPr lang="en-US" sz="1200" dirty="0"/>
+            <a:endParaRPr lang="en-US" sz="1200">
+              <a:latin typeface="바탕"/>
+              <a:ea typeface="바탕"/>
+            </a:endParaRPr>
           </a:p>
         </p:txBody>
       </p:sp>
@@ -5288,7 +7061,7 @@
         <p:spPr>
           <a:xfrm>
             <a:off x="6126480" y="1463040"/>
-            <a:ext cx="2560320" cy="3200400"/>
+            <a:ext cx="2560320" cy="1680210"/>
           </a:xfrm>
           <a:prstGeom prst="rect">
             <a:avLst/>
@@ -5297,82 +7070,139 @@
           <a:ln/>
         </p:spPr>
         <p:txBody>
-          <a:bodyPr wrap="square" rtlCol="0" anchor="ctr"/>
-          <a:lstStyle/>
-          <a:p>
-            <a:pPr marL="342900" indent="-342900">
+          <a:bodyPr wrap="square" anchor="ctr"/>
+          <a:lstStyle/>
+          <a:p>
+            <a:pPr marL="342900" lvl="0" indent="-342900">
               <a:lnSpc>
                 <a:spcPct val="125000"/>
               </a:lnSpc>
               <a:buSzPct val="100000"/>
               <a:buChar char="•"/>
-            </a:pPr>
-            <a:r>
-              <a:rPr lang="en-US" sz="1000" dirty="0">
-                <a:solidFill>
-                  <a:srgbClr val="4E4A3B"/>
-                </a:solidFill>
+              <a:defRPr/>
+            </a:pPr>
+            <a:r>
+              <a:rPr lang="en-US" sz="1000">
+                <a:solidFill>
+                  <a:srgbClr val="4e4a3b"/>
+                </a:solidFill>
+                <a:latin typeface="바탕"/>
+                <a:ea typeface="바탕"/>
               </a:rPr>
               <a:t>금액을 고르고 「충전하기」를 눌러 토스 결제창이 뜬 상태</a:t>
             </a:r>
-            <a:endParaRPr lang="en-US" sz="1000" dirty="0"/>
-          </a:p>
-          <a:p>
-            <a:pPr marL="342900" indent="-342900">
+            <a:endParaRPr lang="en-US" sz="1000">
+              <a:solidFill>
+                <a:srgbClr val="4e4a3b"/>
+              </a:solidFill>
+              <a:latin typeface="바탕"/>
+              <a:ea typeface="바탕"/>
+            </a:endParaRPr>
+          </a:p>
+          <a:p>
+            <a:pPr marL="342900" lvl="0" indent="-342900">
               <a:lnSpc>
                 <a:spcPct val="125000"/>
               </a:lnSpc>
               <a:buSzPct val="100000"/>
               <a:buChar char="•"/>
-            </a:pPr>
-            <a:r>
-              <a:rPr lang="en-US" sz="1000" dirty="0">
-                <a:solidFill>
-                  <a:srgbClr val="4E4A3B"/>
-                </a:solidFill>
+              <a:defRPr/>
+            </a:pPr>
+            <a:r>
+              <a:rPr lang="en-US" sz="1000">
+                <a:solidFill>
+                  <a:srgbClr val="4e4a3b"/>
+                </a:solidFill>
+                <a:latin typeface="바탕"/>
+                <a:ea typeface="바탕"/>
               </a:rPr>
               <a:t>결제창에 «금액»이 찍혀 있어야 한다</a:t>
             </a:r>
-            <a:endParaRPr lang="en-US" sz="1000" dirty="0"/>
-          </a:p>
-          <a:p>
-            <a:pPr marL="342900" indent="-342900">
+            <a:endParaRPr lang="en-US" sz="1000">
+              <a:solidFill>
+                <a:srgbClr val="4e4a3b"/>
+              </a:solidFill>
+              <a:latin typeface="바탕"/>
+              <a:ea typeface="바탕"/>
+            </a:endParaRPr>
+          </a:p>
+          <a:p>
+            <a:pPr marL="342900" lvl="0" indent="-342900">
               <a:lnSpc>
                 <a:spcPct val="125000"/>
               </a:lnSpc>
               <a:buSzPct val="100000"/>
               <a:buChar char="•"/>
-            </a:pPr>
-            <a:r>
-              <a:rPr lang="en-US" sz="1000" dirty="0">
-                <a:solidFill>
-                  <a:srgbClr val="4E4A3B"/>
-                </a:solidFill>
+              <a:defRPr/>
+            </a:pPr>
+            <a:r>
+              <a:rPr lang="en-US" sz="1000">
+                <a:solidFill>
+                  <a:srgbClr val="4e4a3b"/>
+                </a:solidFill>
+                <a:latin typeface="바탕"/>
+                <a:ea typeface="바탕"/>
               </a:rPr>
               <a:t>테스트 결제창이어도 심사 가능(가이드 유의사항 6)</a:t>
             </a:r>
-            <a:endParaRPr lang="en-US" sz="1000" dirty="0"/>
-          </a:p>
-          <a:p>
-            <a:pPr marL="342900" indent="-342900">
+            <a:endParaRPr lang="en-US" sz="1000">
+              <a:solidFill>
+                <a:srgbClr val="4e4a3b"/>
+              </a:solidFill>
+              <a:latin typeface="바탕"/>
+              <a:ea typeface="바탕"/>
+            </a:endParaRPr>
+          </a:p>
+          <a:p>
+            <a:pPr marL="342900" lvl="0" indent="-342900">
               <a:lnSpc>
                 <a:spcPct val="125000"/>
               </a:lnSpc>
               <a:buSzPct val="100000"/>
               <a:buChar char="•"/>
-            </a:pPr>
-            <a:r>
-              <a:rPr lang="en-US" sz="1000" dirty="0">
-                <a:solidFill>
-                  <a:srgbClr val="4E4A3B"/>
-                </a:solidFill>
+              <a:defRPr/>
+            </a:pPr>
+            <a:r>
+              <a:rPr lang="en-US" sz="1000">
+                <a:solidFill>
+                  <a:srgbClr val="4e4a3b"/>
+                </a:solidFill>
+                <a:latin typeface="바탕"/>
+                <a:ea typeface="바탕"/>
               </a:rPr>
               <a:t>비씨·농협은 카드사 앱 화면까지 필요할 수 있다(유의사항 7)</a:t>
             </a:r>
-            <a:endParaRPr lang="en-US" sz="1000" dirty="0"/>
-          </a:p>
-        </p:txBody>
-      </p:sp>
+            <a:endParaRPr lang="en-US" sz="1000">
+              <a:latin typeface="바탕"/>
+              <a:ea typeface="바탕"/>
+            </a:endParaRPr>
+          </a:p>
+        </p:txBody>
+      </p:sp>
+      <p:pic>
+        <p:nvPicPr>
+          <p:cNvPr id="9" name="그림 8"/>
+          <p:cNvPicPr>
+            <a:picLocks noChangeAspect="1"/>
+          </p:cNvPicPr>
+          <p:nvPr/>
+        </p:nvPicPr>
+        <p:blipFill rotWithShape="1">
+          <a:blip r:embed="rId3"/>
+          <a:stretch>
+            <a:fillRect/>
+          </a:stretch>
+        </p:blipFill>
+        <p:spPr>
+          <a:xfrm>
+            <a:off x="457200" y="1143000"/>
+            <a:ext cx="4067360" cy="4000500"/>
+          </a:xfrm>
+          <a:prstGeom prst="rect">
+            <a:avLst/>
+          </a:prstGeom>
+        </p:spPr>
+      </p:pic>
     </p:spTree>
   </p:cSld>
   <p:clrMapOvr>
@@ -5382,8 +7212,8 @@
 </file>
 
 <file path=ppt/slides/slide9.xml><?xml version="1.0" encoding="utf-8"?>
-<p:sld xmlns:a="http://schemas.openxmlformats.org/drawingml/2006/main" xmlns:r="http://schemas.openxmlformats.org/officeDocument/2006/relationships" xmlns:p="http://schemas.openxmlformats.org/presentationml/2006/main">
-  <p:cSld name="Slide 9">
+<p:sld xmlns:r="http://schemas.openxmlformats.org/officeDocument/2006/relationships" xmlns:c="http://schemas.openxmlformats.org/drawingml/2006/chart" xmlns:a="http://schemas.openxmlformats.org/drawingml/2006/main" xmlns:dgm="http://schemas.openxmlformats.org/drawingml/2006/diagram" xmlns:dsp="http://schemas.microsoft.com/office/drawing/2008/diagram" xmlns:p="http://schemas.openxmlformats.org/presentationml/2006/main">
+  <p:cSld name="Slide 8">
     <p:spTree>
       <p:nvGrpSpPr>
         <p:cNvPr id="1" name=""/>
@@ -5416,21 +7246,80 @@
           <a:ln/>
         </p:spPr>
         <p:txBody>
-          <a:bodyPr wrap="square" rtlCol="0" anchor="ctr"/>
-          <a:lstStyle/>
-          <a:p>
-            <a:pPr indent="0" marL="0">
+          <a:bodyPr wrap="square" anchor="ctr"/>
+          <a:lstStyle/>
+          <a:p>
+            <a:pPr marL="0" lvl="0" indent="0">
               <a:buNone/>
-            </a:pPr>
-            <a:r>
-              <a:rPr lang="en-US" sz="2200" b="1" dirty="0">
-                <a:solidFill>
-                  <a:srgbClr val="20261C"/>
-                </a:solidFill>
-              </a:rPr>
-              <a:t>⑧-1  결제 후 — 충전된 크레딧</a:t>
-            </a:r>
-            <a:endParaRPr lang="en-US" sz="2200" dirty="0"/>
+              <a:defRPr/>
+            </a:pPr>
+            <a:r>
+              <a:rPr lang="en-US" sz="2200" b="1">
+                <a:solidFill>
+                  <a:srgbClr val="20261c"/>
+                </a:solidFill>
+                <a:latin typeface="바탕"/>
+                <a:ea typeface="바탕"/>
+              </a:rPr>
+              <a:t>⑦-2  카드 결제창</a:t>
+            </a:r>
+            <a:r>
+              <a:rPr lang="ko-KR" altLang="en-US" sz="2200" b="1">
+                <a:solidFill>
+                  <a:srgbClr val="20261c"/>
+                </a:solidFill>
+                <a:latin typeface="바탕"/>
+                <a:ea typeface="바탕"/>
+              </a:rPr>
+              <a:t> </a:t>
+            </a:r>
+            <a:r>
+              <a:rPr lang="en-US" sz="2200" b="1">
+                <a:solidFill>
+                  <a:srgbClr val="20261c"/>
+                </a:solidFill>
+                <a:latin typeface="바탕"/>
+                <a:ea typeface="바탕"/>
+              </a:rPr>
+              <a:t>— ①</a:t>
+            </a:r>
+            <a:r>
+              <a:rPr lang="ko-KR" altLang="en-US" sz="2200" b="1">
+                <a:solidFill>
+                  <a:srgbClr val="20261c"/>
+                </a:solidFill>
+                <a:latin typeface="바탕"/>
+                <a:ea typeface="바탕"/>
+              </a:rPr>
+              <a:t> 결제 방법 선택 </a:t>
+            </a:r>
+            <a:r>
+              <a:rPr lang="en-US" sz="2200" b="1">
+                <a:solidFill>
+                  <a:srgbClr val="20261c"/>
+                </a:solidFill>
+                <a:latin typeface="바탕"/>
+                <a:ea typeface="바탕"/>
+              </a:rPr>
+              <a:t>— </a:t>
+            </a:r>
+            <a:r>
+              <a:rPr lang="ko-KR" altLang="en-US" sz="2200" b="1">
+                <a:solidFill>
+                  <a:srgbClr val="20261c"/>
+                </a:solidFill>
+                <a:latin typeface="바탕"/>
+                <a:ea typeface="바탕"/>
+              </a:rPr>
+              <a:t>비씨카드</a:t>
+            </a:r>
+            <a:endParaRPr lang="ko-KR" altLang="en-US" sz="2200" b="1">
+              <a:solidFill>
+                <a:srgbClr val="20261c"/>
+              </a:solidFill>
+              <a:latin typeface="바탕"/>
+              <a:ea typeface="바탕"/>
+            </a:endParaRPr>
           </a:p>
         </p:txBody>
       </p:sp>
@@ -5452,96 +7341,27 @@
           <a:ln/>
         </p:spPr>
         <p:txBody>
-          <a:bodyPr wrap="square" rtlCol="0" anchor="ctr"/>
-          <a:lstStyle/>
-          <a:p>
-            <a:pPr indent="0" marL="0">
+          <a:bodyPr wrap="square" anchor="ctr"/>
+          <a:lstStyle/>
+          <a:p>
+            <a:pPr marL="0" lvl="0" indent="0">
               <a:buNone/>
-            </a:pPr>
-            <a:r>
-              <a:rPr lang="en-US" sz="1200" dirty="0">
-                <a:solidFill>
-                  <a:srgbClr val="0E6F60"/>
-                </a:solidFill>
+              <a:defRPr/>
+            </a:pPr>
+            <a:r>
+              <a:rPr lang="en-US" sz="1200">
+                <a:solidFill>
+                  <a:srgbClr val="0e6f60"/>
+                </a:solidFill>
+                <a:latin typeface="바탕"/>
+                <a:ea typeface="바탕"/>
               </a:rPr>
               <a:t>https://caffeinecolor.com/dashboard/billing</a:t>
             </a:r>
-            <a:endParaRPr lang="en-US" sz="1200" dirty="0"/>
-          </a:p>
-        </p:txBody>
-      </p:sp>
-      <p:sp>
-        <p:nvSpPr>
-          <p:cNvPr id="4" name="Shape 2"/>
-          <p:cNvSpPr/>
-          <p:nvPr/>
-        </p:nvSpPr>
-        <p:spPr>
-          <a:xfrm>
-            <a:off x="457200" y="1143000"/>
-            <a:ext cx="5394960" cy="3566160"/>
-          </a:xfrm>
-          <a:prstGeom prst="rect">
-            <a:avLst/>
-          </a:prstGeom>
-          <a:solidFill>
-            <a:srgbClr val="FBF9F4"/>
-          </a:solidFill>
-          <a:ln w="12700">
-            <a:solidFill>
-              <a:srgbClr val="D8D4C6"/>
-            </a:solidFill>
-            <a:prstDash val="dash"/>
-          </a:ln>
-        </p:spPr>
-      </p:sp>
-      <p:sp>
-        <p:nvSpPr>
-          <p:cNvPr id="5" name="Text 3"/>
-          <p:cNvSpPr/>
-          <p:nvPr/>
-        </p:nvSpPr>
-        <p:spPr>
-          <a:xfrm>
-            <a:off x="457200" y="2560320"/>
-            <a:ext cx="5394960" cy="731520"/>
-          </a:xfrm>
-          <a:prstGeom prst="rect">
-            <a:avLst/>
-          </a:prstGeom>
-          <a:noFill/>
-          <a:ln/>
-        </p:spPr>
-        <p:txBody>
-          <a:bodyPr wrap="square" rtlCol="0" anchor="ctr"/>
-          <a:lstStyle/>
-          <a:p>
-            <a:pPr algn="ctr" indent="0" marL="0">
-              <a:buNone/>
-            </a:pPr>
-            <a:r>
-              <a:rPr lang="en-US" sz="1300" dirty="0">
-                <a:solidFill>
-                  <a:srgbClr val="9A8C68"/>
-                </a:solidFill>
-              </a:rPr>
-              <a:t>여기에 캡처를 끼웁니다</a:t>
-            </a:r>
-            <a:endParaRPr lang="en-US" sz="1300" dirty="0"/>
-          </a:p>
-          <a:p>
-            <a:pPr algn="ctr" indent="0" marL="0">
-              <a:buNone/>
-            </a:pPr>
-            <a:r>
-              <a:rPr lang="en-US" sz="1300" dirty="0">
-                <a:solidFill>
-                  <a:srgbClr val="9A8C68"/>
-                </a:solidFill>
-              </a:rPr>
-              <a:t>(주소창이 보이도록 창째로)</a:t>
-            </a:r>
-            <a:endParaRPr lang="en-US" sz="1300" dirty="0"/>
+            <a:endParaRPr lang="en-US" sz="1200">
+              <a:latin typeface="바탕"/>
+              <a:ea typeface="바탕"/>
+            </a:endParaRPr>
           </a:p>
         </p:txBody>
       </p:sp>
@@ -5563,21 +7383,27 @@
           <a:ln/>
         </p:spPr>
         <p:txBody>
-          <a:bodyPr wrap="square" rtlCol="0" anchor="ctr"/>
-          <a:lstStyle/>
-          <a:p>
-            <a:pPr indent="0" marL="0">
+          <a:bodyPr wrap="square" anchor="ctr"/>
+          <a:lstStyle/>
+          <a:p>
+            <a:pPr marL="0" lvl="0" indent="0">
               <a:buNone/>
-            </a:pPr>
-            <a:r>
-              <a:rPr lang="en-US" sz="1200" b="1" dirty="0">
-                <a:solidFill>
-                  <a:srgbClr val="2A2320"/>
-                </a:solidFill>
+              <a:defRPr/>
+            </a:pPr>
+            <a:r>
+              <a:rPr lang="en-US" sz="1200" b="1">
+                <a:solidFill>
+                  <a:srgbClr val="2a2320"/>
+                </a:solidFill>
+                <a:latin typeface="바탕"/>
+                <a:ea typeface="바탕"/>
               </a:rPr>
               <a:t>이 화면에 반드시 보여야 하는 것</a:t>
             </a:r>
-            <a:endParaRPr lang="en-US" sz="1200" dirty="0"/>
+            <a:endParaRPr lang="en-US" sz="1200">
+              <a:latin typeface="바탕"/>
+              <a:ea typeface="바탕"/>
+            </a:endParaRPr>
           </a:p>
         </p:txBody>
       </p:sp>
@@ -5590,7 +7416,7 @@
         <p:spPr>
           <a:xfrm>
             <a:off x="6126480" y="1463040"/>
-            <a:ext cx="2560320" cy="3200400"/>
+            <a:ext cx="2560320" cy="1680210"/>
           </a:xfrm>
           <a:prstGeom prst="rect">
             <a:avLst/>
@@ -5599,47 +7425,145 @@
           <a:ln/>
         </p:spPr>
         <p:txBody>
-          <a:bodyPr wrap="square" rtlCol="0" anchor="ctr"/>
-          <a:lstStyle/>
-          <a:p>
-            <a:pPr marL="342900" indent="-342900">
+          <a:bodyPr wrap="square" anchor="ctr"/>
+          <a:lstStyle/>
+          <a:p>
+            <a:pPr marL="342900" lvl="0" indent="-342900">
               <a:lnSpc>
                 <a:spcPct val="125000"/>
               </a:lnSpc>
               <a:buSzPct val="100000"/>
               <a:buChar char="•"/>
-            </a:pPr>
-            <a:r>
-              <a:rPr lang="en-US" sz="1000" dirty="0">
-                <a:solidFill>
-                  <a:srgbClr val="4E4A3B"/>
-                </a:solidFill>
-              </a:rPr>
-              <a:t>결제 완료 후 잔액이 늘어난 화면</a:t>
-            </a:r>
-            <a:endParaRPr lang="en-US" sz="1000" dirty="0"/>
-          </a:p>
-          <a:p>
-            <a:pPr marL="342900" indent="-342900">
+              <a:defRPr/>
+            </a:pPr>
+            <a:r>
+              <a:rPr lang="en-US" sz="1000">
+                <a:solidFill>
+                  <a:srgbClr val="4e4a3b"/>
+                </a:solidFill>
+                <a:latin typeface="바탕"/>
+                <a:ea typeface="바탕"/>
+              </a:rPr>
+              <a:t>금액을 고르고 「충전하기」를 눌러 토스 결제창이 뜬 상태</a:t>
+            </a:r>
+            <a:endParaRPr lang="en-US" sz="1000">
+              <a:solidFill>
+                <a:srgbClr val="4e4a3b"/>
+              </a:solidFill>
+              <a:latin typeface="바탕"/>
+              <a:ea typeface="바탕"/>
+            </a:endParaRPr>
+          </a:p>
+          <a:p>
+            <a:pPr marL="342900" lvl="0" indent="-342900">
               <a:lnSpc>
                 <a:spcPct val="125000"/>
               </a:lnSpc>
               <a:buSzPct val="100000"/>
               <a:buChar char="•"/>
-            </a:pPr>
-            <a:r>
-              <a:rPr lang="en-US" sz="1000" dirty="0">
-                <a:solidFill>
-                  <a:srgbClr val="4E4A3B"/>
-                </a:solidFill>
-              </a:rPr>
-              <a:t>충전 내역(언제 얼마가 몇 크레딧으로)까지 보이면 더 좋다</a:t>
-            </a:r>
-            <a:endParaRPr lang="en-US" sz="1000" dirty="0"/>
-          </a:p>
-        </p:txBody>
-      </p:sp>
+              <a:defRPr/>
+            </a:pPr>
+            <a:r>
+              <a:rPr lang="en-US" sz="1000">
+                <a:solidFill>
+                  <a:srgbClr val="4e4a3b"/>
+                </a:solidFill>
+                <a:latin typeface="바탕"/>
+                <a:ea typeface="바탕"/>
+              </a:rPr>
+              <a:t>결제창에 «금액»이 찍혀 있어야 한다</a:t>
+            </a:r>
+            <a:endParaRPr lang="en-US" sz="1000">
+              <a:solidFill>
+                <a:srgbClr val="4e4a3b"/>
+              </a:solidFill>
+              <a:latin typeface="바탕"/>
+              <a:ea typeface="바탕"/>
+            </a:endParaRPr>
+          </a:p>
+          <a:p>
+            <a:pPr marL="342900" lvl="0" indent="-342900">
+              <a:lnSpc>
+                <a:spcPct val="125000"/>
+              </a:lnSpc>
+              <a:buSzPct val="100000"/>
+              <a:buChar char="•"/>
+              <a:defRPr/>
+            </a:pPr>
+            <a:r>
+              <a:rPr lang="en-US" sz="1000">
+                <a:solidFill>
+                  <a:srgbClr val="4e4a3b"/>
+                </a:solidFill>
+                <a:latin typeface="바탕"/>
+                <a:ea typeface="바탕"/>
+              </a:rPr>
+              <a:t>테스트 결제창이어도 심사 가능(가이드 유의사항 6)</a:t>
+            </a:r>
+            <a:endParaRPr lang="en-US" sz="1000">
+              <a:solidFill>
+                <a:srgbClr val="4e4a3b"/>
+              </a:solidFill>
+              <a:latin typeface="바탕"/>
+              <a:ea typeface="바탕"/>
+            </a:endParaRPr>
+          </a:p>
+          <a:p>
+            <a:pPr marL="342900" lvl="0" indent="-342900">
+              <a:lnSpc>
+                <a:spcPct val="125000"/>
+              </a:lnSpc>
+              <a:buSzPct val="100000"/>
+              <a:buChar char="•"/>
+              <a:defRPr/>
+            </a:pPr>
+            <a:r>
+              <a:rPr lang="en-US" sz="1000">
+                <a:solidFill>
+                  <a:srgbClr val="4e4a3b"/>
+                </a:solidFill>
+                <a:latin typeface="바탕"/>
+                <a:ea typeface="바탕"/>
+              </a:rPr>
+              <a:t>비씨·농협은 카드사 앱 화면까지 필요할 수 있다(유의사항 7)</a:t>
+            </a:r>
+            <a:endParaRPr lang="en-US" sz="1000">
+              <a:latin typeface="바탕"/>
+              <a:ea typeface="바탕"/>
+            </a:endParaRPr>
+          </a:p>
+        </p:txBody>
+      </p:sp>
+      <p:pic>
+        <p:nvPicPr>
+          <p:cNvPr id="11" name="그림 10"/>
+          <p:cNvPicPr>
+            <a:picLocks noChangeAspect="1"/>
+          </p:cNvPicPr>
+          <p:nvPr/>
+        </p:nvPicPr>
+        <p:blipFill rotWithShape="1">
+          <a:blip r:embed="rId3"/>
+          <a:stretch>
+            <a:fillRect/>
+          </a:stretch>
+        </p:blipFill>
+        <p:spPr>
+          <a:xfrm>
+            <a:off x="541298" y="1143000"/>
+            <a:ext cx="5378701" cy="3306535"/>
+          </a:xfrm>
+          <a:prstGeom prst="rect">
+            <a:avLst/>
+          </a:prstGeom>
+        </p:spPr>
+      </p:pic>
     </p:spTree>
+    <p:extLst>
+      <p:ext uri="{BB962C8B-B14F-4D97-AF65-F5344CB8AC3E}">
+        <p14:creationId xmlns:p14="http://schemas.microsoft.com/office/powerpoint/2010/main" val="2818099029"/>
+      </p:ext>
+    </p:extLst>
   </p:cSld>
   <p:clrMapOvr>
     <a:masterClrMapping/>
@@ -5940,4 +7864,292 @@
     </a:ext>
   </a:extLst>
 </a:theme>
+</file>
+
+<file path=ppt/theme/theme2.xml><?xml version="1.0" encoding="utf-8"?>
+<a:theme xmlns:r="http://schemas.openxmlformats.org/officeDocument/2006/relationships" xmlns:c="http://schemas.openxmlformats.org/drawingml/2006/chart" xmlns:dgm="http://schemas.openxmlformats.org/drawingml/2006/diagram" xmlns:dsp="http://schemas.microsoft.com/office/drawing/2008/diagram" xmlns:a="http://schemas.openxmlformats.org/drawingml/2006/main" xmlns:pic="http://schemas.openxmlformats.org/drawingml/2006/picture" xmlns:wp="http://schemas.openxmlformats.org/drawingml/2006/wordprocessingDrawing" xmlns:xdr="http://schemas.openxmlformats.org/drawingml/2006/spreadsheetDrawing" xmlns:lc="http://schemas.openxmlformats.org/drawingml/2006/lockedCanvas" xmlns:p="http://schemas.openxmlformats.org/presentationml/2006/main" name="Office Theme">
+  <a:themeElements>
+    <a:clrScheme name="Office">
+      <a:dk1>
+        <a:sysClr val="windowText" lastClr="000000"/>
+      </a:dk1>
+      <a:lt1>
+        <a:sysClr val="window" lastClr="ffffff"/>
+      </a:lt1>
+      <a:dk2>
+        <a:srgbClr val="44546a"/>
+      </a:dk2>
+      <a:lt2>
+        <a:srgbClr val="e7e6e6"/>
+      </a:lt2>
+      <a:accent1>
+        <a:srgbClr val="4472c4"/>
+      </a:accent1>
+      <a:accent2>
+        <a:srgbClr val="ed7d31"/>
+      </a:accent2>
+      <a:accent3>
+        <a:srgbClr val="a5a5a5"/>
+      </a:accent3>
+      <a:accent4>
+        <a:srgbClr val="ffc000"/>
+      </a:accent4>
+      <a:accent5>
+        <a:srgbClr val="5b9bd5"/>
+      </a:accent5>
+      <a:accent6>
+        <a:srgbClr val="70ad47"/>
+      </a:accent6>
+      <a:hlink>
+        <a:srgbClr val="0563c1"/>
+      </a:hlink>
+      <a:folHlink>
+        <a:srgbClr val="954f72"/>
+      </a:folHlink>
+    </a:clrScheme>
+    <a:fontScheme name="Office">
+      <a:majorFont>
+        <a:latin typeface="Calibri Light" panose="020F0302020204030204"/>
+        <a:ea typeface=""/>
+        <a:cs typeface=""/>
+        <a:font script="Jpan" typeface="Yu Gothic Light"/>
+        <a:font script="Hang" typeface="맑은 고딕"/>
+        <a:font script="Hans" typeface="等线 Light"/>
+        <a:font script="Hant" typeface="新細明體"/>
+        <a:font script="Arab" typeface="Times New Roman"/>
+        <a:font script="Hebr" typeface="Times New Roman"/>
+        <a:font script="Thai" typeface="Angsana New"/>
+        <a:font script="Ethi" typeface="Nyala"/>
+        <a:font script="Beng" typeface="Vrinda"/>
+        <a:font script="Gujr" typeface="Shruti"/>
+        <a:font script="Khmr" typeface="MoolBoran"/>
+        <a:font script="Knda" typeface="Tunga"/>
+        <a:font script="Guru" typeface="Raavi"/>
+        <a:font script="Cans" typeface="Euphemia"/>
+        <a:font script="Cher" typeface="Plantagenet Cherokee"/>
+        <a:font script="Yiii" typeface="Microsoft Yi Baiti"/>
+        <a:font script="Tibt" typeface="Microsoft Himalaya"/>
+        <a:font script="Thaa" typeface="MV Boli"/>
+        <a:font script="Deva" typeface="Mangal"/>
+        <a:font script="Telu" typeface="Gautami"/>
+        <a:font script="Taml" typeface="Latha"/>
+        <a:font script="Syrc" typeface="Estrangelo Edessa"/>
+        <a:font script="Orya" typeface="Kalinga"/>
+        <a:font script="Mlym" typeface="Kartika"/>
+        <a:font script="Laoo" typeface="DokChampa"/>
+        <a:font script="Sinh" typeface="Iskoola Pota"/>
+        <a:font script="Mong" typeface="Mongolian Baiti"/>
+        <a:font script="Viet" typeface="Times New Roman"/>
+        <a:font script="Uigh" typeface="Microsoft Uighur"/>
+        <a:font script="Geor" typeface="Sylfaen"/>
+        <a:font script="Armn" typeface="Arial"/>
+        <a:font script="Bugi" typeface="Leelawadee UI"/>
+        <a:font script="Bopo" typeface="Microsoft JhengHei"/>
+        <a:font script="Java" typeface="Javanese Text"/>
+        <a:font script="Lisu" typeface="Segoe UI"/>
+        <a:font script="Mymr" typeface="Myanmar Text"/>
+        <a:font script="Nkoo" typeface="Ebrima"/>
+        <a:font script="Olck" typeface="Nirmala UI"/>
+        <a:font script="Osma" typeface="Ebrima"/>
+        <a:font script="Phag" typeface="Phagspa"/>
+        <a:font script="Syrn" typeface="Estrangelo Edessa"/>
+        <a:font script="Syrj" typeface="Estrangelo Edessa"/>
+        <a:font script="Syre" typeface="Estrangelo Edessa"/>
+        <a:font script="Sora" typeface="Nirmala UI"/>
+        <a:font script="Tale" typeface="Microsoft Tai Le"/>
+        <a:font script="Talu" typeface="Microsoft New Tai Lue"/>
+        <a:font script="Tfng" typeface="Ebrima"/>
+      </a:majorFont>
+      <a:minorFont>
+        <a:latin typeface="Calibri" panose="020F0502020204030204"/>
+        <a:ea typeface=""/>
+        <a:cs typeface=""/>
+        <a:font script="Jpan" typeface="Yu Gothic"/>
+        <a:font script="Hang" typeface="맑은 고딕"/>
+        <a:font script="Hans" typeface="等线"/>
+        <a:font script="Hant" typeface="新細明體"/>
+        <a:font script="Arab" typeface="Arial"/>
+        <a:font script="Hebr" typeface="Arial"/>
+        <a:font script="Thai" typeface="Cordia New"/>
+        <a:font script="Ethi" typeface="Nyala"/>
+        <a:font script="Beng" typeface="Vrinda"/>
+        <a:font script="Gujr" typeface="Shruti"/>
+        <a:font script="Khmr" typeface="DaunPenh"/>
+        <a:font script="Knda" typeface="Tunga"/>
+        <a:font script="Guru" typeface="Raavi"/>
+        <a:font script="Cans" typeface="Euphemia"/>
+        <a:font script="Cher" typeface="Plantagenet Cherokee"/>
+        <a:font script="Yiii" typeface="Microsoft Yi Baiti"/>
+        <a:font script="Tibt" typeface="Microsoft Himalaya"/>
+        <a:font script="Thaa" typeface="MV Boli"/>
+        <a:font script="Deva" typeface="Mangal"/>
+        <a:font script="Telu" typeface="Gautami"/>
+        <a:font script="Taml" typeface="Latha"/>
+        <a:font script="Syrc" typeface="Estrangelo Edessa"/>
+        <a:font script="Orya" typeface="Kalinga"/>
+        <a:font script="Mlym" typeface="Kartika"/>
+        <a:font script="Laoo" typeface="DokChampa"/>
+        <a:font script="Sinh" typeface="Iskoola Pota"/>
+        <a:font script="Mong" typeface="Mongolian Baiti"/>
+        <a:font script="Viet" typeface="Arial"/>
+        <a:font script="Uigh" typeface="Microsoft Uighur"/>
+        <a:font script="Geor" typeface="Sylfaen"/>
+        <a:font script="Armn" typeface="Arial"/>
+        <a:font script="Bugi" typeface="Leelawadee UI"/>
+        <a:font script="Bopo" typeface="Microsoft JhengHei"/>
+        <a:font script="Java" typeface="Javanese Text"/>
+        <a:font script="Lisu" typeface="Segoe UI"/>
+        <a:font script="Mymr" typeface="Myanmar Text"/>
+        <a:font script="Nkoo" typeface="Ebrima"/>
+        <a:font script="Olck" typeface="Nirmala UI"/>
+        <a:font script="Osma" typeface="Ebrima"/>
+        <a:font script="Phag" typeface="Phagspa"/>
+        <a:font script="Syrn" typeface="Estrangelo Edessa"/>
+        <a:font script="Syrj" typeface="Estrangelo Edessa"/>
+        <a:font script="Syre" typeface="Estrangelo Edessa"/>
+        <a:font script="Sora" typeface="Nirmala UI"/>
+        <a:font script="Tale" typeface="Microsoft Tai Le"/>
+        <a:font script="Talu" typeface="Microsoft New Tai Lue"/>
+        <a:font script="Tfng" typeface="Ebrima"/>
+      </a:minorFont>
+    </a:fontScheme>
+    <a:fmtScheme name="Office">
+      <a:fillStyleLst>
+        <a:solidFill>
+          <a:schemeClr val="phClr"/>
+        </a:solidFill>
+        <a:gradFill rotWithShape="1">
+          <a:gsLst>
+            <a:gs pos="0">
+              <a:schemeClr val="phClr">
+                <a:lumMod val="110000"/>
+                <a:satMod val="105000"/>
+                <a:tint val="67000"/>
+              </a:schemeClr>
+            </a:gs>
+            <a:gs pos="50000">
+              <a:schemeClr val="phClr">
+                <a:lumMod val="105000"/>
+                <a:satMod val="103000"/>
+                <a:tint val="73000"/>
+              </a:schemeClr>
+            </a:gs>
+            <a:gs pos="100000">
+              <a:schemeClr val="phClr">
+                <a:lumMod val="105000"/>
+                <a:satMod val="109000"/>
+                <a:tint val="81000"/>
+              </a:schemeClr>
+            </a:gs>
+          </a:gsLst>
+          <a:lin ang="5400000" scaled="0"/>
+        </a:gradFill>
+        <a:gradFill rotWithShape="1">
+          <a:gsLst>
+            <a:gs pos="0">
+              <a:schemeClr val="phClr">
+                <a:satMod val="103000"/>
+                <a:lumMod val="102000"/>
+                <a:tint val="94000"/>
+              </a:schemeClr>
+            </a:gs>
+            <a:gs pos="50000">
+              <a:schemeClr val="phClr">
+                <a:satMod val="110000"/>
+                <a:lumMod val="100000"/>
+                <a:shade val="100000"/>
+              </a:schemeClr>
+            </a:gs>
+            <a:gs pos="100000">
+              <a:schemeClr val="phClr">
+                <a:lumMod val="99000"/>
+                <a:satMod val="120000"/>
+                <a:shade val="78000"/>
+              </a:schemeClr>
+            </a:gs>
+          </a:gsLst>
+          <a:lin ang="5400000" scaled="0"/>
+        </a:gradFill>
+      </a:fillStyleLst>
+      <a:lnStyleLst>
+        <a:ln w="6350" cap="flat" cmpd="sng" algn="ctr">
+          <a:solidFill>
+            <a:schemeClr val="phClr"/>
+          </a:solidFill>
+          <a:prstDash val="solid"/>
+          <a:miter/>
+        </a:ln>
+        <a:ln w="12700" cap="flat" cmpd="sng" algn="ctr">
+          <a:solidFill>
+            <a:schemeClr val="phClr"/>
+          </a:solidFill>
+          <a:prstDash val="solid"/>
+          <a:miter/>
+        </a:ln>
+        <a:ln w="19050" cap="flat" cmpd="sng" algn="ctr">
+          <a:solidFill>
+            <a:schemeClr val="phClr"/>
+          </a:solidFill>
+          <a:prstDash val="solid"/>
+          <a:miter/>
+        </a:ln>
+      </a:lnStyleLst>
+      <a:effectStyleLst>
+        <a:effectStyle>
+          <a:effectLst/>
+        </a:effectStyle>
+        <a:effectStyle>
+          <a:effectLst/>
+        </a:effectStyle>
+        <a:effectStyle>
+          <a:effectLst>
+            <a:outerShdw blurRad="57150" dist="19050" dir="5400000" algn="ctr" rotWithShape="0">
+              <a:srgbClr val="000000">
+                <a:alpha val="63000"/>
+              </a:srgbClr>
+            </a:outerShdw>
+          </a:effectLst>
+        </a:effectStyle>
+      </a:effectStyleLst>
+      <a:bgFillStyleLst>
+        <a:solidFill>
+          <a:schemeClr val="phClr"/>
+        </a:solidFill>
+        <a:solidFill>
+          <a:schemeClr val="phClr">
+            <a:tint val="95000"/>
+            <a:satMod val="170000"/>
+          </a:schemeClr>
+        </a:solidFill>
+        <a:gradFill rotWithShape="1">
+          <a:gsLst>
+            <a:gs pos="0">
+              <a:schemeClr val="phClr">
+                <a:tint val="93000"/>
+                <a:satMod val="150000"/>
+                <a:shade val="98000"/>
+                <a:lumMod val="102000"/>
+              </a:schemeClr>
+            </a:gs>
+            <a:gs pos="50000">
+              <a:schemeClr val="phClr">
+                <a:tint val="98000"/>
+                <a:satMod val="130000"/>
+                <a:shade val="90000"/>
+                <a:lumMod val="103000"/>
+              </a:schemeClr>
+            </a:gs>
+            <a:gs pos="100000">
+              <a:schemeClr val="phClr">
+                <a:shade val="63000"/>
+                <a:satMod val="120000"/>
+              </a:schemeClr>
+            </a:gs>
+          </a:gsLst>
+          <a:lin ang="5400000" scaled="0"/>
+        </a:gradFill>
+      </a:bgFillStyleLst>
+    </a:fmtScheme>
+  </a:themeElements>
+</a:theme>
 </file>